--- a/ECCE-2025/OnlineCPSCalculation.pptx
+++ b/ECCE-2025/OnlineCPSCalculation.pptx
@@ -5,7 +5,7 @@
     <p:sldMasterId id="2147483648" r:id="rId1"/>
   </p:sldMasterIdLst>
   <p:notesMasterIdLst>
-    <p:notesMasterId r:id="rId22"/>
+    <p:notesMasterId r:id="rId24"/>
   </p:notesMasterIdLst>
   <p:sldIdLst>
     <p:sldId id="256" r:id="rId2"/>
@@ -28,6 +28,8 @@
     <p:sldId id="274" r:id="rId19"/>
     <p:sldId id="275" r:id="rId20"/>
     <p:sldId id="276" r:id="rId21"/>
+    <p:sldId id="277" r:id="rId22"/>
+    <p:sldId id="278" r:id="rId23"/>
   </p:sldIdLst>
   <p:sldSz cx="12192000" cy="6858000"/>
   <p:notesSz cx="6858000" cy="9144000"/>
@@ -216,7 +218,7 @@
           <a:p>
             <a:fld id="{CAC3C920-8099-44FB-877D-FFD02840B4C1}" type="datetimeFigureOut">
               <a:rPr lang="sv-SE" smtClean="0"/>
-              <a:t>2025-02-11</a:t>
+              <a:t>2025-02-14</a:t>
             </a:fld>
             <a:endParaRPr lang="sv-SE"/>
           </a:p>
@@ -1035,7 +1037,7 @@
           <a:p>
             <a:fld id="{1CCF258A-C4AC-452A-B440-6EC022A8E4C9}" type="datetimeFigureOut">
               <a:rPr lang="sv-SE" smtClean="0"/>
-              <a:t>2025-02-11</a:t>
+              <a:t>2025-02-14</a:t>
             </a:fld>
             <a:endParaRPr lang="sv-SE"/>
           </a:p>
@@ -1205,7 +1207,7 @@
           <a:p>
             <a:fld id="{1CCF258A-C4AC-452A-B440-6EC022A8E4C9}" type="datetimeFigureOut">
               <a:rPr lang="sv-SE" smtClean="0"/>
-              <a:t>2025-02-11</a:t>
+              <a:t>2025-02-14</a:t>
             </a:fld>
             <a:endParaRPr lang="sv-SE"/>
           </a:p>
@@ -1385,7 +1387,7 @@
           <a:p>
             <a:fld id="{1CCF258A-C4AC-452A-B440-6EC022A8E4C9}" type="datetimeFigureOut">
               <a:rPr lang="sv-SE" smtClean="0"/>
-              <a:t>2025-02-11</a:t>
+              <a:t>2025-02-14</a:t>
             </a:fld>
             <a:endParaRPr lang="sv-SE"/>
           </a:p>
@@ -1555,7 +1557,7 @@
           <a:p>
             <a:fld id="{1CCF258A-C4AC-452A-B440-6EC022A8E4C9}" type="datetimeFigureOut">
               <a:rPr lang="sv-SE" smtClean="0"/>
-              <a:t>2025-02-11</a:t>
+              <a:t>2025-02-14</a:t>
             </a:fld>
             <a:endParaRPr lang="sv-SE"/>
           </a:p>
@@ -1801,7 +1803,7 @@
           <a:p>
             <a:fld id="{1CCF258A-C4AC-452A-B440-6EC022A8E4C9}" type="datetimeFigureOut">
               <a:rPr lang="sv-SE" smtClean="0"/>
-              <a:t>2025-02-11</a:t>
+              <a:t>2025-02-14</a:t>
             </a:fld>
             <a:endParaRPr lang="sv-SE"/>
           </a:p>
@@ -2033,7 +2035,7 @@
           <a:p>
             <a:fld id="{1CCF258A-C4AC-452A-B440-6EC022A8E4C9}" type="datetimeFigureOut">
               <a:rPr lang="sv-SE" smtClean="0"/>
-              <a:t>2025-02-11</a:t>
+              <a:t>2025-02-14</a:t>
             </a:fld>
             <a:endParaRPr lang="sv-SE"/>
           </a:p>
@@ -2400,7 +2402,7 @@
           <a:p>
             <a:fld id="{1CCF258A-C4AC-452A-B440-6EC022A8E4C9}" type="datetimeFigureOut">
               <a:rPr lang="sv-SE" smtClean="0"/>
-              <a:t>2025-02-11</a:t>
+              <a:t>2025-02-14</a:t>
             </a:fld>
             <a:endParaRPr lang="sv-SE"/>
           </a:p>
@@ -2518,7 +2520,7 @@
           <a:p>
             <a:fld id="{1CCF258A-C4AC-452A-B440-6EC022A8E4C9}" type="datetimeFigureOut">
               <a:rPr lang="sv-SE" smtClean="0"/>
-              <a:t>2025-02-11</a:t>
+              <a:t>2025-02-14</a:t>
             </a:fld>
             <a:endParaRPr lang="sv-SE"/>
           </a:p>
@@ -2613,7 +2615,7 @@
           <a:p>
             <a:fld id="{1CCF258A-C4AC-452A-B440-6EC022A8E4C9}" type="datetimeFigureOut">
               <a:rPr lang="sv-SE" smtClean="0"/>
-              <a:t>2025-02-11</a:t>
+              <a:t>2025-02-14</a:t>
             </a:fld>
             <a:endParaRPr lang="sv-SE"/>
           </a:p>
@@ -2890,7 +2892,7 @@
           <a:p>
             <a:fld id="{1CCF258A-C4AC-452A-B440-6EC022A8E4C9}" type="datetimeFigureOut">
               <a:rPr lang="sv-SE" smtClean="0"/>
-              <a:t>2025-02-11</a:t>
+              <a:t>2025-02-14</a:t>
             </a:fld>
             <a:endParaRPr lang="sv-SE"/>
           </a:p>
@@ -3143,7 +3145,7 @@
           <a:p>
             <a:fld id="{1CCF258A-C4AC-452A-B440-6EC022A8E4C9}" type="datetimeFigureOut">
               <a:rPr lang="sv-SE" smtClean="0"/>
-              <a:t>2025-02-11</a:t>
+              <a:t>2025-02-14</a:t>
             </a:fld>
             <a:endParaRPr lang="sv-SE"/>
           </a:p>
@@ -3356,7 +3358,7 @@
           <a:p>
             <a:fld id="{1CCF258A-C4AC-452A-B440-6EC022A8E4C9}" type="datetimeFigureOut">
               <a:rPr lang="sv-SE" smtClean="0"/>
-              <a:t>2025-02-11</a:t>
+              <a:t>2025-02-14</a:t>
             </a:fld>
             <a:endParaRPr lang="sv-SE"/>
           </a:p>
@@ -7463,7 +7465,25 @@
                         <a:rPr lang="en-US" b="0" i="1" smtClean="0">
                           <a:latin typeface="Cambria Math" panose="02040503050406030204" pitchFamily="18" charset="0"/>
                         </a:rPr>
-                        <m:t>=0.5</m:t>
+                        <m:t>=</m:t>
+                      </m:r>
+                      <m:r>
+                        <a:rPr lang="en-US" b="0" i="1" smtClean="0">
+                          <a:latin typeface="Cambria Math" panose="02040503050406030204" pitchFamily="18" charset="0"/>
+                        </a:rPr>
+                        <m:t>0</m:t>
+                      </m:r>
+                      <m:r>
+                        <a:rPr lang="en-US" b="0" i="1" smtClean="0">
+                          <a:latin typeface="Cambria Math" panose="02040503050406030204" pitchFamily="18" charset="0"/>
+                        </a:rPr>
+                        <m:t>.</m:t>
+                      </m:r>
+                      <m:r>
+                        <a:rPr lang="en-US" b="0" i="1" smtClean="0">
+                          <a:latin typeface="Cambria Math" panose="02040503050406030204" pitchFamily="18" charset="0"/>
+                        </a:rPr>
+                        <m:t>5</m:t>
                       </m:r>
                     </m:oMath>
                   </m:oMathPara>
@@ -7512,8 +7532,8 @@
           </p:sp>
         </mc:Fallback>
       </mc:AlternateContent>
-      <mc:AlternateContent xmlns:mc="http://schemas.openxmlformats.org/markup-compatibility/2006" xmlns:a14="http://schemas.microsoft.com/office/drawing/2010/main">
-        <mc:Choice Requires="a14">
+      <mc:AlternateContent xmlns:mc="http://schemas.openxmlformats.org/markup-compatibility/2006">
+        <mc:Choice xmlns:a14="http://schemas.microsoft.com/office/drawing/2010/main" Requires="a14">
           <p:sp>
             <p:nvSpPr>
               <p:cNvPr id="35" name="TextBox 34"/>
@@ -7522,7 +7542,7 @@
             </p:nvSpPr>
             <p:spPr>
               <a:xfrm>
-                <a:off x="10023184" y="4457590"/>
+                <a:off x="10054871" y="4424577"/>
                 <a:ext cx="1355154" cy="369332"/>
               </a:xfrm>
               <a:prstGeom prst="rect">
@@ -7553,7 +7573,13 @@
                         <a:rPr lang="en-US" b="0" i="1" smtClean="0">
                           <a:latin typeface="Cambria Math" panose="02040503050406030204" pitchFamily="18" charset="0"/>
                         </a:rPr>
-                        <m:t>=1</m:t>
+                        <m:t>=</m:t>
+                      </m:r>
+                      <m:r>
+                        <a:rPr lang="en-US" b="0" i="1" smtClean="0">
+                          <a:latin typeface="Cambria Math" panose="02040503050406030204" pitchFamily="18" charset="0"/>
+                        </a:rPr>
+                        <m:t>1</m:t>
                       </m:r>
                     </m:oMath>
                   </m:oMathPara>
@@ -7563,7 +7589,7 @@
             </p:txBody>
           </p:sp>
         </mc:Choice>
-        <mc:Fallback xmlns="">
+        <mc:Fallback>
           <p:sp>
             <p:nvSpPr>
               <p:cNvPr id="35" name="TextBox 34"/>
@@ -7574,7 +7600,7 @@
             </p:nvSpPr>
             <p:spPr>
               <a:xfrm>
-                <a:off x="10023184" y="4457590"/>
+                <a:off x="10054871" y="4424577"/>
                 <a:ext cx="1355154" cy="369332"/>
               </a:xfrm>
               <a:prstGeom prst="rect">
@@ -7643,7 +7669,25 @@
                         <a:rPr lang="en-US" b="0" i="1" smtClean="0">
                           <a:latin typeface="Cambria Math" panose="02040503050406030204" pitchFamily="18" charset="0"/>
                         </a:rPr>
-                        <m:t>=0.75</m:t>
+                        <m:t>=</m:t>
+                      </m:r>
+                      <m:r>
+                        <a:rPr lang="en-US" b="0" i="1" smtClean="0">
+                          <a:latin typeface="Cambria Math" panose="02040503050406030204" pitchFamily="18" charset="0"/>
+                        </a:rPr>
+                        <m:t>0</m:t>
+                      </m:r>
+                      <m:r>
+                        <a:rPr lang="en-US" b="0" i="1" smtClean="0">
+                          <a:latin typeface="Cambria Math" panose="02040503050406030204" pitchFamily="18" charset="0"/>
+                        </a:rPr>
+                        <m:t>.</m:t>
+                      </m:r>
+                      <m:r>
+                        <a:rPr lang="en-US" b="0" i="1" smtClean="0">
+                          <a:latin typeface="Cambria Math" panose="02040503050406030204" pitchFamily="18" charset="0"/>
+                        </a:rPr>
+                        <m:t>75</m:t>
                       </m:r>
                     </m:oMath>
                   </m:oMathPara>
@@ -7757,7 +7801,25 @@
                         <a:rPr lang="en-US" b="0" i="1" smtClean="0">
                           <a:latin typeface="Cambria Math" panose="02040503050406030204" pitchFamily="18" charset="0"/>
                         </a:rPr>
-                        <m:t>=0.25</m:t>
+                        <m:t>=</m:t>
+                      </m:r>
+                      <m:r>
+                        <a:rPr lang="en-US" b="0" i="1" smtClean="0">
+                          <a:latin typeface="Cambria Math" panose="02040503050406030204" pitchFamily="18" charset="0"/>
+                        </a:rPr>
+                        <m:t>0</m:t>
+                      </m:r>
+                      <m:r>
+                        <a:rPr lang="en-US" b="0" i="1" smtClean="0">
+                          <a:latin typeface="Cambria Math" panose="02040503050406030204" pitchFamily="18" charset="0"/>
+                        </a:rPr>
+                        <m:t>.</m:t>
+                      </m:r>
+                      <m:r>
+                        <a:rPr lang="en-US" b="0" i="1" smtClean="0">
+                          <a:latin typeface="Cambria Math" panose="02040503050406030204" pitchFamily="18" charset="0"/>
+                        </a:rPr>
+                        <m:t>25</m:t>
                       </m:r>
                     </m:oMath>
                   </m:oMathPara>
@@ -7830,8 +7892,8 @@
           </a:prstGeom>
         </p:spPr>
       </p:pic>
-      <mc:AlternateContent xmlns:mc="http://schemas.openxmlformats.org/markup-compatibility/2006" xmlns:a14="http://schemas.microsoft.com/office/drawing/2010/main">
-        <mc:Choice Requires="a14">
+      <mc:AlternateContent xmlns:mc="http://schemas.openxmlformats.org/markup-compatibility/2006">
+        <mc:Choice xmlns:a14="http://schemas.microsoft.com/office/drawing/2010/main" Requires="a14">
           <p:sp>
             <p:nvSpPr>
               <p:cNvPr id="40" name="TextBox 39"/>
@@ -7840,7 +7902,7 @@
             </p:nvSpPr>
             <p:spPr>
               <a:xfrm>
-                <a:off x="9149887" y="-28252"/>
+                <a:off x="9038745" y="-74083"/>
                 <a:ext cx="1355154" cy="369332"/>
               </a:xfrm>
               <a:prstGeom prst="rect">
@@ -7871,7 +7933,13 @@
                         <a:rPr lang="en-US" b="0" i="1" smtClean="0">
                           <a:latin typeface="Cambria Math" panose="02040503050406030204" pitchFamily="18" charset="0"/>
                         </a:rPr>
-                        <m:t>=0</m:t>
+                        <m:t>=</m:t>
+                      </m:r>
+                      <m:r>
+                        <a:rPr lang="en-US" b="0" i="1" smtClean="0">
+                          <a:latin typeface="Cambria Math" panose="02040503050406030204" pitchFamily="18" charset="0"/>
+                        </a:rPr>
+                        <m:t>0</m:t>
                       </m:r>
                     </m:oMath>
                   </m:oMathPara>
@@ -7881,7 +7949,7 @@
             </p:txBody>
           </p:sp>
         </mc:Choice>
-        <mc:Fallback xmlns="">
+        <mc:Fallback>
           <p:sp>
             <p:nvSpPr>
               <p:cNvPr id="40" name="TextBox 39"/>
@@ -7892,7 +7960,7 @@
             </p:nvSpPr>
             <p:spPr>
               <a:xfrm>
-                <a:off x="9149887" y="-28252"/>
+                <a:off x="9038745" y="-74083"/>
                 <a:ext cx="1355154" cy="369332"/>
               </a:xfrm>
               <a:prstGeom prst="rect">
@@ -8239,8 +8307,8 @@
           </a:p>
         </p:txBody>
       </p:sp>
-      <mc:AlternateContent xmlns:mc="http://schemas.openxmlformats.org/markup-compatibility/2006" xmlns:a14="http://schemas.microsoft.com/office/drawing/2010/main">
-        <mc:Choice Requires="a14">
+      <mc:AlternateContent xmlns:mc="http://schemas.openxmlformats.org/markup-compatibility/2006">
+        <mc:Choice xmlns:a14="http://schemas.microsoft.com/office/drawing/2010/main" Requires="a14">
           <p:sp>
             <p:nvSpPr>
               <p:cNvPr id="41" name="TextBox 40"/>
@@ -8740,7 +8808,7 @@
             </p:txBody>
           </p:sp>
         </mc:Choice>
-        <mc:Fallback xmlns="">
+        <mc:Fallback>
           <p:sp>
             <p:nvSpPr>
               <p:cNvPr id="41" name="TextBox 40"/>
@@ -8769,7 +8837,7 @@
               <a:lstStyle/>
               <a:p>
                 <a:r>
-                  <a:rPr lang="en-US">
+                  <a:rPr lang="sv-SE">
                     <a:noFill/>
                   </a:rPr>
                   <a:t> </a:t>
@@ -15437,8 +15505,8 @@
         </p:blipFill>
         <p:spPr>
           <a:xfrm>
-            <a:off x="439823" y="1786338"/>
-            <a:ext cx="5960977" cy="4216965"/>
+            <a:off x="658900" y="1901903"/>
+            <a:ext cx="5389476" cy="3812669"/>
           </a:xfrm>
           <a:prstGeom prst="rect">
             <a:avLst/>
@@ -15461,7 +15529,7 @@
         </p:blipFill>
         <p:spPr>
           <a:xfrm>
-            <a:off x="6550240" y="1989438"/>
+            <a:off x="6208454" y="1979913"/>
             <a:ext cx="5145346" cy="3639965"/>
           </a:xfrm>
           <a:prstGeom prst="rect">
@@ -16319,8 +16387,8 @@
         </p:blipFill>
         <p:spPr>
           <a:xfrm>
-            <a:off x="209550" y="1622194"/>
-            <a:ext cx="5886450" cy="4164243"/>
+            <a:off x="209550" y="1622195"/>
+            <a:ext cx="5553075" cy="3928404"/>
           </a:xfrm>
           <a:prstGeom prst="rect">
             <a:avLst/>
@@ -16343,8 +16411,8 @@
         </p:blipFill>
         <p:spPr>
           <a:xfrm>
-            <a:off x="6406973" y="2057400"/>
-            <a:ext cx="4946827" cy="3499527"/>
+            <a:off x="6146711" y="1622195"/>
+            <a:ext cx="5553075" cy="3928404"/>
           </a:xfrm>
           <a:prstGeom prst="rect">
             <a:avLst/>
@@ -16355,6 +16423,9277 @@
     <p:extLst>
       <p:ext uri="{BB962C8B-B14F-4D97-AF65-F5344CB8AC3E}">
         <p14:creationId xmlns:p14="http://schemas.microsoft.com/office/powerpoint/2010/main" val="610714819"/>
+      </p:ext>
+    </p:extLst>
+  </p:cSld>
+  <p:clrMapOvr>
+    <a:masterClrMapping/>
+  </p:clrMapOvr>
+</p:sld>
+</file>
+
+<file path=ppt/slides/slide21.xml><?xml version="1.0" encoding="utf-8"?>
+<p:sld xmlns:a="http://schemas.openxmlformats.org/drawingml/2006/main" xmlns:r="http://schemas.openxmlformats.org/officeDocument/2006/relationships" xmlns:p="http://schemas.openxmlformats.org/presentationml/2006/main">
+  <p:cSld>
+    <p:spTree>
+      <p:nvGrpSpPr>
+        <p:cNvPr id="1" name=""/>
+        <p:cNvGrpSpPr/>
+        <p:nvPr/>
+      </p:nvGrpSpPr>
+      <p:grpSpPr>
+        <a:xfrm>
+          <a:off x="0" y="0"/>
+          <a:ext cx="0" cy="0"/>
+          <a:chOff x="0" y="0"/>
+          <a:chExt cx="0" cy="0"/>
+        </a:xfrm>
+      </p:grpSpPr>
+      <p:cxnSp>
+        <p:nvCxnSpPr>
+          <p:cNvPr id="4" name="Straight Arrow Connector 3"/>
+          <p:cNvCxnSpPr/>
+          <p:nvPr/>
+        </p:nvCxnSpPr>
+        <p:spPr>
+          <a:xfrm flipV="1">
+            <a:off x="1606439" y="3828919"/>
+            <a:ext cx="956635" cy="4879"/>
+          </a:xfrm>
+          <a:prstGeom prst="straightConnector1">
+            <a:avLst/>
+          </a:prstGeom>
+          <a:ln w="25400">
+            <a:solidFill>
+              <a:srgbClr val="C00000"/>
+            </a:solidFill>
+            <a:tailEnd type="triangle"/>
+          </a:ln>
+        </p:spPr>
+        <p:style>
+          <a:lnRef idx="1">
+            <a:schemeClr val="accent1"/>
+          </a:lnRef>
+          <a:fillRef idx="0">
+            <a:schemeClr val="accent1"/>
+          </a:fillRef>
+          <a:effectRef idx="0">
+            <a:schemeClr val="accent1"/>
+          </a:effectRef>
+          <a:fontRef idx="minor">
+            <a:schemeClr val="tx1"/>
+          </a:fontRef>
+        </p:style>
+      </p:cxnSp>
+      <p:cxnSp>
+        <p:nvCxnSpPr>
+          <p:cNvPr id="5" name="Straight Arrow Connector 4"/>
+          <p:cNvCxnSpPr/>
+          <p:nvPr/>
+        </p:nvCxnSpPr>
+        <p:spPr>
+          <a:xfrm flipH="1">
+            <a:off x="964518" y="3828919"/>
+            <a:ext cx="641921" cy="305138"/>
+          </a:xfrm>
+          <a:prstGeom prst="straightConnector1">
+            <a:avLst/>
+          </a:prstGeom>
+          <a:ln w="25400">
+            <a:solidFill>
+              <a:schemeClr val="accent6"/>
+            </a:solidFill>
+            <a:tailEnd type="triangle"/>
+          </a:ln>
+        </p:spPr>
+        <p:style>
+          <a:lnRef idx="1">
+            <a:schemeClr val="accent1"/>
+          </a:lnRef>
+          <a:fillRef idx="0">
+            <a:schemeClr val="accent1"/>
+          </a:fillRef>
+          <a:effectRef idx="0">
+            <a:schemeClr val="accent1"/>
+          </a:effectRef>
+          <a:fontRef idx="minor">
+            <a:schemeClr val="tx1"/>
+          </a:fontRef>
+        </p:style>
+      </p:cxnSp>
+      <p:cxnSp>
+        <p:nvCxnSpPr>
+          <p:cNvPr id="6" name="Straight Arrow Connector 5"/>
+          <p:cNvCxnSpPr/>
+          <p:nvPr/>
+        </p:nvCxnSpPr>
+        <p:spPr>
+          <a:xfrm flipH="1" flipV="1">
+            <a:off x="1536466" y="3319087"/>
+            <a:ext cx="69974" cy="496200"/>
+          </a:xfrm>
+          <a:prstGeom prst="straightConnector1">
+            <a:avLst/>
+          </a:prstGeom>
+          <a:ln w="25400">
+            <a:solidFill>
+              <a:schemeClr val="accent5"/>
+            </a:solidFill>
+            <a:tailEnd type="triangle"/>
+          </a:ln>
+        </p:spPr>
+        <p:style>
+          <a:lnRef idx="1">
+            <a:schemeClr val="accent1"/>
+          </a:lnRef>
+          <a:fillRef idx="0">
+            <a:schemeClr val="accent1"/>
+          </a:fillRef>
+          <a:effectRef idx="0">
+            <a:schemeClr val="accent1"/>
+          </a:effectRef>
+          <a:fontRef idx="minor">
+            <a:schemeClr val="tx1"/>
+          </a:fontRef>
+        </p:style>
+      </p:cxnSp>
+      <p:sp>
+        <p:nvSpPr>
+          <p:cNvPr id="7" name="TextBox 6"/>
+          <p:cNvSpPr txBox="1"/>
+          <p:nvPr/>
+        </p:nvSpPr>
+        <p:spPr>
+          <a:xfrm>
+            <a:off x="1363481" y="2949755"/>
+            <a:ext cx="350520" cy="369332"/>
+          </a:xfrm>
+          <a:prstGeom prst="rect">
+            <a:avLst/>
+          </a:prstGeom>
+          <a:noFill/>
+        </p:spPr>
+        <p:txBody>
+          <a:bodyPr wrap="square" rtlCol="0">
+            <a:spAutoFit/>
+          </a:bodyPr>
+          <a:lstStyle/>
+          <a:p>
+            <a:r>
+              <a:rPr lang="en-US" dirty="0"/>
+              <a:t>B</a:t>
+            </a:r>
+            <a:endParaRPr lang="sv-SE" dirty="0"/>
+          </a:p>
+        </p:txBody>
+      </p:sp>
+      <p:sp>
+        <p:nvSpPr>
+          <p:cNvPr id="8" name="Arc 7"/>
+          <p:cNvSpPr/>
+          <p:nvPr/>
+        </p:nvSpPr>
+        <p:spPr>
+          <a:xfrm rot="2502697">
+            <a:off x="1503142" y="3689452"/>
+            <a:ext cx="402846" cy="159782"/>
+          </a:xfrm>
+          <a:prstGeom prst="arc">
+            <a:avLst>
+              <a:gd name="adj1" fmla="val 11340923"/>
+              <a:gd name="adj2" fmla="val 20042121"/>
+            </a:avLst>
+          </a:prstGeom>
+          <a:ln>
+            <a:solidFill>
+              <a:schemeClr val="tx1"/>
+            </a:solidFill>
+          </a:ln>
+        </p:spPr>
+        <p:style>
+          <a:lnRef idx="1">
+            <a:schemeClr val="accent1"/>
+          </a:lnRef>
+          <a:fillRef idx="0">
+            <a:schemeClr val="accent1"/>
+          </a:fillRef>
+          <a:effectRef idx="0">
+            <a:schemeClr val="accent1"/>
+          </a:effectRef>
+          <a:fontRef idx="minor">
+            <a:schemeClr val="tx1"/>
+          </a:fontRef>
+        </p:style>
+        <p:txBody>
+          <a:bodyPr rtlCol="0" anchor="ctr"/>
+          <a:lstStyle/>
+          <a:p>
+            <a:pPr algn="ctr"/>
+            <a:endParaRPr lang="sv-SE"/>
+          </a:p>
+        </p:txBody>
+      </p:sp>
+      <mc:AlternateContent xmlns:mc="http://schemas.openxmlformats.org/markup-compatibility/2006">
+        <mc:Choice xmlns:a14="http://schemas.microsoft.com/office/drawing/2010/main" Requires="a14">
+          <p:sp>
+            <p:nvSpPr>
+              <p:cNvPr id="9" name="TextBox 8"/>
+              <p:cNvSpPr txBox="1"/>
+              <p:nvPr/>
+            </p:nvSpPr>
+            <p:spPr>
+              <a:xfrm>
+                <a:off x="1571453" y="3284442"/>
+                <a:ext cx="601661" cy="369332"/>
+              </a:xfrm>
+              <a:prstGeom prst="rect">
+                <a:avLst/>
+              </a:prstGeom>
+              <a:noFill/>
+            </p:spPr>
+            <p:txBody>
+              <a:bodyPr wrap="square" rtlCol="0">
+                <a:spAutoFit/>
+              </a:bodyPr>
+              <a:lstStyle/>
+              <a:p>
+                <a:pPr/>
+                <a14:m>
+                  <m:oMathPara xmlns:m="http://schemas.openxmlformats.org/officeDocument/2006/math">
+                    <m:oMathParaPr>
+                      <m:jc m:val="centerGroup"/>
+                    </m:oMathParaPr>
+                    <m:oMath xmlns:m="http://schemas.openxmlformats.org/officeDocument/2006/math">
+                      <m:sSub>
+                        <m:sSubPr>
+                          <m:ctrlPr>
+                            <a:rPr lang="en-US" b="0" i="1" smtClean="0">
+                              <a:latin typeface="Cambria Math" panose="02040503050406030204" pitchFamily="18" charset="0"/>
+                            </a:rPr>
+                          </m:ctrlPr>
+                        </m:sSubPr>
+                        <m:e>
+                          <m:r>
+                            <a:rPr lang="en-US" b="0" i="1" smtClean="0">
+                              <a:latin typeface="Cambria Math" panose="02040503050406030204" pitchFamily="18" charset="0"/>
+                            </a:rPr>
+                            <m:t>𝜙</m:t>
+                          </m:r>
+                        </m:e>
+                        <m:sub>
+                          <m:r>
+                            <a:rPr lang="en-US" b="0" i="1" smtClean="0">
+                              <a:latin typeface="Cambria Math" panose="02040503050406030204" pitchFamily="18" charset="0"/>
+                            </a:rPr>
+                            <m:t>𝐶𝐵</m:t>
+                          </m:r>
+                        </m:sub>
+                      </m:sSub>
+                    </m:oMath>
+                  </m:oMathPara>
+                </a14:m>
+                <a:endParaRPr lang="sv-SE" dirty="0"/>
+              </a:p>
+            </p:txBody>
+          </p:sp>
+        </mc:Choice>
+        <mc:Fallback>
+          <p:sp>
+            <p:nvSpPr>
+              <p:cNvPr id="9" name="TextBox 8"/>
+              <p:cNvSpPr txBox="1">
+                <a:spLocks noRot="1" noChangeAspect="1" noMove="1" noResize="1" noEditPoints="1" noAdjustHandles="1" noChangeArrowheads="1" noChangeShapeType="1" noTextEdit="1"/>
+              </p:cNvSpPr>
+              <p:nvPr/>
+            </p:nvSpPr>
+            <p:spPr>
+              <a:xfrm>
+                <a:off x="1571453" y="3284442"/>
+                <a:ext cx="601661" cy="369332"/>
+              </a:xfrm>
+              <a:prstGeom prst="rect">
+                <a:avLst/>
+              </a:prstGeom>
+              <a:blipFill>
+                <a:blip r:embed="rId2"/>
+                <a:stretch>
+                  <a:fillRect b="-13333"/>
+                </a:stretch>
+              </a:blipFill>
+            </p:spPr>
+            <p:txBody>
+              <a:bodyPr/>
+              <a:lstStyle/>
+              <a:p>
+                <a:r>
+                  <a:rPr lang="sv-SE">
+                    <a:noFill/>
+                  </a:rPr>
+                  <a:t> </a:t>
+                </a:r>
+              </a:p>
+            </p:txBody>
+          </p:sp>
+        </mc:Fallback>
+      </mc:AlternateContent>
+      <p:sp>
+        <p:nvSpPr>
+          <p:cNvPr id="10" name="TextBox 9"/>
+          <p:cNvSpPr txBox="1"/>
+          <p:nvPr/>
+        </p:nvSpPr>
+        <p:spPr>
+          <a:xfrm>
+            <a:off x="789258" y="4129795"/>
+            <a:ext cx="350520" cy="369332"/>
+          </a:xfrm>
+          <a:prstGeom prst="rect">
+            <a:avLst/>
+          </a:prstGeom>
+          <a:noFill/>
+        </p:spPr>
+        <p:txBody>
+          <a:bodyPr wrap="square" rtlCol="0">
+            <a:spAutoFit/>
+          </a:bodyPr>
+          <a:lstStyle/>
+          <a:p>
+            <a:r>
+              <a:rPr lang="en-US" dirty="0"/>
+              <a:t>C</a:t>
+            </a:r>
+            <a:endParaRPr lang="sv-SE" dirty="0"/>
+          </a:p>
+        </p:txBody>
+      </p:sp>
+      <p:sp>
+        <p:nvSpPr>
+          <p:cNvPr id="11" name="Arc 10"/>
+          <p:cNvSpPr/>
+          <p:nvPr/>
+        </p:nvSpPr>
+        <p:spPr>
+          <a:xfrm rot="9696706">
+            <a:off x="1316215" y="3814540"/>
+            <a:ext cx="402846" cy="159782"/>
+          </a:xfrm>
+          <a:prstGeom prst="arc">
+            <a:avLst>
+              <a:gd name="adj1" fmla="val 11340923"/>
+              <a:gd name="adj2" fmla="val 21091131"/>
+            </a:avLst>
+          </a:prstGeom>
+          <a:ln>
+            <a:solidFill>
+              <a:schemeClr val="tx1"/>
+            </a:solidFill>
+          </a:ln>
+        </p:spPr>
+        <p:style>
+          <a:lnRef idx="1">
+            <a:schemeClr val="accent1"/>
+          </a:lnRef>
+          <a:fillRef idx="0">
+            <a:schemeClr val="accent1"/>
+          </a:fillRef>
+          <a:effectRef idx="0">
+            <a:schemeClr val="accent1"/>
+          </a:effectRef>
+          <a:fontRef idx="minor">
+            <a:schemeClr val="tx1"/>
+          </a:fontRef>
+        </p:style>
+        <p:txBody>
+          <a:bodyPr rtlCol="0" anchor="ctr"/>
+          <a:lstStyle/>
+          <a:p>
+            <a:pPr algn="ctr"/>
+            <a:endParaRPr lang="sv-SE"/>
+          </a:p>
+        </p:txBody>
+      </p:sp>
+      <mc:AlternateContent xmlns:mc="http://schemas.openxmlformats.org/markup-compatibility/2006">
+        <mc:Choice xmlns:a14="http://schemas.microsoft.com/office/drawing/2010/main" Requires="a14">
+          <p:sp>
+            <p:nvSpPr>
+              <p:cNvPr id="12" name="TextBox 11"/>
+              <p:cNvSpPr txBox="1"/>
+              <p:nvPr/>
+            </p:nvSpPr>
+            <p:spPr>
+              <a:xfrm>
+                <a:off x="1473171" y="3871492"/>
+                <a:ext cx="601661" cy="369332"/>
+              </a:xfrm>
+              <a:prstGeom prst="rect">
+                <a:avLst/>
+              </a:prstGeom>
+              <a:noFill/>
+            </p:spPr>
+            <p:txBody>
+              <a:bodyPr wrap="square" rtlCol="0">
+                <a:spAutoFit/>
+              </a:bodyPr>
+              <a:lstStyle/>
+              <a:p>
+                <a:pPr/>
+                <a14:m>
+                  <m:oMathPara xmlns:m="http://schemas.openxmlformats.org/officeDocument/2006/math">
+                    <m:oMathParaPr>
+                      <m:jc m:val="centerGroup"/>
+                    </m:oMathParaPr>
+                    <m:oMath xmlns:m="http://schemas.openxmlformats.org/officeDocument/2006/math">
+                      <m:sSub>
+                        <m:sSubPr>
+                          <m:ctrlPr>
+                            <a:rPr lang="en-US" b="0" i="1" smtClean="0">
+                              <a:latin typeface="Cambria Math" panose="02040503050406030204" pitchFamily="18" charset="0"/>
+                            </a:rPr>
+                          </m:ctrlPr>
+                        </m:sSubPr>
+                        <m:e>
+                          <m:r>
+                            <a:rPr lang="en-US" b="0" i="1" smtClean="0">
+                              <a:latin typeface="Cambria Math" panose="02040503050406030204" pitchFamily="18" charset="0"/>
+                            </a:rPr>
+                            <m:t>−</m:t>
+                          </m:r>
+                          <m:r>
+                            <a:rPr lang="en-US" b="0" i="1" smtClean="0">
+                              <a:latin typeface="Cambria Math" panose="02040503050406030204" pitchFamily="18" charset="0"/>
+                            </a:rPr>
+                            <m:t>𝜙</m:t>
+                          </m:r>
+                        </m:e>
+                        <m:sub>
+                          <m:r>
+                            <a:rPr lang="en-US" b="0" i="1" smtClean="0">
+                              <a:latin typeface="Cambria Math" panose="02040503050406030204" pitchFamily="18" charset="0"/>
+                            </a:rPr>
+                            <m:t>𝐶𝐶</m:t>
+                          </m:r>
+                        </m:sub>
+                      </m:sSub>
+                    </m:oMath>
+                  </m:oMathPara>
+                </a14:m>
+                <a:endParaRPr lang="sv-SE" dirty="0"/>
+              </a:p>
+            </p:txBody>
+          </p:sp>
+        </mc:Choice>
+        <mc:Fallback>
+          <p:sp>
+            <p:nvSpPr>
+              <p:cNvPr id="12" name="TextBox 11"/>
+              <p:cNvSpPr txBox="1">
+                <a:spLocks noRot="1" noChangeAspect="1" noMove="1" noResize="1" noEditPoints="1" noAdjustHandles="1" noChangeArrowheads="1" noChangeShapeType="1" noTextEdit="1"/>
+              </p:cNvSpPr>
+              <p:nvPr/>
+            </p:nvSpPr>
+            <p:spPr>
+              <a:xfrm>
+                <a:off x="1473171" y="3871492"/>
+                <a:ext cx="601661" cy="369332"/>
+              </a:xfrm>
+              <a:prstGeom prst="rect">
+                <a:avLst/>
+              </a:prstGeom>
+              <a:blipFill>
+                <a:blip r:embed="rId3"/>
+                <a:stretch>
+                  <a:fillRect r="-14286" b="-11475"/>
+                </a:stretch>
+              </a:blipFill>
+            </p:spPr>
+            <p:txBody>
+              <a:bodyPr/>
+              <a:lstStyle/>
+              <a:p>
+                <a:r>
+                  <a:rPr lang="sv-SE">
+                    <a:noFill/>
+                  </a:rPr>
+                  <a:t> </a:t>
+                </a:r>
+              </a:p>
+            </p:txBody>
+          </p:sp>
+        </mc:Fallback>
+      </mc:AlternateContent>
+      <p:sp>
+        <p:nvSpPr>
+          <p:cNvPr id="27" name="TextBox 26"/>
+          <p:cNvSpPr txBox="1"/>
+          <p:nvPr/>
+        </p:nvSpPr>
+        <p:spPr>
+          <a:xfrm>
+            <a:off x="2554732" y="3597821"/>
+            <a:ext cx="350520" cy="369332"/>
+          </a:xfrm>
+          <a:prstGeom prst="rect">
+            <a:avLst/>
+          </a:prstGeom>
+          <a:noFill/>
+        </p:spPr>
+        <p:txBody>
+          <a:bodyPr wrap="square" rtlCol="0">
+            <a:spAutoFit/>
+          </a:bodyPr>
+          <a:lstStyle/>
+          <a:p>
+            <a:r>
+              <a:rPr lang="en-US" dirty="0" smtClean="0"/>
+              <a:t>A</a:t>
+            </a:r>
+            <a:endParaRPr lang="sv-SE" dirty="0"/>
+          </a:p>
+        </p:txBody>
+      </p:sp>
+      <p:cxnSp>
+        <p:nvCxnSpPr>
+          <p:cNvPr id="28" name="Straight Arrow Connector 27"/>
+          <p:cNvCxnSpPr/>
+          <p:nvPr/>
+        </p:nvCxnSpPr>
+        <p:spPr>
+          <a:xfrm flipV="1">
+            <a:off x="4806839" y="3596479"/>
+            <a:ext cx="711311" cy="283614"/>
+          </a:xfrm>
+          <a:prstGeom prst="straightConnector1">
+            <a:avLst/>
+          </a:prstGeom>
+          <a:ln w="25400">
+            <a:solidFill>
+              <a:srgbClr val="002060"/>
+            </a:solidFill>
+            <a:tailEnd type="triangle"/>
+          </a:ln>
+        </p:spPr>
+        <p:style>
+          <a:lnRef idx="1">
+            <a:schemeClr val="accent1"/>
+          </a:lnRef>
+          <a:fillRef idx="0">
+            <a:schemeClr val="accent1"/>
+          </a:fillRef>
+          <a:effectRef idx="0">
+            <a:schemeClr val="accent1"/>
+          </a:effectRef>
+          <a:fontRef idx="minor">
+            <a:schemeClr val="tx1"/>
+          </a:fontRef>
+        </p:style>
+      </p:cxnSp>
+      <p:cxnSp>
+        <p:nvCxnSpPr>
+          <p:cNvPr id="30" name="Straight Arrow Connector 29"/>
+          <p:cNvCxnSpPr/>
+          <p:nvPr/>
+        </p:nvCxnSpPr>
+        <p:spPr>
+          <a:xfrm flipH="1" flipV="1">
+            <a:off x="4476750" y="3338092"/>
+            <a:ext cx="330089" cy="558695"/>
+          </a:xfrm>
+          <a:prstGeom prst="straightConnector1">
+            <a:avLst/>
+          </a:prstGeom>
+          <a:ln w="25400">
+            <a:solidFill>
+              <a:srgbClr val="E622EB"/>
+            </a:solidFill>
+            <a:tailEnd type="triangle"/>
+          </a:ln>
+        </p:spPr>
+        <p:style>
+          <a:lnRef idx="1">
+            <a:schemeClr val="accent1"/>
+          </a:lnRef>
+          <a:fillRef idx="0">
+            <a:schemeClr val="accent1"/>
+          </a:fillRef>
+          <a:effectRef idx="0">
+            <a:schemeClr val="accent1"/>
+          </a:effectRef>
+          <a:fontRef idx="minor">
+            <a:schemeClr val="tx1"/>
+          </a:fontRef>
+        </p:style>
+      </p:cxnSp>
+      <p:cxnSp>
+        <p:nvCxnSpPr>
+          <p:cNvPr id="32" name="Straight Arrow Connector 31"/>
+          <p:cNvCxnSpPr/>
+          <p:nvPr/>
+        </p:nvCxnSpPr>
+        <p:spPr>
+          <a:xfrm flipH="1">
+            <a:off x="4476750" y="3869789"/>
+            <a:ext cx="340939" cy="441386"/>
+          </a:xfrm>
+          <a:prstGeom prst="straightConnector1">
+            <a:avLst/>
+          </a:prstGeom>
+          <a:ln w="25400">
+            <a:solidFill>
+              <a:srgbClr val="92D050"/>
+            </a:solidFill>
+            <a:tailEnd type="triangle"/>
+          </a:ln>
+        </p:spPr>
+        <p:style>
+          <a:lnRef idx="1">
+            <a:schemeClr val="accent1"/>
+          </a:lnRef>
+          <a:fillRef idx="0">
+            <a:schemeClr val="accent1"/>
+          </a:fillRef>
+          <a:effectRef idx="0">
+            <a:schemeClr val="accent1"/>
+          </a:effectRef>
+          <a:fontRef idx="minor">
+            <a:schemeClr val="tx1"/>
+          </a:fontRef>
+        </p:style>
+      </p:cxnSp>
+      <p:cxnSp>
+        <p:nvCxnSpPr>
+          <p:cNvPr id="35" name="Straight Arrow Connector 34"/>
+          <p:cNvCxnSpPr/>
+          <p:nvPr/>
+        </p:nvCxnSpPr>
+        <p:spPr>
+          <a:xfrm>
+            <a:off x="3911600" y="3880094"/>
+            <a:ext cx="2184400" cy="31096"/>
+          </a:xfrm>
+          <a:prstGeom prst="straightConnector1">
+            <a:avLst/>
+          </a:prstGeom>
+          <a:ln>
+            <a:solidFill>
+              <a:schemeClr val="tx1"/>
+            </a:solidFill>
+            <a:tailEnd type="triangle"/>
+          </a:ln>
+        </p:spPr>
+        <p:style>
+          <a:lnRef idx="1">
+            <a:schemeClr val="accent1"/>
+          </a:lnRef>
+          <a:fillRef idx="0">
+            <a:schemeClr val="accent1"/>
+          </a:fillRef>
+          <a:effectRef idx="0">
+            <a:schemeClr val="accent1"/>
+          </a:effectRef>
+          <a:fontRef idx="minor">
+            <a:schemeClr val="tx1"/>
+          </a:fontRef>
+        </p:style>
+      </p:cxnSp>
+      <p:cxnSp>
+        <p:nvCxnSpPr>
+          <p:cNvPr id="38" name="Straight Arrow Connector 37"/>
+          <p:cNvCxnSpPr/>
+          <p:nvPr/>
+        </p:nvCxnSpPr>
+        <p:spPr>
+          <a:xfrm flipV="1">
+            <a:off x="4806728" y="2781357"/>
+            <a:ext cx="111" cy="1505411"/>
+          </a:xfrm>
+          <a:prstGeom prst="straightConnector1">
+            <a:avLst/>
+          </a:prstGeom>
+          <a:ln>
+            <a:solidFill>
+              <a:schemeClr val="tx1"/>
+            </a:solidFill>
+            <a:tailEnd type="triangle"/>
+          </a:ln>
+        </p:spPr>
+        <p:style>
+          <a:lnRef idx="1">
+            <a:schemeClr val="accent1"/>
+          </a:lnRef>
+          <a:fillRef idx="0">
+            <a:schemeClr val="accent1"/>
+          </a:fillRef>
+          <a:effectRef idx="0">
+            <a:schemeClr val="accent1"/>
+          </a:effectRef>
+          <a:fontRef idx="minor">
+            <a:schemeClr val="tx1"/>
+          </a:fontRef>
+        </p:style>
+      </p:cxnSp>
+      <p:sp>
+        <p:nvSpPr>
+          <p:cNvPr id="46" name="Arc 45"/>
+          <p:cNvSpPr/>
+          <p:nvPr/>
+        </p:nvSpPr>
+        <p:spPr>
+          <a:xfrm rot="2502697">
+            <a:off x="4981221" y="3852057"/>
+            <a:ext cx="402846" cy="159782"/>
+          </a:xfrm>
+          <a:prstGeom prst="arc">
+            <a:avLst>
+              <a:gd name="adj1" fmla="val 11340923"/>
+              <a:gd name="adj2" fmla="val 17510468"/>
+            </a:avLst>
+          </a:prstGeom>
+          <a:ln>
+            <a:solidFill>
+              <a:schemeClr val="tx1"/>
+            </a:solidFill>
+          </a:ln>
+        </p:spPr>
+        <p:style>
+          <a:lnRef idx="1">
+            <a:schemeClr val="accent1"/>
+          </a:lnRef>
+          <a:fillRef idx="0">
+            <a:schemeClr val="accent1"/>
+          </a:fillRef>
+          <a:effectRef idx="0">
+            <a:schemeClr val="accent1"/>
+          </a:effectRef>
+          <a:fontRef idx="minor">
+            <a:schemeClr val="tx1"/>
+          </a:fontRef>
+        </p:style>
+        <p:txBody>
+          <a:bodyPr rtlCol="0" anchor="ctr"/>
+          <a:lstStyle/>
+          <a:p>
+            <a:pPr algn="ctr"/>
+            <a:endParaRPr lang="sv-SE"/>
+          </a:p>
+        </p:txBody>
+      </p:sp>
+      <mc:AlternateContent xmlns:mc="http://schemas.openxmlformats.org/markup-compatibility/2006">
+        <mc:Choice xmlns:a14="http://schemas.microsoft.com/office/drawing/2010/main" Requires="a14">
+          <p:sp>
+            <p:nvSpPr>
+              <p:cNvPr id="47" name="TextBox 46"/>
+              <p:cNvSpPr txBox="1"/>
+              <p:nvPr/>
+            </p:nvSpPr>
+            <p:spPr>
+              <a:xfrm>
+                <a:off x="5123101" y="3596479"/>
+                <a:ext cx="601661" cy="338554"/>
+              </a:xfrm>
+              <a:prstGeom prst="rect">
+                <a:avLst/>
+              </a:prstGeom>
+              <a:noFill/>
+            </p:spPr>
+            <p:txBody>
+              <a:bodyPr wrap="square" rtlCol="0">
+                <a:spAutoFit/>
+              </a:bodyPr>
+              <a:lstStyle/>
+              <a:p>
+                <a:pPr/>
+                <a14:m>
+                  <m:oMathPara xmlns:m="http://schemas.openxmlformats.org/officeDocument/2006/math">
+                    <m:oMathParaPr>
+                      <m:jc m:val="centerGroup"/>
+                    </m:oMathParaPr>
+                    <m:oMath xmlns:m="http://schemas.openxmlformats.org/officeDocument/2006/math">
+                      <m:sSub>
+                        <m:sSubPr>
+                          <m:ctrlPr>
+                            <a:rPr lang="en-US" sz="1600" b="0" i="1" smtClean="0">
+                              <a:solidFill>
+                                <a:srgbClr val="002060"/>
+                              </a:solidFill>
+                              <a:latin typeface="Cambria Math" panose="02040503050406030204" pitchFamily="18" charset="0"/>
+                            </a:rPr>
+                          </m:ctrlPr>
+                        </m:sSubPr>
+                        <m:e>
+                          <m:r>
+                            <a:rPr lang="en-US" sz="1600" b="0" i="1" smtClean="0">
+                              <a:solidFill>
+                                <a:srgbClr val="002060"/>
+                              </a:solidFill>
+                              <a:latin typeface="Cambria Math" panose="02040503050406030204" pitchFamily="18" charset="0"/>
+                            </a:rPr>
+                            <m:t>𝜙</m:t>
+                          </m:r>
+                        </m:e>
+                        <m:sub>
+                          <m:r>
+                            <a:rPr lang="en-US" sz="1600" b="0" i="1" smtClean="0">
+                              <a:solidFill>
+                                <a:srgbClr val="002060"/>
+                              </a:solidFill>
+                              <a:latin typeface="Cambria Math" panose="02040503050406030204" pitchFamily="18" charset="0"/>
+                            </a:rPr>
+                            <m:t>𝐶</m:t>
+                          </m:r>
+                          <m:r>
+                            <a:rPr lang="en-US" sz="1600" b="0" i="1" smtClean="0">
+                              <a:solidFill>
+                                <a:srgbClr val="002060"/>
+                              </a:solidFill>
+                              <a:latin typeface="Cambria Math" panose="02040503050406030204" pitchFamily="18" charset="0"/>
+                            </a:rPr>
+                            <m:t>𝐴</m:t>
+                          </m:r>
+                        </m:sub>
+                      </m:sSub>
+                    </m:oMath>
+                  </m:oMathPara>
+                </a14:m>
+                <a:endParaRPr lang="sv-SE" dirty="0"/>
+              </a:p>
+            </p:txBody>
+          </p:sp>
+        </mc:Choice>
+        <mc:Fallback>
+          <p:sp>
+            <p:nvSpPr>
+              <p:cNvPr id="47" name="TextBox 46"/>
+              <p:cNvSpPr txBox="1">
+                <a:spLocks noRot="1" noChangeAspect="1" noMove="1" noResize="1" noEditPoints="1" noAdjustHandles="1" noChangeArrowheads="1" noChangeShapeType="1" noTextEdit="1"/>
+              </p:cNvSpPr>
+              <p:nvPr/>
+            </p:nvSpPr>
+            <p:spPr>
+              <a:xfrm>
+                <a:off x="5123101" y="3596479"/>
+                <a:ext cx="601661" cy="338554"/>
+              </a:xfrm>
+              <a:prstGeom prst="rect">
+                <a:avLst/>
+              </a:prstGeom>
+              <a:blipFill>
+                <a:blip r:embed="rId4"/>
+                <a:stretch>
+                  <a:fillRect b="-8929"/>
+                </a:stretch>
+              </a:blipFill>
+            </p:spPr>
+            <p:txBody>
+              <a:bodyPr/>
+              <a:lstStyle/>
+              <a:p>
+                <a:r>
+                  <a:rPr lang="sv-SE">
+                    <a:noFill/>
+                  </a:rPr>
+                  <a:t> </a:t>
+                </a:r>
+              </a:p>
+            </p:txBody>
+          </p:sp>
+        </mc:Fallback>
+      </mc:AlternateContent>
+      <p:sp>
+        <p:nvSpPr>
+          <p:cNvPr id="48" name="Arc 47"/>
+          <p:cNvSpPr/>
+          <p:nvPr/>
+        </p:nvSpPr>
+        <p:spPr>
+          <a:xfrm rot="2502697">
+            <a:off x="4605305" y="3735396"/>
+            <a:ext cx="402846" cy="159782"/>
+          </a:xfrm>
+          <a:prstGeom prst="arc">
+            <a:avLst>
+              <a:gd name="adj1" fmla="val 11340923"/>
+              <a:gd name="adj2" fmla="val 20696075"/>
+            </a:avLst>
+          </a:prstGeom>
+          <a:ln>
+            <a:solidFill>
+              <a:schemeClr val="tx1"/>
+            </a:solidFill>
+          </a:ln>
+        </p:spPr>
+        <p:style>
+          <a:lnRef idx="1">
+            <a:schemeClr val="accent1"/>
+          </a:lnRef>
+          <a:fillRef idx="0">
+            <a:schemeClr val="accent1"/>
+          </a:fillRef>
+          <a:effectRef idx="0">
+            <a:schemeClr val="accent1"/>
+          </a:effectRef>
+          <a:fontRef idx="minor">
+            <a:schemeClr val="tx1"/>
+          </a:fontRef>
+        </p:style>
+        <p:txBody>
+          <a:bodyPr rtlCol="0" anchor="ctr"/>
+          <a:lstStyle/>
+          <a:p>
+            <a:pPr algn="ctr"/>
+            <a:endParaRPr lang="sv-SE"/>
+          </a:p>
+        </p:txBody>
+      </p:sp>
+      <mc:AlternateContent xmlns:mc="http://schemas.openxmlformats.org/markup-compatibility/2006">
+        <mc:Choice xmlns:a14="http://schemas.microsoft.com/office/drawing/2010/main" Requires="a14">
+          <p:sp>
+            <p:nvSpPr>
+              <p:cNvPr id="49" name="Rectangle 48"/>
+              <p:cNvSpPr/>
+              <p:nvPr/>
+            </p:nvSpPr>
+            <p:spPr>
+              <a:xfrm>
+                <a:off x="4691352" y="3402042"/>
+                <a:ext cx="575542" cy="338554"/>
+              </a:xfrm>
+              <a:prstGeom prst="rect">
+                <a:avLst/>
+              </a:prstGeom>
+            </p:spPr>
+            <p:txBody>
+              <a:bodyPr wrap="none">
+                <a:spAutoFit/>
+              </a:bodyPr>
+              <a:lstStyle/>
+              <a:p>
+                <a14:m>
+                  <m:oMathPara xmlns:m="http://schemas.openxmlformats.org/officeDocument/2006/math">
+                    <m:oMathParaPr>
+                      <m:jc m:val="centerGroup"/>
+                    </m:oMathParaPr>
+                    <m:oMath xmlns:m="http://schemas.openxmlformats.org/officeDocument/2006/math">
+                      <m:sSub>
+                        <m:sSubPr>
+                          <m:ctrlPr>
+                            <a:rPr lang="en-US" sz="1600" i="1" smtClean="0">
+                              <a:solidFill>
+                                <a:srgbClr val="E622EB"/>
+                              </a:solidFill>
+                              <a:latin typeface="Cambria Math" panose="02040503050406030204" pitchFamily="18" charset="0"/>
+                            </a:rPr>
+                          </m:ctrlPr>
+                        </m:sSubPr>
+                        <m:e>
+                          <m:r>
+                            <a:rPr lang="en-US" sz="1600" i="1">
+                              <a:solidFill>
+                                <a:srgbClr val="E622EB"/>
+                              </a:solidFill>
+                              <a:latin typeface="Cambria Math" panose="02040503050406030204" pitchFamily="18" charset="0"/>
+                            </a:rPr>
+                            <m:t>𝜙</m:t>
+                          </m:r>
+                        </m:e>
+                        <m:sub>
+                          <m:r>
+                            <a:rPr lang="en-US" sz="1600" i="1">
+                              <a:solidFill>
+                                <a:srgbClr val="E622EB"/>
+                              </a:solidFill>
+                              <a:latin typeface="Cambria Math" panose="02040503050406030204" pitchFamily="18" charset="0"/>
+                            </a:rPr>
+                            <m:t>𝐶</m:t>
+                          </m:r>
+                          <m:r>
+                            <a:rPr lang="en-US" sz="1600" b="0" i="1" smtClean="0">
+                              <a:solidFill>
+                                <a:srgbClr val="E622EB"/>
+                              </a:solidFill>
+                              <a:latin typeface="Cambria Math" panose="02040503050406030204" pitchFamily="18" charset="0"/>
+                            </a:rPr>
+                            <m:t>𝐵</m:t>
+                          </m:r>
+                        </m:sub>
+                      </m:sSub>
+                    </m:oMath>
+                  </m:oMathPara>
+                </a14:m>
+                <a:endParaRPr lang="sv-SE" dirty="0"/>
+              </a:p>
+            </p:txBody>
+          </p:sp>
+        </mc:Choice>
+        <mc:Fallback>
+          <p:sp>
+            <p:nvSpPr>
+              <p:cNvPr id="49" name="Rectangle 48"/>
+              <p:cNvSpPr>
+                <a:spLocks noRot="1" noChangeAspect="1" noMove="1" noResize="1" noEditPoints="1" noAdjustHandles="1" noChangeArrowheads="1" noChangeShapeType="1" noTextEdit="1"/>
+              </p:cNvSpPr>
+              <p:nvPr/>
+            </p:nvSpPr>
+            <p:spPr>
+              <a:xfrm>
+                <a:off x="4691352" y="3402042"/>
+                <a:ext cx="575542" cy="338554"/>
+              </a:xfrm>
+              <a:prstGeom prst="rect">
+                <a:avLst/>
+              </a:prstGeom>
+              <a:blipFill>
+                <a:blip r:embed="rId5"/>
+                <a:stretch>
+                  <a:fillRect b="-8929"/>
+                </a:stretch>
+              </a:blipFill>
+            </p:spPr>
+            <p:txBody>
+              <a:bodyPr/>
+              <a:lstStyle/>
+              <a:p>
+                <a:r>
+                  <a:rPr lang="sv-SE">
+                    <a:noFill/>
+                  </a:rPr>
+                  <a:t> </a:t>
+                </a:r>
+              </a:p>
+            </p:txBody>
+          </p:sp>
+        </mc:Fallback>
+      </mc:AlternateContent>
+      <mc:AlternateContent xmlns:mc="http://schemas.openxmlformats.org/markup-compatibility/2006">
+        <mc:Choice xmlns:a14="http://schemas.microsoft.com/office/drawing/2010/main" Requires="a14">
+          <p:sp>
+            <p:nvSpPr>
+              <p:cNvPr id="50" name="Rectangle 49"/>
+              <p:cNvSpPr/>
+              <p:nvPr/>
+            </p:nvSpPr>
+            <p:spPr>
+              <a:xfrm>
+                <a:off x="4697158" y="3918561"/>
+                <a:ext cx="722314" cy="338554"/>
+              </a:xfrm>
+              <a:prstGeom prst="rect">
+                <a:avLst/>
+              </a:prstGeom>
+            </p:spPr>
+            <p:txBody>
+              <a:bodyPr wrap="none">
+                <a:spAutoFit/>
+              </a:bodyPr>
+              <a:lstStyle/>
+              <a:p>
+                <a14:m>
+                  <m:oMathPara xmlns:m="http://schemas.openxmlformats.org/officeDocument/2006/math">
+                    <m:oMathParaPr>
+                      <m:jc m:val="centerGroup"/>
+                    </m:oMathParaPr>
+                    <m:oMath xmlns:m="http://schemas.openxmlformats.org/officeDocument/2006/math">
+                      <m:r>
+                        <a:rPr lang="en-US" sz="1600" b="0" i="1" smtClean="0">
+                          <a:solidFill>
+                            <a:srgbClr val="92D050"/>
+                          </a:solidFill>
+                          <a:latin typeface="Cambria Math" panose="02040503050406030204" pitchFamily="18" charset="0"/>
+                        </a:rPr>
+                        <m:t>−</m:t>
+                      </m:r>
+                      <m:sSub>
+                        <m:sSubPr>
+                          <m:ctrlPr>
+                            <a:rPr lang="en-US" sz="1600" i="1" smtClean="0">
+                              <a:solidFill>
+                                <a:srgbClr val="92D050"/>
+                              </a:solidFill>
+                              <a:latin typeface="Cambria Math" panose="02040503050406030204" pitchFamily="18" charset="0"/>
+                            </a:rPr>
+                          </m:ctrlPr>
+                        </m:sSubPr>
+                        <m:e>
+                          <m:r>
+                            <a:rPr lang="en-US" sz="1600" i="1">
+                              <a:solidFill>
+                                <a:srgbClr val="92D050"/>
+                              </a:solidFill>
+                              <a:latin typeface="Cambria Math" panose="02040503050406030204" pitchFamily="18" charset="0"/>
+                            </a:rPr>
+                            <m:t>𝜙</m:t>
+                          </m:r>
+                        </m:e>
+                        <m:sub>
+                          <m:r>
+                            <a:rPr lang="en-US" sz="1600" i="1">
+                              <a:solidFill>
+                                <a:srgbClr val="92D050"/>
+                              </a:solidFill>
+                              <a:latin typeface="Cambria Math" panose="02040503050406030204" pitchFamily="18" charset="0"/>
+                            </a:rPr>
+                            <m:t>𝐶</m:t>
+                          </m:r>
+                          <m:r>
+                            <a:rPr lang="en-US" sz="1600" b="0" i="1" smtClean="0">
+                              <a:solidFill>
+                                <a:srgbClr val="92D050"/>
+                              </a:solidFill>
+                              <a:latin typeface="Cambria Math" panose="02040503050406030204" pitchFamily="18" charset="0"/>
+                            </a:rPr>
+                            <m:t>𝐶</m:t>
+                          </m:r>
+                        </m:sub>
+                      </m:sSub>
+                    </m:oMath>
+                  </m:oMathPara>
+                </a14:m>
+                <a:endParaRPr lang="sv-SE" dirty="0"/>
+              </a:p>
+            </p:txBody>
+          </p:sp>
+        </mc:Choice>
+        <mc:Fallback>
+          <p:sp>
+            <p:nvSpPr>
+              <p:cNvPr id="50" name="Rectangle 49"/>
+              <p:cNvSpPr>
+                <a:spLocks noRot="1" noChangeAspect="1" noMove="1" noResize="1" noEditPoints="1" noAdjustHandles="1" noChangeArrowheads="1" noChangeShapeType="1" noTextEdit="1"/>
+              </p:cNvSpPr>
+              <p:nvPr/>
+            </p:nvSpPr>
+            <p:spPr>
+              <a:xfrm>
+                <a:off x="4697158" y="3918561"/>
+                <a:ext cx="722314" cy="338554"/>
+              </a:xfrm>
+              <a:prstGeom prst="rect">
+                <a:avLst/>
+              </a:prstGeom>
+              <a:blipFill>
+                <a:blip r:embed="rId6"/>
+                <a:stretch>
+                  <a:fillRect b="-10909"/>
+                </a:stretch>
+              </a:blipFill>
+            </p:spPr>
+            <p:txBody>
+              <a:bodyPr/>
+              <a:lstStyle/>
+              <a:p>
+                <a:r>
+                  <a:rPr lang="sv-SE">
+                    <a:noFill/>
+                  </a:rPr>
+                  <a:t> </a:t>
+                </a:r>
+              </a:p>
+            </p:txBody>
+          </p:sp>
+        </mc:Fallback>
+      </mc:AlternateContent>
+      <p:sp>
+        <p:nvSpPr>
+          <p:cNvPr id="51" name="Arc 50"/>
+          <p:cNvSpPr/>
+          <p:nvPr/>
+        </p:nvSpPr>
+        <p:spPr>
+          <a:xfrm rot="9696706">
+            <a:off x="4678768" y="3855141"/>
+            <a:ext cx="402846" cy="159782"/>
+          </a:xfrm>
+          <a:prstGeom prst="arc">
+            <a:avLst>
+              <a:gd name="adj1" fmla="val 11195846"/>
+              <a:gd name="adj2" fmla="val 21091131"/>
+            </a:avLst>
+          </a:prstGeom>
+          <a:ln>
+            <a:solidFill>
+              <a:schemeClr val="tx1"/>
+            </a:solidFill>
+          </a:ln>
+        </p:spPr>
+        <p:style>
+          <a:lnRef idx="1">
+            <a:schemeClr val="accent1"/>
+          </a:lnRef>
+          <a:fillRef idx="0">
+            <a:schemeClr val="accent1"/>
+          </a:fillRef>
+          <a:effectRef idx="0">
+            <a:schemeClr val="accent1"/>
+          </a:effectRef>
+          <a:fontRef idx="minor">
+            <a:schemeClr val="tx1"/>
+          </a:fontRef>
+        </p:style>
+        <p:txBody>
+          <a:bodyPr rtlCol="0" anchor="ctr"/>
+          <a:lstStyle/>
+          <a:p>
+            <a:pPr algn="ctr"/>
+            <a:endParaRPr lang="sv-SE"/>
+          </a:p>
+        </p:txBody>
+      </p:sp>
+      <mc:AlternateContent xmlns:mc="http://schemas.openxmlformats.org/markup-compatibility/2006">
+        <mc:Choice xmlns:a14="http://schemas.microsoft.com/office/drawing/2010/main" Requires="a14">
+          <p:sp>
+            <p:nvSpPr>
+              <p:cNvPr id="52" name="Rectangle 51"/>
+              <p:cNvSpPr/>
+              <p:nvPr/>
+            </p:nvSpPr>
+            <p:spPr>
+              <a:xfrm>
+                <a:off x="5481496" y="3319087"/>
+                <a:ext cx="689676" cy="408638"/>
+              </a:xfrm>
+              <a:prstGeom prst="rect">
+                <a:avLst/>
+              </a:prstGeom>
+            </p:spPr>
+            <p:txBody>
+              <a:bodyPr wrap="none">
+                <a:spAutoFit/>
+              </a:bodyPr>
+              <a:lstStyle/>
+              <a:p>
+                <a14:m>
+                  <m:oMathPara xmlns:m="http://schemas.openxmlformats.org/officeDocument/2006/math">
+                    <m:oMathParaPr>
+                      <m:jc m:val="centerGroup"/>
+                    </m:oMathParaPr>
+                    <m:oMath xmlns:m="http://schemas.openxmlformats.org/officeDocument/2006/math">
+                      <m:sSup>
+                        <m:sSupPr>
+                          <m:ctrlPr>
+                            <a:rPr lang="en-US" b="0" i="1" smtClean="0">
+                              <a:solidFill>
+                                <a:srgbClr val="002060"/>
+                              </a:solidFill>
+                              <a:latin typeface="Cambria Math" panose="02040503050406030204" pitchFamily="18" charset="0"/>
+                            </a:rPr>
+                          </m:ctrlPr>
+                        </m:sSupPr>
+                        <m:e>
+                          <m:acc>
+                            <m:accPr>
+                              <m:chr m:val="̂"/>
+                              <m:ctrlPr>
+                                <a:rPr lang="en-US" b="0" i="1" smtClean="0">
+                                  <a:solidFill>
+                                    <a:srgbClr val="002060"/>
+                                  </a:solidFill>
+                                  <a:latin typeface="Cambria Math" panose="02040503050406030204" pitchFamily="18" charset="0"/>
+                                </a:rPr>
+                              </m:ctrlPr>
+                            </m:accPr>
+                            <m:e>
+                              <m:sSub>
+                                <m:sSubPr>
+                                  <m:ctrlPr>
+                                    <a:rPr lang="en-US" b="0" i="1" smtClean="0">
+                                      <a:solidFill>
+                                        <a:srgbClr val="002060"/>
+                                      </a:solidFill>
+                                      <a:latin typeface="Cambria Math" panose="02040503050406030204" pitchFamily="18" charset="0"/>
+                                    </a:rPr>
+                                  </m:ctrlPr>
+                                </m:sSubPr>
+                                <m:e>
+                                  <m:r>
+                                    <a:rPr lang="en-US" b="0" i="1" smtClean="0">
+                                      <a:solidFill>
+                                        <a:srgbClr val="002060"/>
+                                      </a:solidFill>
+                                      <a:latin typeface="Cambria Math" panose="02040503050406030204" pitchFamily="18" charset="0"/>
+                                    </a:rPr>
+                                    <m:t>𝑉</m:t>
+                                  </m:r>
+                                </m:e>
+                                <m:sub>
+                                  <m:r>
+                                    <a:rPr lang="en-US" b="0" i="1" smtClean="0">
+                                      <a:solidFill>
+                                        <a:srgbClr val="002060"/>
+                                      </a:solidFill>
+                                      <a:latin typeface="Cambria Math" panose="02040503050406030204" pitchFamily="18" charset="0"/>
+                                    </a:rPr>
+                                    <m:t>𝐴</m:t>
+                                  </m:r>
+                                </m:sub>
+                              </m:sSub>
+                            </m:e>
+                          </m:acc>
+                        </m:e>
+                        <m:sup>
+                          <m:sSub>
+                            <m:sSubPr>
+                              <m:ctrlPr>
+                                <a:rPr lang="en-US" b="0" i="1" smtClean="0">
+                                  <a:solidFill>
+                                    <a:srgbClr val="002060"/>
+                                  </a:solidFill>
+                                  <a:latin typeface="Cambria Math" panose="02040503050406030204" pitchFamily="18" charset="0"/>
+                                </a:rPr>
+                              </m:ctrlPr>
+                            </m:sSubPr>
+                            <m:e>
+                              <m:r>
+                                <a:rPr lang="en-US" b="0" i="1" smtClean="0">
+                                  <a:solidFill>
+                                    <a:srgbClr val="002060"/>
+                                  </a:solidFill>
+                                  <a:latin typeface="Cambria Math" panose="02040503050406030204" pitchFamily="18" charset="0"/>
+                                </a:rPr>
+                                <m:t>𝜔</m:t>
+                              </m:r>
+                            </m:e>
+                            <m:sub>
+                              <m:r>
+                                <a:rPr lang="en-US" b="0" i="1" smtClean="0">
+                                  <a:solidFill>
+                                    <a:srgbClr val="002060"/>
+                                  </a:solidFill>
+                                  <a:latin typeface="Cambria Math" panose="02040503050406030204" pitchFamily="18" charset="0"/>
+                                </a:rPr>
+                                <m:t>𝑐</m:t>
+                              </m:r>
+                            </m:sub>
+                          </m:sSub>
+                        </m:sup>
+                      </m:sSup>
+                    </m:oMath>
+                  </m:oMathPara>
+                </a14:m>
+                <a:endParaRPr lang="sv-SE" dirty="0"/>
+              </a:p>
+            </p:txBody>
+          </p:sp>
+        </mc:Choice>
+        <mc:Fallback>
+          <p:sp>
+            <p:nvSpPr>
+              <p:cNvPr id="52" name="Rectangle 51"/>
+              <p:cNvSpPr>
+                <a:spLocks noRot="1" noChangeAspect="1" noMove="1" noResize="1" noEditPoints="1" noAdjustHandles="1" noChangeArrowheads="1" noChangeShapeType="1" noTextEdit="1"/>
+              </p:cNvSpPr>
+              <p:nvPr/>
+            </p:nvSpPr>
+            <p:spPr>
+              <a:xfrm>
+                <a:off x="5481496" y="3319087"/>
+                <a:ext cx="689676" cy="408638"/>
+              </a:xfrm>
+              <a:prstGeom prst="rect">
+                <a:avLst/>
+              </a:prstGeom>
+              <a:blipFill>
+                <a:blip r:embed="rId7"/>
+                <a:stretch>
+                  <a:fillRect r="-885"/>
+                </a:stretch>
+              </a:blipFill>
+            </p:spPr>
+            <p:txBody>
+              <a:bodyPr/>
+              <a:lstStyle/>
+              <a:p>
+                <a:r>
+                  <a:rPr lang="sv-SE">
+                    <a:noFill/>
+                  </a:rPr>
+                  <a:t> </a:t>
+                </a:r>
+              </a:p>
+            </p:txBody>
+          </p:sp>
+        </mc:Fallback>
+      </mc:AlternateContent>
+      <mc:AlternateContent xmlns:mc="http://schemas.openxmlformats.org/markup-compatibility/2006">
+        <mc:Choice xmlns:a14="http://schemas.microsoft.com/office/drawing/2010/main" Requires="a14">
+          <p:sp>
+            <p:nvSpPr>
+              <p:cNvPr id="53" name="Rectangle 52"/>
+              <p:cNvSpPr/>
+              <p:nvPr/>
+            </p:nvSpPr>
+            <p:spPr>
+              <a:xfrm>
+                <a:off x="4106202" y="2908364"/>
+                <a:ext cx="705578" cy="408638"/>
+              </a:xfrm>
+              <a:prstGeom prst="rect">
+                <a:avLst/>
+              </a:prstGeom>
+            </p:spPr>
+            <p:txBody>
+              <a:bodyPr wrap="none">
+                <a:spAutoFit/>
+              </a:bodyPr>
+              <a:lstStyle/>
+              <a:p>
+                <a14:m>
+                  <m:oMathPara xmlns:m="http://schemas.openxmlformats.org/officeDocument/2006/math">
+                    <m:oMathParaPr>
+                      <m:jc m:val="centerGroup"/>
+                    </m:oMathParaPr>
+                    <m:oMath xmlns:m="http://schemas.openxmlformats.org/officeDocument/2006/math">
+                      <m:sSup>
+                        <m:sSupPr>
+                          <m:ctrlPr>
+                            <a:rPr lang="en-US" b="0" i="1" smtClean="0">
+                              <a:solidFill>
+                                <a:srgbClr val="E622EB"/>
+                              </a:solidFill>
+                              <a:latin typeface="Cambria Math" panose="02040503050406030204" pitchFamily="18" charset="0"/>
+                            </a:rPr>
+                          </m:ctrlPr>
+                        </m:sSupPr>
+                        <m:e>
+                          <m:acc>
+                            <m:accPr>
+                              <m:chr m:val="̂"/>
+                              <m:ctrlPr>
+                                <a:rPr lang="en-US" b="0" i="1" smtClean="0">
+                                  <a:solidFill>
+                                    <a:srgbClr val="E622EB"/>
+                                  </a:solidFill>
+                                  <a:latin typeface="Cambria Math" panose="02040503050406030204" pitchFamily="18" charset="0"/>
+                                </a:rPr>
+                              </m:ctrlPr>
+                            </m:accPr>
+                            <m:e>
+                              <m:sSub>
+                                <m:sSubPr>
+                                  <m:ctrlPr>
+                                    <a:rPr lang="en-US" b="0" i="1" smtClean="0">
+                                      <a:solidFill>
+                                        <a:srgbClr val="E622EB"/>
+                                      </a:solidFill>
+                                      <a:latin typeface="Cambria Math" panose="02040503050406030204" pitchFamily="18" charset="0"/>
+                                    </a:rPr>
+                                  </m:ctrlPr>
+                                </m:sSubPr>
+                                <m:e>
+                                  <m:r>
+                                    <a:rPr lang="en-US" b="0" i="1" smtClean="0">
+                                      <a:solidFill>
+                                        <a:srgbClr val="E622EB"/>
+                                      </a:solidFill>
+                                      <a:latin typeface="Cambria Math" panose="02040503050406030204" pitchFamily="18" charset="0"/>
+                                    </a:rPr>
+                                    <m:t>𝑉</m:t>
+                                  </m:r>
+                                </m:e>
+                                <m:sub>
+                                  <m:r>
+                                    <a:rPr lang="en-US" b="0" i="1" smtClean="0">
+                                      <a:solidFill>
+                                        <a:srgbClr val="E622EB"/>
+                                      </a:solidFill>
+                                      <a:latin typeface="Cambria Math" panose="02040503050406030204" pitchFamily="18" charset="0"/>
+                                    </a:rPr>
+                                    <m:t>𝐵</m:t>
+                                  </m:r>
+                                </m:sub>
+                              </m:sSub>
+                            </m:e>
+                          </m:acc>
+                        </m:e>
+                        <m:sup>
+                          <m:sSub>
+                            <m:sSubPr>
+                              <m:ctrlPr>
+                                <a:rPr lang="en-US" b="0" i="1" smtClean="0">
+                                  <a:solidFill>
+                                    <a:srgbClr val="E622EB"/>
+                                  </a:solidFill>
+                                  <a:latin typeface="Cambria Math" panose="02040503050406030204" pitchFamily="18" charset="0"/>
+                                </a:rPr>
+                              </m:ctrlPr>
+                            </m:sSubPr>
+                            <m:e>
+                              <m:r>
+                                <a:rPr lang="en-US" b="0" i="1" smtClean="0">
+                                  <a:solidFill>
+                                    <a:srgbClr val="E622EB"/>
+                                  </a:solidFill>
+                                  <a:latin typeface="Cambria Math" panose="02040503050406030204" pitchFamily="18" charset="0"/>
+                                </a:rPr>
+                                <m:t>𝜔</m:t>
+                              </m:r>
+                            </m:e>
+                            <m:sub>
+                              <m:r>
+                                <a:rPr lang="en-US" b="0" i="1" smtClean="0">
+                                  <a:solidFill>
+                                    <a:srgbClr val="E622EB"/>
+                                  </a:solidFill>
+                                  <a:latin typeface="Cambria Math" panose="02040503050406030204" pitchFamily="18" charset="0"/>
+                                </a:rPr>
+                                <m:t>𝑐</m:t>
+                              </m:r>
+                            </m:sub>
+                          </m:sSub>
+                        </m:sup>
+                      </m:sSup>
+                    </m:oMath>
+                  </m:oMathPara>
+                </a14:m>
+                <a:endParaRPr lang="sv-SE" dirty="0">
+                  <a:solidFill>
+                    <a:srgbClr val="E622EB"/>
+                  </a:solidFill>
+                </a:endParaRPr>
+              </a:p>
+            </p:txBody>
+          </p:sp>
+        </mc:Choice>
+        <mc:Fallback>
+          <p:sp>
+            <p:nvSpPr>
+              <p:cNvPr id="53" name="Rectangle 52"/>
+              <p:cNvSpPr>
+                <a:spLocks noRot="1" noChangeAspect="1" noMove="1" noResize="1" noEditPoints="1" noAdjustHandles="1" noChangeArrowheads="1" noChangeShapeType="1" noTextEdit="1"/>
+              </p:cNvSpPr>
+              <p:nvPr/>
+            </p:nvSpPr>
+            <p:spPr>
+              <a:xfrm>
+                <a:off x="4106202" y="2908364"/>
+                <a:ext cx="705578" cy="408638"/>
+              </a:xfrm>
+              <a:prstGeom prst="rect">
+                <a:avLst/>
+              </a:prstGeom>
+              <a:blipFill>
+                <a:blip r:embed="rId8"/>
+                <a:stretch>
+                  <a:fillRect r="-2609"/>
+                </a:stretch>
+              </a:blipFill>
+            </p:spPr>
+            <p:txBody>
+              <a:bodyPr/>
+              <a:lstStyle/>
+              <a:p>
+                <a:r>
+                  <a:rPr lang="sv-SE">
+                    <a:noFill/>
+                  </a:rPr>
+                  <a:t> </a:t>
+                </a:r>
+              </a:p>
+            </p:txBody>
+          </p:sp>
+        </mc:Fallback>
+      </mc:AlternateContent>
+      <mc:AlternateContent xmlns:mc="http://schemas.openxmlformats.org/markup-compatibility/2006">
+        <mc:Choice xmlns:a14="http://schemas.microsoft.com/office/drawing/2010/main" Requires="a14">
+          <p:sp>
+            <p:nvSpPr>
+              <p:cNvPr id="54" name="Rectangle 53"/>
+              <p:cNvSpPr/>
+              <p:nvPr/>
+            </p:nvSpPr>
+            <p:spPr>
+              <a:xfrm>
+                <a:off x="4123961" y="4294139"/>
+                <a:ext cx="697242" cy="408638"/>
+              </a:xfrm>
+              <a:prstGeom prst="rect">
+                <a:avLst/>
+              </a:prstGeom>
+            </p:spPr>
+            <p:txBody>
+              <a:bodyPr wrap="none">
+                <a:spAutoFit/>
+              </a:bodyPr>
+              <a:lstStyle/>
+              <a:p>
+                <a14:m>
+                  <m:oMathPara xmlns:m="http://schemas.openxmlformats.org/officeDocument/2006/math">
+                    <m:oMathParaPr>
+                      <m:jc m:val="centerGroup"/>
+                    </m:oMathParaPr>
+                    <m:oMath xmlns:m="http://schemas.openxmlformats.org/officeDocument/2006/math">
+                      <m:sSup>
+                        <m:sSupPr>
+                          <m:ctrlPr>
+                            <a:rPr lang="en-US" b="0" i="1" smtClean="0">
+                              <a:solidFill>
+                                <a:srgbClr val="92D050"/>
+                              </a:solidFill>
+                              <a:latin typeface="Cambria Math" panose="02040503050406030204" pitchFamily="18" charset="0"/>
+                            </a:rPr>
+                          </m:ctrlPr>
+                        </m:sSupPr>
+                        <m:e>
+                          <m:acc>
+                            <m:accPr>
+                              <m:chr m:val="̂"/>
+                              <m:ctrlPr>
+                                <a:rPr lang="en-US" b="0" i="1" smtClean="0">
+                                  <a:solidFill>
+                                    <a:srgbClr val="92D050"/>
+                                  </a:solidFill>
+                                  <a:latin typeface="Cambria Math" panose="02040503050406030204" pitchFamily="18" charset="0"/>
+                                </a:rPr>
+                              </m:ctrlPr>
+                            </m:accPr>
+                            <m:e>
+                              <m:sSub>
+                                <m:sSubPr>
+                                  <m:ctrlPr>
+                                    <a:rPr lang="en-US" b="0" i="1" smtClean="0">
+                                      <a:solidFill>
+                                        <a:srgbClr val="92D050"/>
+                                      </a:solidFill>
+                                      <a:latin typeface="Cambria Math" panose="02040503050406030204" pitchFamily="18" charset="0"/>
+                                    </a:rPr>
+                                  </m:ctrlPr>
+                                </m:sSubPr>
+                                <m:e>
+                                  <m:r>
+                                    <a:rPr lang="en-US" b="0" i="1" smtClean="0">
+                                      <a:solidFill>
+                                        <a:srgbClr val="92D050"/>
+                                      </a:solidFill>
+                                      <a:latin typeface="Cambria Math" panose="02040503050406030204" pitchFamily="18" charset="0"/>
+                                    </a:rPr>
+                                    <m:t>𝑉</m:t>
+                                  </m:r>
+                                </m:e>
+                                <m:sub>
+                                  <m:r>
+                                    <a:rPr lang="en-US" b="0" i="1" smtClean="0">
+                                      <a:solidFill>
+                                        <a:srgbClr val="92D050"/>
+                                      </a:solidFill>
+                                      <a:latin typeface="Cambria Math" panose="02040503050406030204" pitchFamily="18" charset="0"/>
+                                    </a:rPr>
+                                    <m:t>𝐶</m:t>
+                                  </m:r>
+                                </m:sub>
+                              </m:sSub>
+                            </m:e>
+                          </m:acc>
+                        </m:e>
+                        <m:sup>
+                          <m:sSub>
+                            <m:sSubPr>
+                              <m:ctrlPr>
+                                <a:rPr lang="en-US" b="0" i="1" smtClean="0">
+                                  <a:solidFill>
+                                    <a:srgbClr val="92D050"/>
+                                  </a:solidFill>
+                                  <a:latin typeface="Cambria Math" panose="02040503050406030204" pitchFamily="18" charset="0"/>
+                                </a:rPr>
+                              </m:ctrlPr>
+                            </m:sSubPr>
+                            <m:e>
+                              <m:r>
+                                <a:rPr lang="en-US" b="0" i="1" smtClean="0">
+                                  <a:solidFill>
+                                    <a:srgbClr val="92D050"/>
+                                  </a:solidFill>
+                                  <a:latin typeface="Cambria Math" panose="02040503050406030204" pitchFamily="18" charset="0"/>
+                                </a:rPr>
+                                <m:t>𝜔</m:t>
+                              </m:r>
+                            </m:e>
+                            <m:sub>
+                              <m:r>
+                                <a:rPr lang="en-US" b="0" i="1" smtClean="0">
+                                  <a:solidFill>
+                                    <a:srgbClr val="92D050"/>
+                                  </a:solidFill>
+                                  <a:latin typeface="Cambria Math" panose="02040503050406030204" pitchFamily="18" charset="0"/>
+                                </a:rPr>
+                                <m:t>𝑐</m:t>
+                              </m:r>
+                            </m:sub>
+                          </m:sSub>
+                        </m:sup>
+                      </m:sSup>
+                    </m:oMath>
+                  </m:oMathPara>
+                </a14:m>
+                <a:endParaRPr lang="sv-SE" dirty="0">
+                  <a:solidFill>
+                    <a:srgbClr val="E622EB"/>
+                  </a:solidFill>
+                </a:endParaRPr>
+              </a:p>
+            </p:txBody>
+          </p:sp>
+        </mc:Choice>
+        <mc:Fallback>
+          <p:sp>
+            <p:nvSpPr>
+              <p:cNvPr id="54" name="Rectangle 53"/>
+              <p:cNvSpPr>
+                <a:spLocks noRot="1" noChangeAspect="1" noMove="1" noResize="1" noEditPoints="1" noAdjustHandles="1" noChangeArrowheads="1" noChangeShapeType="1" noTextEdit="1"/>
+              </p:cNvSpPr>
+              <p:nvPr/>
+            </p:nvSpPr>
+            <p:spPr>
+              <a:xfrm>
+                <a:off x="4123961" y="4294139"/>
+                <a:ext cx="697242" cy="408638"/>
+              </a:xfrm>
+              <a:prstGeom prst="rect">
+                <a:avLst/>
+              </a:prstGeom>
+              <a:blipFill>
+                <a:blip r:embed="rId9"/>
+                <a:stretch>
+                  <a:fillRect r="-877"/>
+                </a:stretch>
+              </a:blipFill>
+            </p:spPr>
+            <p:txBody>
+              <a:bodyPr/>
+              <a:lstStyle/>
+              <a:p>
+                <a:r>
+                  <a:rPr lang="sv-SE">
+                    <a:noFill/>
+                  </a:rPr>
+                  <a:t> </a:t>
+                </a:r>
+              </a:p>
+            </p:txBody>
+          </p:sp>
+        </mc:Fallback>
+      </mc:AlternateContent>
+      <p:sp>
+        <p:nvSpPr>
+          <p:cNvPr id="55" name="TextBox 54"/>
+          <p:cNvSpPr txBox="1"/>
+          <p:nvPr/>
+        </p:nvSpPr>
+        <p:spPr>
+          <a:xfrm>
+            <a:off x="4603207" y="4499454"/>
+            <a:ext cx="714541" cy="369332"/>
+          </a:xfrm>
+          <a:prstGeom prst="rect">
+            <a:avLst/>
+          </a:prstGeom>
+          <a:noFill/>
+        </p:spPr>
+        <p:txBody>
+          <a:bodyPr wrap="square" rtlCol="0">
+            <a:spAutoFit/>
+          </a:bodyPr>
+          <a:lstStyle/>
+          <a:p>
+            <a:r>
+              <a:rPr lang="en-US" dirty="0" smtClean="0"/>
+              <a:t>(a)</a:t>
+            </a:r>
+            <a:endParaRPr lang="sv-SE" dirty="0"/>
+          </a:p>
+        </p:txBody>
+      </p:sp>
+      <p:cxnSp>
+        <p:nvCxnSpPr>
+          <p:cNvPr id="56" name="Straight Arrow Connector 55"/>
+          <p:cNvCxnSpPr/>
+          <p:nvPr/>
+        </p:nvCxnSpPr>
+        <p:spPr>
+          <a:xfrm flipV="1">
+            <a:off x="7295883" y="3621624"/>
+            <a:ext cx="711311" cy="283614"/>
+          </a:xfrm>
+          <a:prstGeom prst="straightConnector1">
+            <a:avLst/>
+          </a:prstGeom>
+          <a:ln w="25400">
+            <a:solidFill>
+              <a:srgbClr val="002060"/>
+            </a:solidFill>
+            <a:tailEnd type="triangle"/>
+          </a:ln>
+        </p:spPr>
+        <p:style>
+          <a:lnRef idx="1">
+            <a:schemeClr val="accent1"/>
+          </a:lnRef>
+          <a:fillRef idx="0">
+            <a:schemeClr val="accent1"/>
+          </a:fillRef>
+          <a:effectRef idx="0">
+            <a:schemeClr val="accent1"/>
+          </a:effectRef>
+          <a:fontRef idx="minor">
+            <a:schemeClr val="tx1"/>
+          </a:fontRef>
+        </p:style>
+      </p:cxnSp>
+      <p:cxnSp>
+        <p:nvCxnSpPr>
+          <p:cNvPr id="57" name="Straight Arrow Connector 56"/>
+          <p:cNvCxnSpPr/>
+          <p:nvPr/>
+        </p:nvCxnSpPr>
+        <p:spPr>
+          <a:xfrm flipH="1" flipV="1">
+            <a:off x="7632095" y="3055132"/>
+            <a:ext cx="330089" cy="558695"/>
+          </a:xfrm>
+          <a:prstGeom prst="straightConnector1">
+            <a:avLst/>
+          </a:prstGeom>
+          <a:ln w="25400">
+            <a:solidFill>
+              <a:srgbClr val="E622EB"/>
+            </a:solidFill>
+            <a:tailEnd type="triangle"/>
+          </a:ln>
+        </p:spPr>
+        <p:style>
+          <a:lnRef idx="1">
+            <a:schemeClr val="accent1"/>
+          </a:lnRef>
+          <a:fillRef idx="0">
+            <a:schemeClr val="accent1"/>
+          </a:fillRef>
+          <a:effectRef idx="0">
+            <a:schemeClr val="accent1"/>
+          </a:effectRef>
+          <a:fontRef idx="minor">
+            <a:schemeClr val="tx1"/>
+          </a:fontRef>
+        </p:style>
+      </p:cxnSp>
+      <p:cxnSp>
+        <p:nvCxnSpPr>
+          <p:cNvPr id="58" name="Straight Arrow Connector 57"/>
+          <p:cNvCxnSpPr/>
+          <p:nvPr/>
+        </p:nvCxnSpPr>
+        <p:spPr>
+          <a:xfrm flipH="1">
+            <a:off x="7313882" y="3065433"/>
+            <a:ext cx="340939" cy="441386"/>
+          </a:xfrm>
+          <a:prstGeom prst="straightConnector1">
+            <a:avLst/>
+          </a:prstGeom>
+          <a:ln w="25400">
+            <a:solidFill>
+              <a:srgbClr val="92D050"/>
+            </a:solidFill>
+            <a:tailEnd type="triangle"/>
+          </a:ln>
+        </p:spPr>
+        <p:style>
+          <a:lnRef idx="1">
+            <a:schemeClr val="accent1"/>
+          </a:lnRef>
+          <a:fillRef idx="0">
+            <a:schemeClr val="accent1"/>
+          </a:fillRef>
+          <a:effectRef idx="0">
+            <a:schemeClr val="accent1"/>
+          </a:effectRef>
+          <a:fontRef idx="minor">
+            <a:schemeClr val="tx1"/>
+          </a:fontRef>
+        </p:style>
+      </p:cxnSp>
+      <p:cxnSp>
+        <p:nvCxnSpPr>
+          <p:cNvPr id="59" name="Straight Arrow Connector 58"/>
+          <p:cNvCxnSpPr/>
+          <p:nvPr/>
+        </p:nvCxnSpPr>
+        <p:spPr>
+          <a:xfrm>
+            <a:off x="6400644" y="3905239"/>
+            <a:ext cx="2165350" cy="14337"/>
+          </a:xfrm>
+          <a:prstGeom prst="straightConnector1">
+            <a:avLst/>
+          </a:prstGeom>
+          <a:ln>
+            <a:solidFill>
+              <a:schemeClr val="tx1"/>
+            </a:solidFill>
+            <a:tailEnd type="triangle"/>
+          </a:ln>
+        </p:spPr>
+        <p:style>
+          <a:lnRef idx="1">
+            <a:schemeClr val="accent1"/>
+          </a:lnRef>
+          <a:fillRef idx="0">
+            <a:schemeClr val="accent1"/>
+          </a:fillRef>
+          <a:effectRef idx="0">
+            <a:schemeClr val="accent1"/>
+          </a:effectRef>
+          <a:fontRef idx="minor">
+            <a:schemeClr val="tx1"/>
+          </a:fontRef>
+        </p:style>
+      </p:cxnSp>
+      <p:cxnSp>
+        <p:nvCxnSpPr>
+          <p:cNvPr id="60" name="Straight Arrow Connector 59"/>
+          <p:cNvCxnSpPr/>
+          <p:nvPr/>
+        </p:nvCxnSpPr>
+        <p:spPr>
+          <a:xfrm flipV="1">
+            <a:off x="7295772" y="2806502"/>
+            <a:ext cx="111" cy="1505411"/>
+          </a:xfrm>
+          <a:prstGeom prst="straightConnector1">
+            <a:avLst/>
+          </a:prstGeom>
+          <a:ln>
+            <a:solidFill>
+              <a:schemeClr val="tx1"/>
+            </a:solidFill>
+            <a:tailEnd type="triangle"/>
+          </a:ln>
+        </p:spPr>
+        <p:style>
+          <a:lnRef idx="1">
+            <a:schemeClr val="accent1"/>
+          </a:lnRef>
+          <a:fillRef idx="0">
+            <a:schemeClr val="accent1"/>
+          </a:fillRef>
+          <a:effectRef idx="0">
+            <a:schemeClr val="accent1"/>
+          </a:effectRef>
+          <a:fontRef idx="minor">
+            <a:schemeClr val="tx1"/>
+          </a:fontRef>
+        </p:style>
+      </p:cxnSp>
+      <mc:AlternateContent xmlns:mc="http://schemas.openxmlformats.org/markup-compatibility/2006">
+        <mc:Choice xmlns:a14="http://schemas.microsoft.com/office/drawing/2010/main" Requires="a14">
+          <p:sp>
+            <p:nvSpPr>
+              <p:cNvPr id="67" name="Rectangle 66"/>
+              <p:cNvSpPr/>
+              <p:nvPr/>
+            </p:nvSpPr>
+            <p:spPr>
+              <a:xfrm>
+                <a:off x="7622162" y="3665715"/>
+                <a:ext cx="689676" cy="686470"/>
+              </a:xfrm>
+              <a:prstGeom prst="rect">
+                <a:avLst/>
+              </a:prstGeom>
+            </p:spPr>
+            <p:txBody>
+              <a:bodyPr wrap="none">
+                <a:spAutoFit/>
+              </a:bodyPr>
+              <a:lstStyle/>
+              <a:p>
+                <a14:m>
+                  <m:oMathPara xmlns:m="http://schemas.openxmlformats.org/officeDocument/2006/math">
+                    <m:oMathParaPr>
+                      <m:jc m:val="centerGroup"/>
+                    </m:oMathParaPr>
+                    <m:oMath xmlns:m="http://schemas.openxmlformats.org/officeDocument/2006/math">
+                      <m:f>
+                        <m:fPr>
+                          <m:ctrlPr>
+                            <a:rPr lang="en-US" b="0" i="1" smtClean="0">
+                              <a:solidFill>
+                                <a:srgbClr val="002060"/>
+                              </a:solidFill>
+                              <a:latin typeface="Cambria Math" panose="02040503050406030204" pitchFamily="18" charset="0"/>
+                            </a:rPr>
+                          </m:ctrlPr>
+                        </m:fPr>
+                        <m:num>
+                          <m:sSup>
+                            <m:sSupPr>
+                              <m:ctrlPr>
+                                <a:rPr lang="en-US" b="0" i="1" smtClean="0">
+                                  <a:solidFill>
+                                    <a:srgbClr val="002060"/>
+                                  </a:solidFill>
+                                  <a:latin typeface="Cambria Math" panose="02040503050406030204" pitchFamily="18" charset="0"/>
+                                </a:rPr>
+                              </m:ctrlPr>
+                            </m:sSupPr>
+                            <m:e>
+                              <m:acc>
+                                <m:accPr>
+                                  <m:chr m:val="̂"/>
+                                  <m:ctrlPr>
+                                    <a:rPr lang="en-US" b="0" i="1" smtClean="0">
+                                      <a:solidFill>
+                                        <a:srgbClr val="002060"/>
+                                      </a:solidFill>
+                                      <a:latin typeface="Cambria Math" panose="02040503050406030204" pitchFamily="18" charset="0"/>
+                                    </a:rPr>
+                                  </m:ctrlPr>
+                                </m:accPr>
+                                <m:e>
+                                  <m:sSub>
+                                    <m:sSubPr>
+                                      <m:ctrlPr>
+                                        <a:rPr lang="en-US" b="0" i="1" smtClean="0">
+                                          <a:solidFill>
+                                            <a:srgbClr val="002060"/>
+                                          </a:solidFill>
+                                          <a:latin typeface="Cambria Math" panose="02040503050406030204" pitchFamily="18" charset="0"/>
+                                        </a:rPr>
+                                      </m:ctrlPr>
+                                    </m:sSubPr>
+                                    <m:e>
+                                      <m:r>
+                                        <a:rPr lang="en-US" b="0" i="1" smtClean="0">
+                                          <a:solidFill>
+                                            <a:srgbClr val="002060"/>
+                                          </a:solidFill>
+                                          <a:latin typeface="Cambria Math" panose="02040503050406030204" pitchFamily="18" charset="0"/>
+                                        </a:rPr>
+                                        <m:t>𝑉</m:t>
+                                      </m:r>
+                                    </m:e>
+                                    <m:sub>
+                                      <m:r>
+                                        <a:rPr lang="en-US" b="0" i="1" smtClean="0">
+                                          <a:solidFill>
+                                            <a:srgbClr val="002060"/>
+                                          </a:solidFill>
+                                          <a:latin typeface="Cambria Math" panose="02040503050406030204" pitchFamily="18" charset="0"/>
+                                        </a:rPr>
+                                        <m:t>𝐴</m:t>
+                                      </m:r>
+                                    </m:sub>
+                                  </m:sSub>
+                                </m:e>
+                              </m:acc>
+                            </m:e>
+                            <m:sup>
+                              <m:sSub>
+                                <m:sSubPr>
+                                  <m:ctrlPr>
+                                    <a:rPr lang="en-US" b="0" i="1" smtClean="0">
+                                      <a:solidFill>
+                                        <a:srgbClr val="002060"/>
+                                      </a:solidFill>
+                                      <a:latin typeface="Cambria Math" panose="02040503050406030204" pitchFamily="18" charset="0"/>
+                                    </a:rPr>
+                                  </m:ctrlPr>
+                                </m:sSubPr>
+                                <m:e>
+                                  <m:r>
+                                    <a:rPr lang="en-US" b="0" i="1" smtClean="0">
+                                      <a:solidFill>
+                                        <a:srgbClr val="002060"/>
+                                      </a:solidFill>
+                                      <a:latin typeface="Cambria Math" panose="02040503050406030204" pitchFamily="18" charset="0"/>
+                                    </a:rPr>
+                                    <m:t>𝜔</m:t>
+                                  </m:r>
+                                </m:e>
+                                <m:sub>
+                                  <m:r>
+                                    <a:rPr lang="en-US" b="0" i="1" smtClean="0">
+                                      <a:solidFill>
+                                        <a:srgbClr val="002060"/>
+                                      </a:solidFill>
+                                      <a:latin typeface="Cambria Math" panose="02040503050406030204" pitchFamily="18" charset="0"/>
+                                    </a:rPr>
+                                    <m:t>𝑐</m:t>
+                                  </m:r>
+                                </m:sub>
+                              </m:sSub>
+                            </m:sup>
+                          </m:sSup>
+                        </m:num>
+                        <m:den>
+                          <m:r>
+                            <a:rPr lang="en-US" b="0" i="1" smtClean="0">
+                              <a:solidFill>
+                                <a:srgbClr val="002060"/>
+                              </a:solidFill>
+                              <a:latin typeface="Cambria Math" panose="02040503050406030204" pitchFamily="18" charset="0"/>
+                            </a:rPr>
+                            <m:t>3</m:t>
+                          </m:r>
+                        </m:den>
+                      </m:f>
+                    </m:oMath>
+                  </m:oMathPara>
+                </a14:m>
+                <a:endParaRPr lang="sv-SE" dirty="0"/>
+              </a:p>
+            </p:txBody>
+          </p:sp>
+        </mc:Choice>
+        <mc:Fallback>
+          <p:sp>
+            <p:nvSpPr>
+              <p:cNvPr id="67" name="Rectangle 66"/>
+              <p:cNvSpPr>
+                <a:spLocks noRot="1" noChangeAspect="1" noMove="1" noResize="1" noEditPoints="1" noAdjustHandles="1" noChangeArrowheads="1" noChangeShapeType="1" noTextEdit="1"/>
+              </p:cNvSpPr>
+              <p:nvPr/>
+            </p:nvSpPr>
+            <p:spPr>
+              <a:xfrm>
+                <a:off x="7622162" y="3665715"/>
+                <a:ext cx="689676" cy="686470"/>
+              </a:xfrm>
+              <a:prstGeom prst="rect">
+                <a:avLst/>
+              </a:prstGeom>
+              <a:blipFill>
+                <a:blip r:embed="rId10"/>
+                <a:stretch>
+                  <a:fillRect/>
+                </a:stretch>
+              </a:blipFill>
+            </p:spPr>
+            <p:txBody>
+              <a:bodyPr/>
+              <a:lstStyle/>
+              <a:p>
+                <a:r>
+                  <a:rPr lang="sv-SE">
+                    <a:noFill/>
+                  </a:rPr>
+                  <a:t> </a:t>
+                </a:r>
+              </a:p>
+            </p:txBody>
+          </p:sp>
+        </mc:Fallback>
+      </mc:AlternateContent>
+      <mc:AlternateContent xmlns:mc="http://schemas.openxmlformats.org/markup-compatibility/2006">
+        <mc:Choice xmlns:a14="http://schemas.microsoft.com/office/drawing/2010/main" Requires="a14">
+          <p:sp>
+            <p:nvSpPr>
+              <p:cNvPr id="68" name="Rectangle 67"/>
+              <p:cNvSpPr/>
+              <p:nvPr/>
+            </p:nvSpPr>
+            <p:spPr>
+              <a:xfrm>
+                <a:off x="7772890" y="2862630"/>
+                <a:ext cx="705578" cy="686470"/>
+              </a:xfrm>
+              <a:prstGeom prst="rect">
+                <a:avLst/>
+              </a:prstGeom>
+            </p:spPr>
+            <p:txBody>
+              <a:bodyPr wrap="none">
+                <a:spAutoFit/>
+              </a:bodyPr>
+              <a:lstStyle/>
+              <a:p>
+                <a14:m>
+                  <m:oMathPara xmlns:m="http://schemas.openxmlformats.org/officeDocument/2006/math">
+                    <m:oMathParaPr>
+                      <m:jc m:val="centerGroup"/>
+                    </m:oMathParaPr>
+                    <m:oMath xmlns:m="http://schemas.openxmlformats.org/officeDocument/2006/math">
+                      <m:f>
+                        <m:fPr>
+                          <m:ctrlPr>
+                            <a:rPr lang="en-US" b="0" i="1" smtClean="0">
+                              <a:solidFill>
+                                <a:srgbClr val="E622EB"/>
+                              </a:solidFill>
+                              <a:latin typeface="Cambria Math" panose="02040503050406030204" pitchFamily="18" charset="0"/>
+                            </a:rPr>
+                          </m:ctrlPr>
+                        </m:fPr>
+                        <m:num>
+                          <m:sSup>
+                            <m:sSupPr>
+                              <m:ctrlPr>
+                                <a:rPr lang="en-US" b="0" i="1" smtClean="0">
+                                  <a:solidFill>
+                                    <a:srgbClr val="E622EB"/>
+                                  </a:solidFill>
+                                  <a:latin typeface="Cambria Math" panose="02040503050406030204" pitchFamily="18" charset="0"/>
+                                </a:rPr>
+                              </m:ctrlPr>
+                            </m:sSupPr>
+                            <m:e>
+                              <m:acc>
+                                <m:accPr>
+                                  <m:chr m:val="̂"/>
+                                  <m:ctrlPr>
+                                    <a:rPr lang="en-US" b="0" i="1" smtClean="0">
+                                      <a:solidFill>
+                                        <a:srgbClr val="E622EB"/>
+                                      </a:solidFill>
+                                      <a:latin typeface="Cambria Math" panose="02040503050406030204" pitchFamily="18" charset="0"/>
+                                    </a:rPr>
+                                  </m:ctrlPr>
+                                </m:accPr>
+                                <m:e>
+                                  <m:sSub>
+                                    <m:sSubPr>
+                                      <m:ctrlPr>
+                                        <a:rPr lang="en-US" b="0" i="1" smtClean="0">
+                                          <a:solidFill>
+                                            <a:srgbClr val="E622EB"/>
+                                          </a:solidFill>
+                                          <a:latin typeface="Cambria Math" panose="02040503050406030204" pitchFamily="18" charset="0"/>
+                                        </a:rPr>
+                                      </m:ctrlPr>
+                                    </m:sSubPr>
+                                    <m:e>
+                                      <m:r>
+                                        <a:rPr lang="en-US" b="0" i="1" smtClean="0">
+                                          <a:solidFill>
+                                            <a:srgbClr val="E622EB"/>
+                                          </a:solidFill>
+                                          <a:latin typeface="Cambria Math" panose="02040503050406030204" pitchFamily="18" charset="0"/>
+                                        </a:rPr>
+                                        <m:t>𝑉</m:t>
+                                      </m:r>
+                                    </m:e>
+                                    <m:sub>
+                                      <m:r>
+                                        <a:rPr lang="en-US" b="0" i="1" smtClean="0">
+                                          <a:solidFill>
+                                            <a:srgbClr val="E622EB"/>
+                                          </a:solidFill>
+                                          <a:latin typeface="Cambria Math" panose="02040503050406030204" pitchFamily="18" charset="0"/>
+                                        </a:rPr>
+                                        <m:t>𝐵</m:t>
+                                      </m:r>
+                                    </m:sub>
+                                  </m:sSub>
+                                </m:e>
+                              </m:acc>
+                            </m:e>
+                            <m:sup>
+                              <m:sSub>
+                                <m:sSubPr>
+                                  <m:ctrlPr>
+                                    <a:rPr lang="en-US" b="0" i="1" smtClean="0">
+                                      <a:solidFill>
+                                        <a:srgbClr val="E622EB"/>
+                                      </a:solidFill>
+                                      <a:latin typeface="Cambria Math" panose="02040503050406030204" pitchFamily="18" charset="0"/>
+                                    </a:rPr>
+                                  </m:ctrlPr>
+                                </m:sSubPr>
+                                <m:e>
+                                  <m:r>
+                                    <a:rPr lang="en-US" b="0" i="1" smtClean="0">
+                                      <a:solidFill>
+                                        <a:srgbClr val="E622EB"/>
+                                      </a:solidFill>
+                                      <a:latin typeface="Cambria Math" panose="02040503050406030204" pitchFamily="18" charset="0"/>
+                                    </a:rPr>
+                                    <m:t>𝜔</m:t>
+                                  </m:r>
+                                </m:e>
+                                <m:sub>
+                                  <m:r>
+                                    <a:rPr lang="en-US" b="0" i="1" smtClean="0">
+                                      <a:solidFill>
+                                        <a:srgbClr val="E622EB"/>
+                                      </a:solidFill>
+                                      <a:latin typeface="Cambria Math" panose="02040503050406030204" pitchFamily="18" charset="0"/>
+                                    </a:rPr>
+                                    <m:t>𝑐</m:t>
+                                  </m:r>
+                                </m:sub>
+                              </m:sSub>
+                            </m:sup>
+                          </m:sSup>
+                        </m:num>
+                        <m:den>
+                          <m:r>
+                            <a:rPr lang="en-US" b="0" i="1" smtClean="0">
+                              <a:solidFill>
+                                <a:srgbClr val="E622EB"/>
+                              </a:solidFill>
+                              <a:latin typeface="Cambria Math" panose="02040503050406030204" pitchFamily="18" charset="0"/>
+                            </a:rPr>
+                            <m:t>3</m:t>
+                          </m:r>
+                        </m:den>
+                      </m:f>
+                    </m:oMath>
+                  </m:oMathPara>
+                </a14:m>
+                <a:endParaRPr lang="sv-SE" dirty="0">
+                  <a:solidFill>
+                    <a:srgbClr val="E622EB"/>
+                  </a:solidFill>
+                </a:endParaRPr>
+              </a:p>
+            </p:txBody>
+          </p:sp>
+        </mc:Choice>
+        <mc:Fallback>
+          <p:sp>
+            <p:nvSpPr>
+              <p:cNvPr id="68" name="Rectangle 67"/>
+              <p:cNvSpPr>
+                <a:spLocks noRot="1" noChangeAspect="1" noMove="1" noResize="1" noEditPoints="1" noAdjustHandles="1" noChangeArrowheads="1" noChangeShapeType="1" noTextEdit="1"/>
+              </p:cNvSpPr>
+              <p:nvPr/>
+            </p:nvSpPr>
+            <p:spPr>
+              <a:xfrm>
+                <a:off x="7772890" y="2862630"/>
+                <a:ext cx="705578" cy="686470"/>
+              </a:xfrm>
+              <a:prstGeom prst="rect">
+                <a:avLst/>
+              </a:prstGeom>
+              <a:blipFill>
+                <a:blip r:embed="rId11"/>
+                <a:stretch>
+                  <a:fillRect/>
+                </a:stretch>
+              </a:blipFill>
+            </p:spPr>
+            <p:txBody>
+              <a:bodyPr/>
+              <a:lstStyle/>
+              <a:p>
+                <a:r>
+                  <a:rPr lang="sv-SE">
+                    <a:noFill/>
+                  </a:rPr>
+                  <a:t> </a:t>
+                </a:r>
+              </a:p>
+            </p:txBody>
+          </p:sp>
+        </mc:Fallback>
+      </mc:AlternateContent>
+      <mc:AlternateContent xmlns:mc="http://schemas.openxmlformats.org/markup-compatibility/2006">
+        <mc:Choice xmlns:a14="http://schemas.microsoft.com/office/drawing/2010/main" Requires="a14">
+          <p:sp>
+            <p:nvSpPr>
+              <p:cNvPr id="69" name="Rectangle 68"/>
+              <p:cNvSpPr/>
+              <p:nvPr/>
+            </p:nvSpPr>
+            <p:spPr>
+              <a:xfrm>
+                <a:off x="6640729" y="2828146"/>
+                <a:ext cx="697242" cy="686470"/>
+              </a:xfrm>
+              <a:prstGeom prst="rect">
+                <a:avLst/>
+              </a:prstGeom>
+            </p:spPr>
+            <p:txBody>
+              <a:bodyPr wrap="none">
+                <a:spAutoFit/>
+              </a:bodyPr>
+              <a:lstStyle/>
+              <a:p>
+                <a14:m>
+                  <m:oMathPara xmlns:m="http://schemas.openxmlformats.org/officeDocument/2006/math">
+                    <m:oMathParaPr>
+                      <m:jc m:val="centerGroup"/>
+                    </m:oMathParaPr>
+                    <m:oMath xmlns:m="http://schemas.openxmlformats.org/officeDocument/2006/math">
+                      <m:f>
+                        <m:fPr>
+                          <m:ctrlPr>
+                            <a:rPr lang="en-US" b="0" i="1" smtClean="0">
+                              <a:solidFill>
+                                <a:srgbClr val="92D050"/>
+                              </a:solidFill>
+                              <a:latin typeface="Cambria Math" panose="02040503050406030204" pitchFamily="18" charset="0"/>
+                            </a:rPr>
+                          </m:ctrlPr>
+                        </m:fPr>
+                        <m:num>
+                          <m:sSup>
+                            <m:sSupPr>
+                              <m:ctrlPr>
+                                <a:rPr lang="en-US" b="0" i="1" smtClean="0">
+                                  <a:solidFill>
+                                    <a:srgbClr val="92D050"/>
+                                  </a:solidFill>
+                                  <a:latin typeface="Cambria Math" panose="02040503050406030204" pitchFamily="18" charset="0"/>
+                                </a:rPr>
+                              </m:ctrlPr>
+                            </m:sSupPr>
+                            <m:e>
+                              <m:acc>
+                                <m:accPr>
+                                  <m:chr m:val="̂"/>
+                                  <m:ctrlPr>
+                                    <a:rPr lang="en-US" b="0" i="1" smtClean="0">
+                                      <a:solidFill>
+                                        <a:srgbClr val="92D050"/>
+                                      </a:solidFill>
+                                      <a:latin typeface="Cambria Math" panose="02040503050406030204" pitchFamily="18" charset="0"/>
+                                    </a:rPr>
+                                  </m:ctrlPr>
+                                </m:accPr>
+                                <m:e>
+                                  <m:sSub>
+                                    <m:sSubPr>
+                                      <m:ctrlPr>
+                                        <a:rPr lang="en-US" b="0" i="1" smtClean="0">
+                                          <a:solidFill>
+                                            <a:srgbClr val="92D050"/>
+                                          </a:solidFill>
+                                          <a:latin typeface="Cambria Math" panose="02040503050406030204" pitchFamily="18" charset="0"/>
+                                        </a:rPr>
+                                      </m:ctrlPr>
+                                    </m:sSubPr>
+                                    <m:e>
+                                      <m:r>
+                                        <a:rPr lang="en-US" b="0" i="1" smtClean="0">
+                                          <a:solidFill>
+                                            <a:srgbClr val="92D050"/>
+                                          </a:solidFill>
+                                          <a:latin typeface="Cambria Math" panose="02040503050406030204" pitchFamily="18" charset="0"/>
+                                        </a:rPr>
+                                        <m:t>𝑉</m:t>
+                                      </m:r>
+                                    </m:e>
+                                    <m:sub>
+                                      <m:r>
+                                        <a:rPr lang="en-US" b="0" i="1" smtClean="0">
+                                          <a:solidFill>
+                                            <a:srgbClr val="92D050"/>
+                                          </a:solidFill>
+                                          <a:latin typeface="Cambria Math" panose="02040503050406030204" pitchFamily="18" charset="0"/>
+                                        </a:rPr>
+                                        <m:t>𝐶</m:t>
+                                      </m:r>
+                                    </m:sub>
+                                  </m:sSub>
+                                </m:e>
+                              </m:acc>
+                            </m:e>
+                            <m:sup>
+                              <m:sSub>
+                                <m:sSubPr>
+                                  <m:ctrlPr>
+                                    <a:rPr lang="en-US" b="0" i="1" smtClean="0">
+                                      <a:solidFill>
+                                        <a:srgbClr val="92D050"/>
+                                      </a:solidFill>
+                                      <a:latin typeface="Cambria Math" panose="02040503050406030204" pitchFamily="18" charset="0"/>
+                                    </a:rPr>
+                                  </m:ctrlPr>
+                                </m:sSubPr>
+                                <m:e>
+                                  <m:r>
+                                    <a:rPr lang="en-US" b="0" i="1" smtClean="0">
+                                      <a:solidFill>
+                                        <a:srgbClr val="92D050"/>
+                                      </a:solidFill>
+                                      <a:latin typeface="Cambria Math" panose="02040503050406030204" pitchFamily="18" charset="0"/>
+                                    </a:rPr>
+                                    <m:t>𝜔</m:t>
+                                  </m:r>
+                                </m:e>
+                                <m:sub>
+                                  <m:r>
+                                    <a:rPr lang="en-US" b="0" i="1" smtClean="0">
+                                      <a:solidFill>
+                                        <a:srgbClr val="92D050"/>
+                                      </a:solidFill>
+                                      <a:latin typeface="Cambria Math" panose="02040503050406030204" pitchFamily="18" charset="0"/>
+                                    </a:rPr>
+                                    <m:t>𝑐</m:t>
+                                  </m:r>
+                                </m:sub>
+                              </m:sSub>
+                            </m:sup>
+                          </m:sSup>
+                        </m:num>
+                        <m:den>
+                          <m:r>
+                            <a:rPr lang="en-US" b="0" i="1" smtClean="0">
+                              <a:solidFill>
+                                <a:srgbClr val="92D050"/>
+                              </a:solidFill>
+                              <a:latin typeface="Cambria Math" panose="02040503050406030204" pitchFamily="18" charset="0"/>
+                            </a:rPr>
+                            <m:t>3</m:t>
+                          </m:r>
+                        </m:den>
+                      </m:f>
+                    </m:oMath>
+                  </m:oMathPara>
+                </a14:m>
+                <a:endParaRPr lang="sv-SE" dirty="0">
+                  <a:solidFill>
+                    <a:srgbClr val="E622EB"/>
+                  </a:solidFill>
+                </a:endParaRPr>
+              </a:p>
+            </p:txBody>
+          </p:sp>
+        </mc:Choice>
+        <mc:Fallback>
+          <p:sp>
+            <p:nvSpPr>
+              <p:cNvPr id="69" name="Rectangle 68"/>
+              <p:cNvSpPr>
+                <a:spLocks noRot="1" noChangeAspect="1" noMove="1" noResize="1" noEditPoints="1" noAdjustHandles="1" noChangeArrowheads="1" noChangeShapeType="1" noTextEdit="1"/>
+              </p:cNvSpPr>
+              <p:nvPr/>
+            </p:nvSpPr>
+            <p:spPr>
+              <a:xfrm>
+                <a:off x="6640729" y="2828146"/>
+                <a:ext cx="697242" cy="686470"/>
+              </a:xfrm>
+              <a:prstGeom prst="rect">
+                <a:avLst/>
+              </a:prstGeom>
+              <a:blipFill>
+                <a:blip r:embed="rId12"/>
+                <a:stretch>
+                  <a:fillRect/>
+                </a:stretch>
+              </a:blipFill>
+            </p:spPr>
+            <p:txBody>
+              <a:bodyPr/>
+              <a:lstStyle/>
+              <a:p>
+                <a:r>
+                  <a:rPr lang="sv-SE">
+                    <a:noFill/>
+                  </a:rPr>
+                  <a:t> </a:t>
+                </a:r>
+              </a:p>
+            </p:txBody>
+          </p:sp>
+        </mc:Fallback>
+      </mc:AlternateContent>
+      <p:sp>
+        <p:nvSpPr>
+          <p:cNvPr id="70" name="TextBox 69"/>
+          <p:cNvSpPr txBox="1"/>
+          <p:nvPr/>
+        </p:nvSpPr>
+        <p:spPr>
+          <a:xfrm>
+            <a:off x="7126048" y="4495555"/>
+            <a:ext cx="714541" cy="369332"/>
+          </a:xfrm>
+          <a:prstGeom prst="rect">
+            <a:avLst/>
+          </a:prstGeom>
+          <a:noFill/>
+        </p:spPr>
+        <p:txBody>
+          <a:bodyPr wrap="square" rtlCol="0">
+            <a:spAutoFit/>
+          </a:bodyPr>
+          <a:lstStyle/>
+          <a:p>
+            <a:r>
+              <a:rPr lang="en-US" dirty="0" smtClean="0"/>
+              <a:t>(b)</a:t>
+            </a:r>
+            <a:endParaRPr lang="sv-SE" dirty="0"/>
+          </a:p>
+        </p:txBody>
+      </p:sp>
+      <p:cxnSp>
+        <p:nvCxnSpPr>
+          <p:cNvPr id="71" name="Straight Arrow Connector 70"/>
+          <p:cNvCxnSpPr/>
+          <p:nvPr/>
+        </p:nvCxnSpPr>
+        <p:spPr>
+          <a:xfrm flipV="1">
+            <a:off x="7299598" y="3514616"/>
+            <a:ext cx="25134" cy="397791"/>
+          </a:xfrm>
+          <a:prstGeom prst="straightConnector1">
+            <a:avLst/>
+          </a:prstGeom>
+          <a:ln w="25400">
+            <a:solidFill>
+              <a:srgbClr val="FF0000"/>
+            </a:solidFill>
+            <a:tailEnd type="triangle"/>
+          </a:ln>
+        </p:spPr>
+        <p:style>
+          <a:lnRef idx="1">
+            <a:schemeClr val="accent1"/>
+          </a:lnRef>
+          <a:fillRef idx="0">
+            <a:schemeClr val="accent1"/>
+          </a:fillRef>
+          <a:effectRef idx="0">
+            <a:schemeClr val="accent1"/>
+          </a:effectRef>
+          <a:fontRef idx="minor">
+            <a:schemeClr val="tx1"/>
+          </a:fontRef>
+        </p:style>
+      </p:cxnSp>
+      <mc:AlternateContent xmlns:mc="http://schemas.openxmlformats.org/markup-compatibility/2006">
+        <mc:Choice xmlns:a14="http://schemas.microsoft.com/office/drawing/2010/main" Requires="a14">
+          <p:sp>
+            <p:nvSpPr>
+              <p:cNvPr id="75" name="Rectangle 74"/>
+              <p:cNvSpPr/>
+              <p:nvPr/>
+            </p:nvSpPr>
+            <p:spPr>
+              <a:xfrm>
+                <a:off x="6542940" y="3496600"/>
+                <a:ext cx="841449" cy="408638"/>
+              </a:xfrm>
+              <a:prstGeom prst="rect">
+                <a:avLst/>
+              </a:prstGeom>
+            </p:spPr>
+            <p:txBody>
+              <a:bodyPr wrap="none">
+                <a:spAutoFit/>
+              </a:bodyPr>
+              <a:lstStyle/>
+              <a:p>
+                <a14:m>
+                  <m:oMathPara xmlns:m="http://schemas.openxmlformats.org/officeDocument/2006/math">
+                    <m:oMathParaPr>
+                      <m:jc m:val="centerGroup"/>
+                    </m:oMathParaPr>
+                    <m:oMath xmlns:m="http://schemas.openxmlformats.org/officeDocument/2006/math">
+                      <m:sSup>
+                        <m:sSupPr>
+                          <m:ctrlPr>
+                            <a:rPr lang="en-US" b="0" i="1" smtClean="0">
+                              <a:solidFill>
+                                <a:srgbClr val="FF0000"/>
+                              </a:solidFill>
+                              <a:latin typeface="Cambria Math" panose="02040503050406030204" pitchFamily="18" charset="0"/>
+                            </a:rPr>
+                          </m:ctrlPr>
+                        </m:sSupPr>
+                        <m:e>
+                          <m:acc>
+                            <m:accPr>
+                              <m:chr m:val="̂"/>
+                              <m:ctrlPr>
+                                <a:rPr lang="en-US" b="0" i="1" smtClean="0">
+                                  <a:solidFill>
+                                    <a:srgbClr val="FF0000"/>
+                                  </a:solidFill>
+                                  <a:latin typeface="Cambria Math" panose="02040503050406030204" pitchFamily="18" charset="0"/>
+                                </a:rPr>
+                              </m:ctrlPr>
+                            </m:accPr>
+                            <m:e>
+                              <m:sSub>
+                                <m:sSubPr>
+                                  <m:ctrlPr>
+                                    <a:rPr lang="en-US" b="0" i="1" smtClean="0">
+                                      <a:solidFill>
+                                        <a:srgbClr val="FF0000"/>
+                                      </a:solidFill>
+                                      <a:latin typeface="Cambria Math" panose="02040503050406030204" pitchFamily="18" charset="0"/>
+                                    </a:rPr>
+                                  </m:ctrlPr>
+                                </m:sSubPr>
+                                <m:e>
+                                  <m:r>
+                                    <a:rPr lang="en-US" b="0" i="1" smtClean="0">
+                                      <a:solidFill>
+                                        <a:srgbClr val="FF0000"/>
+                                      </a:solidFill>
+                                      <a:latin typeface="Cambria Math" panose="02040503050406030204" pitchFamily="18" charset="0"/>
+                                    </a:rPr>
+                                    <m:t>𝑉</m:t>
+                                  </m:r>
+                                </m:e>
+                                <m:sub>
+                                  <m:r>
+                                    <a:rPr lang="en-US" b="0" i="1" smtClean="0">
+                                      <a:solidFill>
+                                        <a:srgbClr val="FF0000"/>
+                                      </a:solidFill>
+                                      <a:latin typeface="Cambria Math" panose="02040503050406030204" pitchFamily="18" charset="0"/>
+                                    </a:rPr>
+                                    <m:t>𝐶𝑀</m:t>
+                                  </m:r>
+                                </m:sub>
+                              </m:sSub>
+                            </m:e>
+                          </m:acc>
+                        </m:e>
+                        <m:sup>
+                          <m:sSub>
+                            <m:sSubPr>
+                              <m:ctrlPr>
+                                <a:rPr lang="en-US" b="0" i="1" smtClean="0">
+                                  <a:solidFill>
+                                    <a:srgbClr val="FF0000"/>
+                                  </a:solidFill>
+                                  <a:latin typeface="Cambria Math" panose="02040503050406030204" pitchFamily="18" charset="0"/>
+                                </a:rPr>
+                              </m:ctrlPr>
+                            </m:sSubPr>
+                            <m:e>
+                              <m:r>
+                                <a:rPr lang="en-US" b="0" i="1" smtClean="0">
+                                  <a:solidFill>
+                                    <a:srgbClr val="FF0000"/>
+                                  </a:solidFill>
+                                  <a:latin typeface="Cambria Math" panose="02040503050406030204" pitchFamily="18" charset="0"/>
+                                </a:rPr>
+                                <m:t>𝜔</m:t>
+                              </m:r>
+                            </m:e>
+                            <m:sub>
+                              <m:r>
+                                <a:rPr lang="en-US" b="0" i="1" smtClean="0">
+                                  <a:solidFill>
+                                    <a:srgbClr val="FF0000"/>
+                                  </a:solidFill>
+                                  <a:latin typeface="Cambria Math" panose="02040503050406030204" pitchFamily="18" charset="0"/>
+                                </a:rPr>
+                                <m:t>𝑐</m:t>
+                              </m:r>
+                            </m:sub>
+                          </m:sSub>
+                        </m:sup>
+                      </m:sSup>
+                    </m:oMath>
+                  </m:oMathPara>
+                </a14:m>
+                <a:endParaRPr lang="sv-SE" dirty="0">
+                  <a:solidFill>
+                    <a:srgbClr val="E622EB"/>
+                  </a:solidFill>
+                </a:endParaRPr>
+              </a:p>
+            </p:txBody>
+          </p:sp>
+        </mc:Choice>
+        <mc:Fallback>
+          <p:sp>
+            <p:nvSpPr>
+              <p:cNvPr id="75" name="Rectangle 74"/>
+              <p:cNvSpPr>
+                <a:spLocks noRot="1" noChangeAspect="1" noMove="1" noResize="1" noEditPoints="1" noAdjustHandles="1" noChangeArrowheads="1" noChangeShapeType="1" noTextEdit="1"/>
+              </p:cNvSpPr>
+              <p:nvPr/>
+            </p:nvSpPr>
+            <p:spPr>
+              <a:xfrm>
+                <a:off x="6542940" y="3496600"/>
+                <a:ext cx="841449" cy="408638"/>
+              </a:xfrm>
+              <a:prstGeom prst="rect">
+                <a:avLst/>
+              </a:prstGeom>
+              <a:blipFill>
+                <a:blip r:embed="rId13"/>
+                <a:stretch>
+                  <a:fillRect r="-10145"/>
+                </a:stretch>
+              </a:blipFill>
+            </p:spPr>
+            <p:txBody>
+              <a:bodyPr/>
+              <a:lstStyle/>
+              <a:p>
+                <a:r>
+                  <a:rPr lang="sv-SE">
+                    <a:noFill/>
+                  </a:rPr>
+                  <a:t> </a:t>
+                </a:r>
+              </a:p>
+            </p:txBody>
+          </p:sp>
+        </mc:Fallback>
+      </mc:AlternateContent>
+    </p:spTree>
+    <p:extLst>
+      <p:ext uri="{BB962C8B-B14F-4D97-AF65-F5344CB8AC3E}">
+        <p14:creationId xmlns:p14="http://schemas.microsoft.com/office/powerpoint/2010/main" val="495536278"/>
+      </p:ext>
+    </p:extLst>
+  </p:cSld>
+  <p:clrMapOvr>
+    <a:masterClrMapping/>
+  </p:clrMapOvr>
+</p:sld>
+</file>
+
+<file path=ppt/slides/slide22.xml><?xml version="1.0" encoding="utf-8"?>
+<p:sld xmlns:a="http://schemas.openxmlformats.org/drawingml/2006/main" xmlns:r="http://schemas.openxmlformats.org/officeDocument/2006/relationships" xmlns:p="http://schemas.openxmlformats.org/presentationml/2006/main">
+  <p:cSld>
+    <p:spTree>
+      <p:nvGrpSpPr>
+        <p:cNvPr id="1" name=""/>
+        <p:cNvGrpSpPr/>
+        <p:nvPr/>
+      </p:nvGrpSpPr>
+      <p:grpSpPr>
+        <a:xfrm>
+          <a:off x="0" y="0"/>
+          <a:ext cx="0" cy="0"/>
+          <a:chOff x="0" y="0"/>
+          <a:chExt cx="0" cy="0"/>
+        </a:xfrm>
+      </p:grpSpPr>
+      <p:cxnSp>
+        <p:nvCxnSpPr>
+          <p:cNvPr id="19" name="Straight Arrow Connector 18"/>
+          <p:cNvCxnSpPr/>
+          <p:nvPr/>
+        </p:nvCxnSpPr>
+        <p:spPr>
+          <a:xfrm flipV="1">
+            <a:off x="5598419" y="1518928"/>
+            <a:ext cx="2277751" cy="1844"/>
+          </a:xfrm>
+          <a:prstGeom prst="straightConnector1">
+            <a:avLst/>
+          </a:prstGeom>
+          <a:ln w="25400">
+            <a:solidFill>
+              <a:srgbClr val="002060"/>
+            </a:solidFill>
+            <a:tailEnd type="triangle"/>
+          </a:ln>
+        </p:spPr>
+        <p:style>
+          <a:lnRef idx="1">
+            <a:schemeClr val="accent1"/>
+          </a:lnRef>
+          <a:fillRef idx="0">
+            <a:schemeClr val="accent1"/>
+          </a:fillRef>
+          <a:effectRef idx="0">
+            <a:schemeClr val="accent1"/>
+          </a:effectRef>
+          <a:fontRef idx="minor">
+            <a:schemeClr val="tx1"/>
+          </a:fontRef>
+        </p:style>
+      </p:cxnSp>
+      <p:cxnSp>
+        <p:nvCxnSpPr>
+          <p:cNvPr id="20" name="Straight Arrow Connector 19"/>
+          <p:cNvCxnSpPr/>
+          <p:nvPr/>
+        </p:nvCxnSpPr>
+        <p:spPr>
+          <a:xfrm flipV="1">
+            <a:off x="7863176" y="742776"/>
+            <a:ext cx="903463" cy="762264"/>
+          </a:xfrm>
+          <a:prstGeom prst="straightConnector1">
+            <a:avLst/>
+          </a:prstGeom>
+          <a:ln w="25400">
+            <a:solidFill>
+              <a:srgbClr val="E622EB"/>
+            </a:solidFill>
+            <a:tailEnd type="triangle"/>
+          </a:ln>
+        </p:spPr>
+        <p:style>
+          <a:lnRef idx="1">
+            <a:schemeClr val="accent1"/>
+          </a:lnRef>
+          <a:fillRef idx="0">
+            <a:schemeClr val="accent1"/>
+          </a:fillRef>
+          <a:effectRef idx="0">
+            <a:schemeClr val="accent1"/>
+          </a:effectRef>
+          <a:fontRef idx="minor">
+            <a:schemeClr val="tx1"/>
+          </a:fontRef>
+        </p:style>
+      </p:cxnSp>
+      <p:cxnSp>
+        <p:nvCxnSpPr>
+          <p:cNvPr id="21" name="Straight Arrow Connector 20"/>
+          <p:cNvCxnSpPr/>
+          <p:nvPr/>
+        </p:nvCxnSpPr>
+        <p:spPr>
+          <a:xfrm flipH="1">
+            <a:off x="5521703" y="758151"/>
+            <a:ext cx="3177712" cy="746536"/>
+          </a:xfrm>
+          <a:prstGeom prst="straightConnector1">
+            <a:avLst/>
+          </a:prstGeom>
+          <a:ln w="25400">
+            <a:solidFill>
+              <a:srgbClr val="92D050"/>
+            </a:solidFill>
+            <a:tailEnd type="triangle"/>
+          </a:ln>
+        </p:spPr>
+        <p:style>
+          <a:lnRef idx="1">
+            <a:schemeClr val="accent1"/>
+          </a:lnRef>
+          <a:fillRef idx="0">
+            <a:schemeClr val="accent1"/>
+          </a:fillRef>
+          <a:effectRef idx="0">
+            <a:schemeClr val="accent1"/>
+          </a:effectRef>
+          <a:fontRef idx="minor">
+            <a:schemeClr val="tx1"/>
+          </a:fontRef>
+        </p:style>
+      </p:cxnSp>
+      <p:sp>
+        <p:nvSpPr>
+          <p:cNvPr id="27" name="TextBox 26"/>
+          <p:cNvSpPr txBox="1"/>
+          <p:nvPr/>
+        </p:nvSpPr>
+        <p:spPr>
+          <a:xfrm>
+            <a:off x="6746421" y="1924013"/>
+            <a:ext cx="714541" cy="369332"/>
+          </a:xfrm>
+          <a:prstGeom prst="rect">
+            <a:avLst/>
+          </a:prstGeom>
+          <a:noFill/>
+        </p:spPr>
+        <p:txBody>
+          <a:bodyPr wrap="square" rtlCol="0">
+            <a:spAutoFit/>
+          </a:bodyPr>
+          <a:lstStyle/>
+          <a:p>
+            <a:r>
+              <a:rPr lang="en-US" dirty="0" smtClean="0"/>
+              <a:t>(a)</a:t>
+            </a:r>
+            <a:endParaRPr lang="sv-SE" dirty="0"/>
+          </a:p>
+        </p:txBody>
+      </p:sp>
+      <mc:AlternateContent xmlns:mc="http://schemas.openxmlformats.org/markup-compatibility/2006">
+        <mc:Choice xmlns:a14="http://schemas.microsoft.com/office/drawing/2010/main" Requires="a14">
+          <p:sp>
+            <p:nvSpPr>
+              <p:cNvPr id="30" name="Rectangle 29">
+                <a:extLst>
+                  <a:ext uri="{FF2B5EF4-FFF2-40B4-BE49-F238E27FC236}">
+                    <a16:creationId xmlns:a16="http://schemas.microsoft.com/office/drawing/2014/main" id="{E329F2A0-7DC8-470C-A880-FA136EC5CE95}"/>
+                  </a:ext>
+                </a:extLst>
+              </p:cNvPr>
+              <p:cNvSpPr/>
+              <p:nvPr/>
+            </p:nvSpPr>
+            <p:spPr>
+              <a:xfrm>
+                <a:off x="-1959360" y="-214896"/>
+                <a:ext cx="3870419" cy="646331"/>
+              </a:xfrm>
+              <a:prstGeom prst="rect">
+                <a:avLst/>
+              </a:prstGeom>
+            </p:spPr>
+            <p:txBody>
+              <a:bodyPr wrap="none">
+                <a:spAutoFit/>
+              </a:bodyPr>
+              <a:lstStyle/>
+              <a:p>
+                <a:r>
+                  <a:rPr lang="en-US" b="1" dirty="0"/>
+                  <a:t>if </a:t>
+                </a:r>
+                <a14:m>
+                  <m:oMath xmlns:m="http://schemas.openxmlformats.org/officeDocument/2006/math">
+                    <m:sSub>
+                      <m:sSubPr>
+                        <m:ctrlPr>
+                          <a:rPr lang="en-US" b="1" i="1" smtClean="0">
+                            <a:latin typeface="Cambria Math" panose="02040503050406030204" pitchFamily="18" charset="0"/>
+                          </a:rPr>
+                        </m:ctrlPr>
+                      </m:sSubPr>
+                      <m:e>
+                        <m:r>
+                          <a:rPr lang="en-US" b="1" i="0" smtClean="0">
+                            <a:latin typeface="Cambria Math" panose="02040503050406030204" pitchFamily="18" charset="0"/>
+                          </a:rPr>
+                          <m:t> |</m:t>
+                        </m:r>
+                        <m:r>
+                          <a:rPr lang="sv-SE" b="1" i="1">
+                            <a:latin typeface="Cambria Math" panose="02040503050406030204" pitchFamily="18" charset="0"/>
+                          </a:rPr>
+                          <m:t>𝒗</m:t>
+                        </m:r>
+                      </m:e>
+                      <m:sub>
+                        <m:r>
+                          <a:rPr lang="en-US" b="1" i="1">
+                            <a:latin typeface="Cambria Math" panose="02040503050406030204" pitchFamily="18" charset="0"/>
+                          </a:rPr>
+                          <m:t>𝑨</m:t>
+                        </m:r>
+                      </m:sub>
+                    </m:sSub>
+                    <m:r>
+                      <a:rPr lang="en-US" b="1" i="1" smtClean="0">
+                        <a:latin typeface="Cambria Math" panose="02040503050406030204" pitchFamily="18" charset="0"/>
+                      </a:rPr>
+                      <m:t>−</m:t>
+                    </m:r>
+                    <m:sSub>
+                      <m:sSubPr>
+                        <m:ctrlPr>
+                          <a:rPr lang="en-US" b="1" i="1">
+                            <a:latin typeface="Cambria Math" panose="02040503050406030204" pitchFamily="18" charset="0"/>
+                          </a:rPr>
+                        </m:ctrlPr>
+                      </m:sSubPr>
+                      <m:e>
+                        <m:r>
+                          <a:rPr lang="sv-SE" b="1" i="1">
+                            <a:latin typeface="Cambria Math" panose="02040503050406030204" pitchFamily="18" charset="0"/>
+                          </a:rPr>
+                          <m:t>𝒗</m:t>
+                        </m:r>
+                      </m:e>
+                      <m:sub>
+                        <m:r>
+                          <a:rPr lang="en-US" b="1" i="1">
+                            <a:latin typeface="Cambria Math" panose="02040503050406030204" pitchFamily="18" charset="0"/>
+                          </a:rPr>
+                          <m:t>𝑩</m:t>
+                        </m:r>
+                      </m:sub>
+                    </m:sSub>
+                    <m:r>
+                      <a:rPr lang="en-US" b="1" i="1" smtClean="0">
+                        <a:latin typeface="Cambria Math" panose="02040503050406030204" pitchFamily="18" charset="0"/>
+                      </a:rPr>
+                      <m:t>|</m:t>
+                    </m:r>
+                  </m:oMath>
+                </a14:m>
+                <a:r>
+                  <a:rPr lang="en-US" b="1" dirty="0"/>
+                  <a:t> &lt; </a:t>
+                </a:r>
+                <a14:m>
+                  <m:oMath xmlns:m="http://schemas.openxmlformats.org/officeDocument/2006/math">
+                    <m:sSub>
+                      <m:sSubPr>
+                        <m:ctrlPr>
+                          <a:rPr lang="en-US" b="1" i="1">
+                            <a:latin typeface="Cambria Math" panose="02040503050406030204" pitchFamily="18" charset="0"/>
+                          </a:rPr>
+                        </m:ctrlPr>
+                      </m:sSubPr>
+                      <m:e>
+                        <m:r>
+                          <a:rPr lang="sv-SE" b="1" i="1">
+                            <a:latin typeface="Cambria Math" panose="02040503050406030204" pitchFamily="18" charset="0"/>
+                          </a:rPr>
+                          <m:t>𝒗</m:t>
+                        </m:r>
+                      </m:e>
+                      <m:sub>
+                        <m:r>
+                          <a:rPr lang="en-US" b="1" i="0" smtClean="0">
+                            <a:latin typeface="Cambria Math" panose="02040503050406030204" pitchFamily="18" charset="0"/>
+                          </a:rPr>
+                          <m:t>𝐂</m:t>
+                        </m:r>
+                      </m:sub>
+                    </m:sSub>
+                  </m:oMath>
+                </a14:m>
+                <a:r>
+                  <a:rPr lang="en-US" b="1" dirty="0"/>
+                  <a:t> &lt; </a:t>
+                </a:r>
+                <a14:m>
+                  <m:oMath xmlns:m="http://schemas.openxmlformats.org/officeDocument/2006/math">
+                    <m:sSub>
+                      <m:sSubPr>
+                        <m:ctrlPr>
+                          <a:rPr lang="en-US" b="1" i="1">
+                            <a:latin typeface="Cambria Math" panose="02040503050406030204" pitchFamily="18" charset="0"/>
+                          </a:rPr>
+                        </m:ctrlPr>
+                      </m:sSubPr>
+                      <m:e>
+                        <m:r>
+                          <a:rPr lang="sv-SE" b="1" i="1">
+                            <a:latin typeface="Cambria Math" panose="02040503050406030204" pitchFamily="18" charset="0"/>
+                          </a:rPr>
+                          <m:t>𝒗</m:t>
+                        </m:r>
+                      </m:e>
+                      <m:sub>
+                        <m:r>
+                          <a:rPr lang="en-US" b="1" i="1">
+                            <a:latin typeface="Cambria Math" panose="02040503050406030204" pitchFamily="18" charset="0"/>
+                          </a:rPr>
+                          <m:t>𝑨</m:t>
+                        </m:r>
+                      </m:sub>
+                    </m:sSub>
+                    <m:r>
+                      <a:rPr lang="en-US" b="1" i="1" smtClean="0">
+                        <a:latin typeface="Cambria Math" panose="02040503050406030204" pitchFamily="18" charset="0"/>
+                      </a:rPr>
+                      <m:t>+</m:t>
+                    </m:r>
+                    <m:sSub>
+                      <m:sSubPr>
+                        <m:ctrlPr>
+                          <a:rPr lang="en-US" b="1" i="1">
+                            <a:latin typeface="Cambria Math" panose="02040503050406030204" pitchFamily="18" charset="0"/>
+                          </a:rPr>
+                        </m:ctrlPr>
+                      </m:sSubPr>
+                      <m:e>
+                        <m:r>
+                          <a:rPr lang="sv-SE" b="1" i="1">
+                            <a:latin typeface="Cambria Math" panose="02040503050406030204" pitchFamily="18" charset="0"/>
+                          </a:rPr>
+                          <m:t>𝒗</m:t>
+                        </m:r>
+                      </m:e>
+                      <m:sub>
+                        <m:r>
+                          <a:rPr lang="en-US" b="1" i="1">
+                            <a:latin typeface="Cambria Math" panose="02040503050406030204" pitchFamily="18" charset="0"/>
+                          </a:rPr>
+                          <m:t>𝑩</m:t>
+                        </m:r>
+                      </m:sub>
+                    </m:sSub>
+                  </m:oMath>
+                </a14:m>
+                <a:r>
+                  <a:rPr lang="en-US" b="1" dirty="0"/>
+                  <a:t> is satisfied </a:t>
+                </a:r>
+              </a:p>
+              <a:p>
+                <a:r>
+                  <a:rPr lang="en-US" dirty="0"/>
+                  <a:t> </a:t>
+                </a:r>
+              </a:p>
+            </p:txBody>
+          </p:sp>
+        </mc:Choice>
+        <mc:Fallback>
+          <p:sp>
+            <p:nvSpPr>
+              <p:cNvPr id="30" name="Rectangle 29">
+                <a:extLst>
+                  <a:ext uri="{FF2B5EF4-FFF2-40B4-BE49-F238E27FC236}">
+                    <a16:creationId xmlns:a16="http://schemas.microsoft.com/office/drawing/2014/main" id="{E329F2A0-7DC8-470C-A880-FA136EC5CE95}"/>
+                  </a:ext>
+                </a:extLst>
+              </p:cNvPr>
+              <p:cNvSpPr>
+                <a:spLocks noRot="1" noChangeAspect="1" noMove="1" noResize="1" noEditPoints="1" noAdjustHandles="1" noChangeArrowheads="1" noChangeShapeType="1" noTextEdit="1"/>
+              </p:cNvSpPr>
+              <p:nvPr/>
+            </p:nvSpPr>
+            <p:spPr>
+              <a:xfrm>
+                <a:off x="-1959360" y="-214896"/>
+                <a:ext cx="3870419" cy="646331"/>
+              </a:xfrm>
+              <a:prstGeom prst="rect">
+                <a:avLst/>
+              </a:prstGeom>
+              <a:blipFill>
+                <a:blip r:embed="rId2"/>
+                <a:stretch>
+                  <a:fillRect l="-1420" t="-5660" r="-315"/>
+                </a:stretch>
+              </a:blipFill>
+            </p:spPr>
+            <p:txBody>
+              <a:bodyPr/>
+              <a:lstStyle/>
+              <a:p>
+                <a:r>
+                  <a:rPr lang="sv-SE">
+                    <a:noFill/>
+                  </a:rPr>
+                  <a:t> </a:t>
+                </a:r>
+              </a:p>
+            </p:txBody>
+          </p:sp>
+        </mc:Fallback>
+      </mc:AlternateContent>
+      <p:cxnSp>
+        <p:nvCxnSpPr>
+          <p:cNvPr id="31" name="Straight Arrow Connector 30">
+            <a:extLst>
+              <a:ext uri="{FF2B5EF4-FFF2-40B4-BE49-F238E27FC236}">
+                <a16:creationId xmlns:a16="http://schemas.microsoft.com/office/drawing/2014/main" id="{AD2643C9-41F5-4561-BA2F-54D5D07C3C4D}"/>
+              </a:ext>
+            </a:extLst>
+          </p:cNvPr>
+          <p:cNvCxnSpPr>
+            <a:cxnSpLocks/>
+          </p:cNvCxnSpPr>
+          <p:nvPr/>
+        </p:nvCxnSpPr>
+        <p:spPr>
+          <a:xfrm flipV="1">
+            <a:off x="-769592" y="913070"/>
+            <a:ext cx="2402546" cy="16892"/>
+          </a:xfrm>
+          <a:prstGeom prst="straightConnector1">
+            <a:avLst/>
+          </a:prstGeom>
+          <a:ln w="25400">
+            <a:solidFill>
+              <a:srgbClr val="C00000"/>
+            </a:solidFill>
+            <a:tailEnd type="triangle"/>
+          </a:ln>
+        </p:spPr>
+        <p:style>
+          <a:lnRef idx="1">
+            <a:schemeClr val="accent1"/>
+          </a:lnRef>
+          <a:fillRef idx="0">
+            <a:schemeClr val="accent1"/>
+          </a:fillRef>
+          <a:effectRef idx="0">
+            <a:schemeClr val="accent1"/>
+          </a:effectRef>
+          <a:fontRef idx="minor">
+            <a:schemeClr val="tx1"/>
+          </a:fontRef>
+        </p:style>
+      </p:cxnSp>
+      <p:cxnSp>
+        <p:nvCxnSpPr>
+          <p:cNvPr id="32" name="Straight Arrow Connector 31">
+            <a:extLst>
+              <a:ext uri="{FF2B5EF4-FFF2-40B4-BE49-F238E27FC236}">
+                <a16:creationId xmlns:a16="http://schemas.microsoft.com/office/drawing/2014/main" id="{AAACAC1D-917A-4182-9A23-E49D507EFDDC}"/>
+              </a:ext>
+            </a:extLst>
+          </p:cNvPr>
+          <p:cNvCxnSpPr>
+            <a:cxnSpLocks/>
+          </p:cNvCxnSpPr>
+          <p:nvPr/>
+        </p:nvCxnSpPr>
+        <p:spPr>
+          <a:xfrm flipV="1">
+            <a:off x="1602628" y="165839"/>
+            <a:ext cx="963606" cy="735348"/>
+          </a:xfrm>
+          <a:prstGeom prst="straightConnector1">
+            <a:avLst/>
+          </a:prstGeom>
+          <a:ln w="25400">
+            <a:solidFill>
+              <a:schemeClr val="accent5"/>
+            </a:solidFill>
+            <a:tailEnd type="triangle"/>
+          </a:ln>
+        </p:spPr>
+        <p:style>
+          <a:lnRef idx="1">
+            <a:schemeClr val="accent1"/>
+          </a:lnRef>
+          <a:fillRef idx="0">
+            <a:schemeClr val="accent1"/>
+          </a:fillRef>
+          <a:effectRef idx="0">
+            <a:schemeClr val="accent1"/>
+          </a:effectRef>
+          <a:fontRef idx="minor">
+            <a:schemeClr val="tx1"/>
+          </a:fontRef>
+        </p:style>
+      </p:cxnSp>
+      <p:cxnSp>
+        <p:nvCxnSpPr>
+          <p:cNvPr id="33" name="Straight Arrow Connector 32">
+            <a:extLst>
+              <a:ext uri="{FF2B5EF4-FFF2-40B4-BE49-F238E27FC236}">
+                <a16:creationId xmlns:a16="http://schemas.microsoft.com/office/drawing/2014/main" id="{779B8392-0229-4F99-880A-C1847A5045F6}"/>
+              </a:ext>
+            </a:extLst>
+          </p:cNvPr>
+          <p:cNvCxnSpPr>
+            <a:cxnSpLocks/>
+          </p:cNvCxnSpPr>
+          <p:nvPr/>
+        </p:nvCxnSpPr>
+        <p:spPr>
+          <a:xfrm flipH="1">
+            <a:off x="-769592" y="165839"/>
+            <a:ext cx="3286466" cy="735348"/>
+          </a:xfrm>
+          <a:prstGeom prst="straightConnector1">
+            <a:avLst/>
+          </a:prstGeom>
+          <a:ln w="25400">
+            <a:solidFill>
+              <a:schemeClr val="accent6"/>
+            </a:solidFill>
+            <a:tailEnd type="triangle"/>
+          </a:ln>
+        </p:spPr>
+        <p:style>
+          <a:lnRef idx="1">
+            <a:schemeClr val="accent1"/>
+          </a:lnRef>
+          <a:fillRef idx="0">
+            <a:schemeClr val="accent1"/>
+          </a:fillRef>
+          <a:effectRef idx="0">
+            <a:schemeClr val="accent1"/>
+          </a:effectRef>
+          <a:fontRef idx="minor">
+            <a:schemeClr val="tx1"/>
+          </a:fontRef>
+        </p:style>
+      </p:cxnSp>
+      <p:sp>
+        <p:nvSpPr>
+          <p:cNvPr id="34" name="Arc 33">
+            <a:extLst>
+              <a:ext uri="{FF2B5EF4-FFF2-40B4-BE49-F238E27FC236}">
+                <a16:creationId xmlns:a16="http://schemas.microsoft.com/office/drawing/2014/main" id="{AE3E0BFE-22D9-4A13-99FC-D329682B92D3}"/>
+              </a:ext>
+            </a:extLst>
+          </p:cNvPr>
+          <p:cNvSpPr/>
+          <p:nvPr/>
+        </p:nvSpPr>
+        <p:spPr>
+          <a:xfrm rot="2203924">
+            <a:off x="1694481" y="772402"/>
+            <a:ext cx="402846" cy="159782"/>
+          </a:xfrm>
+          <a:prstGeom prst="arc">
+            <a:avLst>
+              <a:gd name="adj1" fmla="val 12585933"/>
+              <a:gd name="adj2" fmla="val 21144799"/>
+            </a:avLst>
+          </a:prstGeom>
+          <a:ln w="12700">
+            <a:solidFill>
+              <a:schemeClr val="tx1"/>
+            </a:solidFill>
+          </a:ln>
+        </p:spPr>
+        <p:style>
+          <a:lnRef idx="1">
+            <a:schemeClr val="accent1"/>
+          </a:lnRef>
+          <a:fillRef idx="0">
+            <a:schemeClr val="accent1"/>
+          </a:fillRef>
+          <a:effectRef idx="0">
+            <a:schemeClr val="accent1"/>
+          </a:effectRef>
+          <a:fontRef idx="minor">
+            <a:schemeClr val="tx1"/>
+          </a:fontRef>
+        </p:style>
+        <p:txBody>
+          <a:bodyPr rtlCol="0" anchor="ctr"/>
+          <a:lstStyle/>
+          <a:p>
+            <a:pPr algn="ctr"/>
+            <a:endParaRPr lang="sv-SE">
+              <a:solidFill>
+                <a:srgbClr val="FF0000"/>
+              </a:solidFill>
+            </a:endParaRPr>
+          </a:p>
+        </p:txBody>
+      </p:sp>
+      <p:sp>
+        <p:nvSpPr>
+          <p:cNvPr id="35" name="Arc 34">
+            <a:extLst>
+              <a:ext uri="{FF2B5EF4-FFF2-40B4-BE49-F238E27FC236}">
+                <a16:creationId xmlns:a16="http://schemas.microsoft.com/office/drawing/2014/main" id="{7FD4CE10-858C-4ED5-AA94-9F99AC7E8DD9}"/>
+              </a:ext>
+            </a:extLst>
+          </p:cNvPr>
+          <p:cNvSpPr/>
+          <p:nvPr/>
+        </p:nvSpPr>
+        <p:spPr>
+          <a:xfrm rot="8638307">
+            <a:off x="-1053130" y="718029"/>
+            <a:ext cx="538984" cy="281832"/>
+          </a:xfrm>
+          <a:prstGeom prst="arc">
+            <a:avLst>
+              <a:gd name="adj1" fmla="val 15923001"/>
+              <a:gd name="adj2" fmla="val 21419193"/>
+            </a:avLst>
+          </a:prstGeom>
+          <a:ln w="12700">
+            <a:solidFill>
+              <a:schemeClr val="tx1"/>
+            </a:solidFill>
+          </a:ln>
+        </p:spPr>
+        <p:style>
+          <a:lnRef idx="1">
+            <a:schemeClr val="accent1"/>
+          </a:lnRef>
+          <a:fillRef idx="0">
+            <a:schemeClr val="accent1"/>
+          </a:fillRef>
+          <a:effectRef idx="0">
+            <a:schemeClr val="accent1"/>
+          </a:effectRef>
+          <a:fontRef idx="minor">
+            <a:schemeClr val="tx1"/>
+          </a:fontRef>
+        </p:style>
+        <p:txBody>
+          <a:bodyPr rtlCol="0" anchor="ctr"/>
+          <a:lstStyle/>
+          <a:p>
+            <a:pPr algn="ctr"/>
+            <a:endParaRPr lang="sv-SE">
+              <a:solidFill>
+                <a:srgbClr val="FF0000"/>
+              </a:solidFill>
+            </a:endParaRPr>
+          </a:p>
+        </p:txBody>
+      </p:sp>
+      <mc:AlternateContent xmlns:mc="http://schemas.openxmlformats.org/markup-compatibility/2006">
+        <mc:Choice xmlns:a14="http://schemas.microsoft.com/office/drawing/2010/main" Requires="a14">
+          <p:sp>
+            <p:nvSpPr>
+              <p:cNvPr id="36" name="TextBox 35">
+                <a:extLst>
+                  <a:ext uri="{FF2B5EF4-FFF2-40B4-BE49-F238E27FC236}">
+                    <a16:creationId xmlns:a16="http://schemas.microsoft.com/office/drawing/2014/main" id="{8289C501-5BD9-4361-8019-C1DEC65E998C}"/>
+                  </a:ext>
+                </a:extLst>
+              </p:cNvPr>
+              <p:cNvSpPr txBox="1"/>
+              <p:nvPr/>
+            </p:nvSpPr>
+            <p:spPr>
+              <a:xfrm>
+                <a:off x="-1959360" y="1373155"/>
+                <a:ext cx="6245816" cy="369332"/>
+              </a:xfrm>
+              <a:prstGeom prst="rect">
+                <a:avLst/>
+              </a:prstGeom>
+              <a:noFill/>
+            </p:spPr>
+            <p:txBody>
+              <a:bodyPr wrap="square" rtlCol="0">
+                <a:spAutoFit/>
+              </a:bodyPr>
+              <a:lstStyle/>
+              <a:p>
+                <a:r>
+                  <a:rPr lang="en-US" dirty="0">
+                    <a:solidFill>
+                      <a:srgbClr val="FF0000"/>
+                    </a:solidFill>
+                  </a:rPr>
+                  <a:t>Apply cosine and sine  theorems to find  </a:t>
+                </a:r>
+                <a14:m>
+                  <m:oMath xmlns:m="http://schemas.openxmlformats.org/officeDocument/2006/math">
+                    <m:sSub>
+                      <m:sSubPr>
+                        <m:ctrlPr>
+                          <a:rPr lang="en-US" b="0" i="1" smtClean="0">
+                            <a:solidFill>
+                              <a:srgbClr val="FF0000"/>
+                            </a:solidFill>
+                            <a:latin typeface="Cambria Math" panose="02040503050406030204" pitchFamily="18" charset="0"/>
+                          </a:rPr>
+                        </m:ctrlPr>
+                      </m:sSubPr>
+                      <m:e>
+                        <m:r>
+                          <a:rPr lang="en-US" b="0" i="1" smtClean="0">
+                            <a:solidFill>
+                              <a:srgbClr val="FF0000"/>
+                            </a:solidFill>
+                            <a:latin typeface="Cambria Math" panose="02040503050406030204" pitchFamily="18" charset="0"/>
+                          </a:rPr>
+                          <m:t>𝜙</m:t>
+                        </m:r>
+                      </m:e>
+                      <m:sub>
+                        <m:r>
+                          <a:rPr lang="en-US" b="0" i="1" smtClean="0">
+                            <a:solidFill>
+                              <a:srgbClr val="FF0000"/>
+                            </a:solidFill>
+                            <a:latin typeface="Cambria Math" panose="02040503050406030204" pitchFamily="18" charset="0"/>
+                          </a:rPr>
+                          <m:t>𝐶𝐵</m:t>
+                        </m:r>
+                      </m:sub>
+                    </m:sSub>
+                  </m:oMath>
+                </a14:m>
+                <a:r>
+                  <a:rPr lang="en-US" dirty="0">
+                    <a:solidFill>
+                      <a:srgbClr val="FF0000"/>
+                    </a:solidFill>
+                  </a:rPr>
+                  <a:t>  and </a:t>
+                </a:r>
+                <a14:m>
+                  <m:oMath xmlns:m="http://schemas.openxmlformats.org/officeDocument/2006/math">
+                    <m:sSub>
+                      <m:sSubPr>
+                        <m:ctrlPr>
+                          <a:rPr lang="en-US" i="1" smtClean="0">
+                            <a:solidFill>
+                              <a:srgbClr val="FF0000"/>
+                            </a:solidFill>
+                            <a:latin typeface="Cambria Math" panose="02040503050406030204" pitchFamily="18" charset="0"/>
+                          </a:rPr>
+                        </m:ctrlPr>
+                      </m:sSubPr>
+                      <m:e>
+                        <m:r>
+                          <a:rPr lang="en-US" i="1">
+                            <a:solidFill>
+                              <a:srgbClr val="FF0000"/>
+                            </a:solidFill>
+                            <a:latin typeface="Cambria Math" panose="02040503050406030204" pitchFamily="18" charset="0"/>
+                          </a:rPr>
+                          <m:t>𝜙</m:t>
+                        </m:r>
+                      </m:e>
+                      <m:sub>
+                        <m:r>
+                          <a:rPr lang="en-US" i="1">
+                            <a:solidFill>
+                              <a:srgbClr val="FF0000"/>
+                            </a:solidFill>
+                            <a:latin typeface="Cambria Math" panose="02040503050406030204" pitchFamily="18" charset="0"/>
+                          </a:rPr>
+                          <m:t>𝐶</m:t>
+                        </m:r>
+                        <m:r>
+                          <a:rPr lang="en-US" b="0" i="1" smtClean="0">
+                            <a:solidFill>
+                              <a:srgbClr val="FF0000"/>
+                            </a:solidFill>
+                            <a:latin typeface="Cambria Math" panose="02040503050406030204" pitchFamily="18" charset="0"/>
+                          </a:rPr>
+                          <m:t>𝐶</m:t>
+                        </m:r>
+                      </m:sub>
+                    </m:sSub>
+                    <m:r>
+                      <a:rPr lang="en-US" b="0" i="1" smtClean="0">
+                        <a:solidFill>
+                          <a:srgbClr val="FF0000"/>
+                        </a:solidFill>
+                        <a:latin typeface="Cambria Math" panose="02040503050406030204" pitchFamily="18" charset="0"/>
+                      </a:rPr>
+                      <m:t>.</m:t>
+                    </m:r>
+                  </m:oMath>
+                </a14:m>
+                <a:r>
+                  <a:rPr lang="en-US" dirty="0">
+                    <a:solidFill>
+                      <a:srgbClr val="FF0000"/>
+                    </a:solidFill>
+                  </a:rPr>
+                  <a:t> </a:t>
+                </a:r>
+              </a:p>
+            </p:txBody>
+          </p:sp>
+        </mc:Choice>
+        <mc:Fallback>
+          <p:sp>
+            <p:nvSpPr>
+              <p:cNvPr id="36" name="TextBox 35">
+                <a:extLst>
+                  <a:ext uri="{FF2B5EF4-FFF2-40B4-BE49-F238E27FC236}">
+                    <a16:creationId xmlns:a16="http://schemas.microsoft.com/office/drawing/2014/main" id="{8289C501-5BD9-4361-8019-C1DEC65E998C}"/>
+                  </a:ext>
+                </a:extLst>
+              </p:cNvPr>
+              <p:cNvSpPr txBox="1">
+                <a:spLocks noRot="1" noChangeAspect="1" noMove="1" noResize="1" noEditPoints="1" noAdjustHandles="1" noChangeArrowheads="1" noChangeShapeType="1" noTextEdit="1"/>
+              </p:cNvSpPr>
+              <p:nvPr/>
+            </p:nvSpPr>
+            <p:spPr>
+              <a:xfrm>
+                <a:off x="-1959360" y="1373155"/>
+                <a:ext cx="6245816" cy="369332"/>
+              </a:xfrm>
+              <a:prstGeom prst="rect">
+                <a:avLst/>
+              </a:prstGeom>
+              <a:blipFill>
+                <a:blip r:embed="rId3"/>
+                <a:stretch>
+                  <a:fillRect l="-879" t="-8197" b="-24590"/>
+                </a:stretch>
+              </a:blipFill>
+            </p:spPr>
+            <p:txBody>
+              <a:bodyPr/>
+              <a:lstStyle/>
+              <a:p>
+                <a:r>
+                  <a:rPr lang="sv-SE">
+                    <a:noFill/>
+                  </a:rPr>
+                  <a:t> </a:t>
+                </a:r>
+              </a:p>
+            </p:txBody>
+          </p:sp>
+        </mc:Fallback>
+      </mc:AlternateContent>
+      <p:cxnSp>
+        <p:nvCxnSpPr>
+          <p:cNvPr id="37" name="Straight Connector 36">
+            <a:extLst>
+              <a:ext uri="{FF2B5EF4-FFF2-40B4-BE49-F238E27FC236}">
+                <a16:creationId xmlns:a16="http://schemas.microsoft.com/office/drawing/2014/main" id="{E918424A-0EB3-40BB-A40E-6D0DC5D29AED}"/>
+              </a:ext>
+            </a:extLst>
+          </p:cNvPr>
+          <p:cNvCxnSpPr>
+            <a:cxnSpLocks/>
+          </p:cNvCxnSpPr>
+          <p:nvPr/>
+        </p:nvCxnSpPr>
+        <p:spPr>
+          <a:xfrm>
+            <a:off x="1602628" y="920203"/>
+            <a:ext cx="1014480" cy="0"/>
+          </a:xfrm>
+          <a:prstGeom prst="line">
+            <a:avLst/>
+          </a:prstGeom>
+          <a:ln w="25400">
+            <a:solidFill>
+              <a:schemeClr val="tx1"/>
+            </a:solidFill>
+            <a:prstDash val="sysDot"/>
+          </a:ln>
+        </p:spPr>
+        <p:style>
+          <a:lnRef idx="1">
+            <a:schemeClr val="accent1"/>
+          </a:lnRef>
+          <a:fillRef idx="0">
+            <a:schemeClr val="accent1"/>
+          </a:fillRef>
+          <a:effectRef idx="0">
+            <a:schemeClr val="accent1"/>
+          </a:effectRef>
+          <a:fontRef idx="minor">
+            <a:schemeClr val="tx1"/>
+          </a:fontRef>
+        </p:style>
+      </p:cxnSp>
+      <mc:AlternateContent xmlns:mc="http://schemas.openxmlformats.org/markup-compatibility/2006">
+        <mc:Choice xmlns:a14="http://schemas.microsoft.com/office/drawing/2010/main" Requires="a14">
+          <p:sp>
+            <p:nvSpPr>
+              <p:cNvPr id="38" name="Rectangle 37">
+                <a:extLst>
+                  <a:ext uri="{FF2B5EF4-FFF2-40B4-BE49-F238E27FC236}">
+                    <a16:creationId xmlns:a16="http://schemas.microsoft.com/office/drawing/2014/main" id="{82DD5A5E-2BF7-4102-93E5-28B1A971EE38}"/>
+                  </a:ext>
+                </a:extLst>
+              </p:cNvPr>
+              <p:cNvSpPr/>
+              <p:nvPr/>
+            </p:nvSpPr>
+            <p:spPr>
+              <a:xfrm>
+                <a:off x="2069861" y="512977"/>
+                <a:ext cx="625108" cy="369332"/>
+              </a:xfrm>
+              <a:prstGeom prst="rect">
+                <a:avLst/>
+              </a:prstGeom>
+            </p:spPr>
+            <p:txBody>
+              <a:bodyPr wrap="none">
+                <a:spAutoFit/>
+              </a:bodyPr>
+              <a:lstStyle/>
+              <a:p>
+                <a14:m>
+                  <m:oMath xmlns:m="http://schemas.openxmlformats.org/officeDocument/2006/math">
+                    <m:sSub>
+                      <m:sSubPr>
+                        <m:ctrlPr>
+                          <a:rPr lang="en-US" i="1" smtClean="0">
+                            <a:solidFill>
+                              <a:srgbClr val="FF0000"/>
+                            </a:solidFill>
+                            <a:latin typeface="Cambria Math" panose="02040503050406030204" pitchFamily="18" charset="0"/>
+                          </a:rPr>
+                        </m:ctrlPr>
+                      </m:sSubPr>
+                      <m:e>
+                        <m:r>
+                          <a:rPr lang="en-US" i="1">
+                            <a:solidFill>
+                              <a:srgbClr val="FF0000"/>
+                            </a:solidFill>
+                            <a:latin typeface="Cambria Math" panose="02040503050406030204" pitchFamily="18" charset="0"/>
+                          </a:rPr>
+                          <m:t>𝜙</m:t>
+                        </m:r>
+                      </m:e>
+                      <m:sub>
+                        <m:r>
+                          <a:rPr lang="en-US" i="1">
+                            <a:solidFill>
+                              <a:srgbClr val="FF0000"/>
+                            </a:solidFill>
+                            <a:latin typeface="Cambria Math" panose="02040503050406030204" pitchFamily="18" charset="0"/>
+                          </a:rPr>
+                          <m:t>𝐶𝐵</m:t>
+                        </m:r>
+                      </m:sub>
+                    </m:sSub>
+                  </m:oMath>
+                </a14:m>
+                <a:r>
+                  <a:rPr lang="en-US" dirty="0">
+                    <a:solidFill>
+                      <a:srgbClr val="FF0000"/>
+                    </a:solidFill>
+                  </a:rPr>
+                  <a:t> </a:t>
+                </a:r>
+              </a:p>
+            </p:txBody>
+          </p:sp>
+        </mc:Choice>
+        <mc:Fallback>
+          <p:sp>
+            <p:nvSpPr>
+              <p:cNvPr id="38" name="Rectangle 37">
+                <a:extLst>
+                  <a:ext uri="{FF2B5EF4-FFF2-40B4-BE49-F238E27FC236}">
+                    <a16:creationId xmlns:a16="http://schemas.microsoft.com/office/drawing/2014/main" id="{82DD5A5E-2BF7-4102-93E5-28B1A971EE38}"/>
+                  </a:ext>
+                </a:extLst>
+              </p:cNvPr>
+              <p:cNvSpPr>
+                <a:spLocks noRot="1" noChangeAspect="1" noMove="1" noResize="1" noEditPoints="1" noAdjustHandles="1" noChangeArrowheads="1" noChangeShapeType="1" noTextEdit="1"/>
+              </p:cNvSpPr>
+              <p:nvPr/>
+            </p:nvSpPr>
+            <p:spPr>
+              <a:xfrm>
+                <a:off x="2069861" y="512977"/>
+                <a:ext cx="625108" cy="369332"/>
+              </a:xfrm>
+              <a:prstGeom prst="rect">
+                <a:avLst/>
+              </a:prstGeom>
+              <a:blipFill>
+                <a:blip r:embed="rId4"/>
+                <a:stretch>
+                  <a:fillRect l="-2941" b="-11475"/>
+                </a:stretch>
+              </a:blipFill>
+            </p:spPr>
+            <p:txBody>
+              <a:bodyPr/>
+              <a:lstStyle/>
+              <a:p>
+                <a:r>
+                  <a:rPr lang="sv-SE">
+                    <a:noFill/>
+                  </a:rPr>
+                  <a:t> </a:t>
+                </a:r>
+              </a:p>
+            </p:txBody>
+          </p:sp>
+        </mc:Fallback>
+      </mc:AlternateContent>
+      <p:cxnSp>
+        <p:nvCxnSpPr>
+          <p:cNvPr id="39" name="Straight Connector 38">
+            <a:extLst>
+              <a:ext uri="{FF2B5EF4-FFF2-40B4-BE49-F238E27FC236}">
+                <a16:creationId xmlns:a16="http://schemas.microsoft.com/office/drawing/2014/main" id="{B9BC1178-E83C-4DCF-8CBA-D0E5384E82B4}"/>
+              </a:ext>
+            </a:extLst>
+          </p:cNvPr>
+          <p:cNvCxnSpPr>
+            <a:cxnSpLocks/>
+          </p:cNvCxnSpPr>
+          <p:nvPr/>
+        </p:nvCxnSpPr>
+        <p:spPr>
+          <a:xfrm flipV="1">
+            <a:off x="-1636060" y="901188"/>
+            <a:ext cx="915630" cy="260558"/>
+          </a:xfrm>
+          <a:prstGeom prst="line">
+            <a:avLst/>
+          </a:prstGeom>
+          <a:ln w="25400">
+            <a:solidFill>
+              <a:schemeClr val="tx1"/>
+            </a:solidFill>
+            <a:prstDash val="sysDot"/>
+          </a:ln>
+        </p:spPr>
+        <p:style>
+          <a:lnRef idx="1">
+            <a:schemeClr val="accent1"/>
+          </a:lnRef>
+          <a:fillRef idx="0">
+            <a:schemeClr val="accent1"/>
+          </a:fillRef>
+          <a:effectRef idx="0">
+            <a:schemeClr val="accent1"/>
+          </a:effectRef>
+          <a:fontRef idx="minor">
+            <a:schemeClr val="tx1"/>
+          </a:fontRef>
+        </p:style>
+      </p:cxnSp>
+      <mc:AlternateContent xmlns:mc="http://schemas.openxmlformats.org/markup-compatibility/2006">
+        <mc:Choice xmlns:a14="http://schemas.microsoft.com/office/drawing/2010/main" Requires="a14">
+          <p:sp>
+            <p:nvSpPr>
+              <p:cNvPr id="40" name="Rectangle 39">
+                <a:extLst>
+                  <a:ext uri="{FF2B5EF4-FFF2-40B4-BE49-F238E27FC236}">
+                    <a16:creationId xmlns:a16="http://schemas.microsoft.com/office/drawing/2014/main" id="{842DFA2B-D0C8-43F2-84D2-0C73D7061155}"/>
+                  </a:ext>
+                </a:extLst>
+              </p:cNvPr>
+              <p:cNvSpPr/>
+              <p:nvPr/>
+            </p:nvSpPr>
+            <p:spPr>
+              <a:xfrm>
+                <a:off x="-826583" y="915260"/>
+                <a:ext cx="616772" cy="369332"/>
+              </a:xfrm>
+              <a:prstGeom prst="rect">
+                <a:avLst/>
+              </a:prstGeom>
+            </p:spPr>
+            <p:txBody>
+              <a:bodyPr wrap="none">
+                <a:spAutoFit/>
+              </a:bodyPr>
+              <a:lstStyle/>
+              <a:p>
+                <a14:m>
+                  <m:oMath xmlns:m="http://schemas.openxmlformats.org/officeDocument/2006/math">
+                    <m:sSub>
+                      <m:sSubPr>
+                        <m:ctrlPr>
+                          <a:rPr lang="en-US" i="1" smtClean="0">
+                            <a:solidFill>
+                              <a:srgbClr val="FF0000"/>
+                            </a:solidFill>
+                            <a:latin typeface="Cambria Math" panose="02040503050406030204" pitchFamily="18" charset="0"/>
+                          </a:rPr>
+                        </m:ctrlPr>
+                      </m:sSubPr>
+                      <m:e>
+                        <m:r>
+                          <a:rPr lang="en-US" i="1">
+                            <a:solidFill>
+                              <a:srgbClr val="FF0000"/>
+                            </a:solidFill>
+                            <a:latin typeface="Cambria Math" panose="02040503050406030204" pitchFamily="18" charset="0"/>
+                          </a:rPr>
+                          <m:t>𝜙</m:t>
+                        </m:r>
+                      </m:e>
+                      <m:sub>
+                        <m:r>
+                          <a:rPr lang="en-US" i="1">
+                            <a:solidFill>
+                              <a:srgbClr val="FF0000"/>
+                            </a:solidFill>
+                            <a:latin typeface="Cambria Math" panose="02040503050406030204" pitchFamily="18" charset="0"/>
+                          </a:rPr>
+                          <m:t>𝐶</m:t>
+                        </m:r>
+                        <m:r>
+                          <a:rPr lang="en-US" b="0" i="1" smtClean="0">
+                            <a:solidFill>
+                              <a:srgbClr val="FF0000"/>
+                            </a:solidFill>
+                            <a:latin typeface="Cambria Math" panose="02040503050406030204" pitchFamily="18" charset="0"/>
+                          </a:rPr>
+                          <m:t>𝐶</m:t>
+                        </m:r>
+                      </m:sub>
+                    </m:sSub>
+                  </m:oMath>
+                </a14:m>
+                <a:r>
+                  <a:rPr lang="en-US" dirty="0">
+                    <a:solidFill>
+                      <a:srgbClr val="FF0000"/>
+                    </a:solidFill>
+                  </a:rPr>
+                  <a:t> </a:t>
+                </a:r>
+              </a:p>
+            </p:txBody>
+          </p:sp>
+        </mc:Choice>
+        <mc:Fallback>
+          <p:sp>
+            <p:nvSpPr>
+              <p:cNvPr id="40" name="Rectangle 39">
+                <a:extLst>
+                  <a:ext uri="{FF2B5EF4-FFF2-40B4-BE49-F238E27FC236}">
+                    <a16:creationId xmlns:a16="http://schemas.microsoft.com/office/drawing/2014/main" id="{842DFA2B-D0C8-43F2-84D2-0C73D7061155}"/>
+                  </a:ext>
+                </a:extLst>
+              </p:cNvPr>
+              <p:cNvSpPr>
+                <a:spLocks noRot="1" noChangeAspect="1" noMove="1" noResize="1" noEditPoints="1" noAdjustHandles="1" noChangeArrowheads="1" noChangeShapeType="1" noTextEdit="1"/>
+              </p:cNvSpPr>
+              <p:nvPr/>
+            </p:nvSpPr>
+            <p:spPr>
+              <a:xfrm>
+                <a:off x="-826583" y="915260"/>
+                <a:ext cx="616772" cy="369332"/>
+              </a:xfrm>
+              <a:prstGeom prst="rect">
+                <a:avLst/>
+              </a:prstGeom>
+              <a:blipFill>
+                <a:blip r:embed="rId5"/>
+                <a:stretch>
+                  <a:fillRect l="-1961" b="-11475"/>
+                </a:stretch>
+              </a:blipFill>
+            </p:spPr>
+            <p:txBody>
+              <a:bodyPr/>
+              <a:lstStyle/>
+              <a:p>
+                <a:r>
+                  <a:rPr lang="sv-SE">
+                    <a:noFill/>
+                  </a:rPr>
+                  <a:t> </a:t>
+                </a:r>
+              </a:p>
+            </p:txBody>
+          </p:sp>
+        </mc:Fallback>
+      </mc:AlternateContent>
+      <mc:AlternateContent xmlns:mc="http://schemas.openxmlformats.org/markup-compatibility/2006">
+        <mc:Choice xmlns:a14="http://schemas.microsoft.com/office/drawing/2010/main" Requires="a14">
+          <p:sp>
+            <p:nvSpPr>
+              <p:cNvPr id="41" name="Rectangle 40">
+                <a:extLst>
+                  <a:ext uri="{FF2B5EF4-FFF2-40B4-BE49-F238E27FC236}">
+                    <a16:creationId xmlns:a16="http://schemas.microsoft.com/office/drawing/2014/main" id="{B57B76FD-2D10-4F8C-9066-046A3D310D53}"/>
+                  </a:ext>
+                </a:extLst>
+              </p:cNvPr>
+              <p:cNvSpPr/>
+              <p:nvPr/>
+            </p:nvSpPr>
+            <p:spPr>
+              <a:xfrm>
+                <a:off x="-2034829" y="1646703"/>
+                <a:ext cx="2939972" cy="646331"/>
+              </a:xfrm>
+              <a:prstGeom prst="rect">
+                <a:avLst/>
+              </a:prstGeom>
+            </p:spPr>
+            <p:txBody>
+              <a:bodyPr wrap="none">
+                <a:spAutoFit/>
+              </a:bodyPr>
+              <a:lstStyle/>
+              <a:p>
+                <a:r>
+                  <a:rPr lang="en-US" b="1" dirty="0"/>
+                  <a:t>else if </a:t>
+                </a:r>
+                <a14:m>
+                  <m:oMath xmlns:m="http://schemas.openxmlformats.org/officeDocument/2006/math">
+                    <m:sSub>
+                      <m:sSubPr>
+                        <m:ctrlPr>
+                          <a:rPr lang="en-US" b="1" i="1" smtClean="0">
+                            <a:latin typeface="Cambria Math" panose="02040503050406030204" pitchFamily="18" charset="0"/>
+                          </a:rPr>
+                        </m:ctrlPr>
+                      </m:sSubPr>
+                      <m:e>
+                        <m:r>
+                          <a:rPr lang="en-US" b="1" i="0" smtClean="0">
+                            <a:latin typeface="Cambria Math" panose="02040503050406030204" pitchFamily="18" charset="0"/>
+                          </a:rPr>
+                          <m:t> </m:t>
+                        </m:r>
+                        <m:r>
+                          <a:rPr lang="sv-SE" b="1" i="1">
+                            <a:latin typeface="Cambria Math" panose="02040503050406030204" pitchFamily="18" charset="0"/>
+                          </a:rPr>
+                          <m:t>𝒗</m:t>
+                        </m:r>
+                      </m:e>
+                      <m:sub>
+                        <m:r>
+                          <a:rPr lang="en-US" b="1" i="1">
+                            <a:latin typeface="Cambria Math" panose="02040503050406030204" pitchFamily="18" charset="0"/>
+                          </a:rPr>
+                          <m:t>𝑨</m:t>
+                        </m:r>
+                      </m:sub>
+                    </m:sSub>
+                    <m:r>
+                      <a:rPr lang="en-US" b="1" i="1" smtClean="0">
+                        <a:latin typeface="Cambria Math" panose="02040503050406030204" pitchFamily="18" charset="0"/>
+                      </a:rPr>
+                      <m:t>&gt;</m:t>
+                    </m:r>
+                    <m:sSub>
+                      <m:sSubPr>
+                        <m:ctrlPr>
+                          <a:rPr lang="en-US" b="1" i="1">
+                            <a:latin typeface="Cambria Math" panose="02040503050406030204" pitchFamily="18" charset="0"/>
+                          </a:rPr>
+                        </m:ctrlPr>
+                      </m:sSubPr>
+                      <m:e>
+                        <m:r>
+                          <a:rPr lang="en-US" b="1">
+                            <a:latin typeface="Cambria Math" panose="02040503050406030204" pitchFamily="18" charset="0"/>
+                          </a:rPr>
+                          <m:t> </m:t>
+                        </m:r>
+                        <m:r>
+                          <a:rPr lang="sv-SE" b="1" i="1">
+                            <a:latin typeface="Cambria Math" panose="02040503050406030204" pitchFamily="18" charset="0"/>
+                          </a:rPr>
+                          <m:t>𝒗</m:t>
+                        </m:r>
+                      </m:e>
+                      <m:sub>
+                        <m:r>
+                          <a:rPr lang="en-US" b="1" i="1" smtClean="0">
+                            <a:latin typeface="Cambria Math" panose="02040503050406030204" pitchFamily="18" charset="0"/>
+                          </a:rPr>
+                          <m:t>𝑩</m:t>
+                        </m:r>
+                      </m:sub>
+                    </m:sSub>
+                    <m:r>
+                      <a:rPr lang="en-US" b="1" i="1" smtClean="0">
+                        <a:latin typeface="Cambria Math" panose="02040503050406030204" pitchFamily="18" charset="0"/>
+                      </a:rPr>
+                      <m:t>  &amp;&amp;</m:t>
+                    </m:r>
+                    <m:sSub>
+                      <m:sSubPr>
+                        <m:ctrlPr>
+                          <a:rPr lang="en-US" b="1" i="1">
+                            <a:latin typeface="Cambria Math" panose="02040503050406030204" pitchFamily="18" charset="0"/>
+                          </a:rPr>
+                        </m:ctrlPr>
+                      </m:sSubPr>
+                      <m:e>
+                        <m:r>
+                          <a:rPr lang="en-US" b="1">
+                            <a:latin typeface="Cambria Math" panose="02040503050406030204" pitchFamily="18" charset="0"/>
+                          </a:rPr>
+                          <m:t> </m:t>
+                        </m:r>
+                        <m:r>
+                          <a:rPr lang="sv-SE" b="1" i="1">
+                            <a:latin typeface="Cambria Math" panose="02040503050406030204" pitchFamily="18" charset="0"/>
+                          </a:rPr>
+                          <m:t>𝒗</m:t>
+                        </m:r>
+                      </m:e>
+                      <m:sub>
+                        <m:r>
+                          <a:rPr lang="en-US" b="1" i="1">
+                            <a:latin typeface="Cambria Math" panose="02040503050406030204" pitchFamily="18" charset="0"/>
+                          </a:rPr>
+                          <m:t>𝑨</m:t>
+                        </m:r>
+                      </m:sub>
+                    </m:sSub>
+                    <m:r>
+                      <a:rPr lang="en-US" b="1" i="1">
+                        <a:latin typeface="Cambria Math" panose="02040503050406030204" pitchFamily="18" charset="0"/>
+                      </a:rPr>
+                      <m:t>&gt;</m:t>
+                    </m:r>
+                    <m:sSub>
+                      <m:sSubPr>
+                        <m:ctrlPr>
+                          <a:rPr lang="en-US" b="1" i="1">
+                            <a:latin typeface="Cambria Math" panose="02040503050406030204" pitchFamily="18" charset="0"/>
+                          </a:rPr>
+                        </m:ctrlPr>
+                      </m:sSubPr>
+                      <m:e>
+                        <m:r>
+                          <a:rPr lang="en-US" b="1">
+                            <a:latin typeface="Cambria Math" panose="02040503050406030204" pitchFamily="18" charset="0"/>
+                          </a:rPr>
+                          <m:t> </m:t>
+                        </m:r>
+                        <m:r>
+                          <a:rPr lang="sv-SE" b="1" i="1">
+                            <a:latin typeface="Cambria Math" panose="02040503050406030204" pitchFamily="18" charset="0"/>
+                          </a:rPr>
+                          <m:t>𝒗</m:t>
+                        </m:r>
+                      </m:e>
+                      <m:sub>
+                        <m:r>
+                          <a:rPr lang="en-US" b="1" i="1" smtClean="0">
+                            <a:latin typeface="Cambria Math" panose="02040503050406030204" pitchFamily="18" charset="0"/>
+                          </a:rPr>
+                          <m:t>𝑪</m:t>
+                        </m:r>
+                      </m:sub>
+                    </m:sSub>
+                  </m:oMath>
+                </a14:m>
+                <a:endParaRPr lang="en-US" b="1" dirty="0"/>
+              </a:p>
+              <a:p>
+                <a:r>
+                  <a:rPr lang="en-US" dirty="0"/>
+                  <a:t> </a:t>
+                </a:r>
+              </a:p>
+            </p:txBody>
+          </p:sp>
+        </mc:Choice>
+        <mc:Fallback>
+          <p:sp>
+            <p:nvSpPr>
+              <p:cNvPr id="41" name="Rectangle 40">
+                <a:extLst>
+                  <a:ext uri="{FF2B5EF4-FFF2-40B4-BE49-F238E27FC236}">
+                    <a16:creationId xmlns:a16="http://schemas.microsoft.com/office/drawing/2014/main" id="{B57B76FD-2D10-4F8C-9066-046A3D310D53}"/>
+                  </a:ext>
+                </a:extLst>
+              </p:cNvPr>
+              <p:cNvSpPr>
+                <a:spLocks noRot="1" noChangeAspect="1" noMove="1" noResize="1" noEditPoints="1" noAdjustHandles="1" noChangeArrowheads="1" noChangeShapeType="1" noTextEdit="1"/>
+              </p:cNvSpPr>
+              <p:nvPr/>
+            </p:nvSpPr>
+            <p:spPr>
+              <a:xfrm>
+                <a:off x="-2034829" y="1646703"/>
+                <a:ext cx="2939972" cy="646331"/>
+              </a:xfrm>
+              <a:prstGeom prst="rect">
+                <a:avLst/>
+              </a:prstGeom>
+              <a:blipFill>
+                <a:blip r:embed="rId6"/>
+                <a:stretch>
+                  <a:fillRect l="-1660" t="-4717"/>
+                </a:stretch>
+              </a:blipFill>
+            </p:spPr>
+            <p:txBody>
+              <a:bodyPr/>
+              <a:lstStyle/>
+              <a:p>
+                <a:r>
+                  <a:rPr lang="sv-SE">
+                    <a:noFill/>
+                  </a:rPr>
+                  <a:t> </a:t>
+                </a:r>
+              </a:p>
+            </p:txBody>
+          </p:sp>
+        </mc:Fallback>
+      </mc:AlternateContent>
+      <mc:AlternateContent xmlns:mc="http://schemas.openxmlformats.org/markup-compatibility/2006">
+        <mc:Choice xmlns:a14="http://schemas.microsoft.com/office/drawing/2010/main" Requires="a14">
+          <p:sp>
+            <p:nvSpPr>
+              <p:cNvPr id="42" name="TextBox 41">
+                <a:extLst>
+                  <a:ext uri="{FF2B5EF4-FFF2-40B4-BE49-F238E27FC236}">
+                    <a16:creationId xmlns:a16="http://schemas.microsoft.com/office/drawing/2014/main" id="{2A873941-A096-45C6-A860-287C4FE9FE4D}"/>
+                  </a:ext>
+                </a:extLst>
+              </p:cNvPr>
+              <p:cNvSpPr txBox="1"/>
+              <p:nvPr/>
+            </p:nvSpPr>
+            <p:spPr>
+              <a:xfrm>
+                <a:off x="-2005910" y="1955263"/>
+                <a:ext cx="6245816" cy="369332"/>
+              </a:xfrm>
+              <a:prstGeom prst="rect">
+                <a:avLst/>
+              </a:prstGeom>
+              <a:noFill/>
+            </p:spPr>
+            <p:txBody>
+              <a:bodyPr wrap="square" rtlCol="0">
+                <a:spAutoFit/>
+              </a:bodyPr>
+              <a:lstStyle/>
+              <a:p>
+                <a14:m>
+                  <m:oMath xmlns:m="http://schemas.openxmlformats.org/officeDocument/2006/math">
+                    <m:sSub>
+                      <m:sSubPr>
+                        <m:ctrlPr>
+                          <a:rPr lang="en-US" b="0" i="1" smtClean="0">
+                            <a:solidFill>
+                              <a:srgbClr val="FF0000"/>
+                            </a:solidFill>
+                            <a:latin typeface="Cambria Math" panose="02040503050406030204" pitchFamily="18" charset="0"/>
+                          </a:rPr>
+                        </m:ctrlPr>
+                      </m:sSubPr>
+                      <m:e>
+                        <m:r>
+                          <a:rPr lang="en-US" b="0" i="1" smtClean="0">
+                            <a:solidFill>
+                              <a:srgbClr val="FF0000"/>
+                            </a:solidFill>
+                            <a:latin typeface="Cambria Math" panose="02040503050406030204" pitchFamily="18" charset="0"/>
+                          </a:rPr>
+                          <m:t>𝜙</m:t>
+                        </m:r>
+                      </m:e>
+                      <m:sub>
+                        <m:r>
+                          <a:rPr lang="en-US" b="0" i="1" smtClean="0">
+                            <a:solidFill>
+                              <a:srgbClr val="FF0000"/>
+                            </a:solidFill>
+                            <a:latin typeface="Cambria Math" panose="02040503050406030204" pitchFamily="18" charset="0"/>
+                          </a:rPr>
+                          <m:t>𝐶𝐵</m:t>
+                        </m:r>
+                      </m:sub>
+                    </m:sSub>
+                    <m:r>
+                      <a:rPr lang="en-US" b="0" i="1" smtClean="0">
+                        <a:solidFill>
+                          <a:srgbClr val="FF0000"/>
+                        </a:solidFill>
+                        <a:latin typeface="Cambria Math" panose="02040503050406030204" pitchFamily="18" charset="0"/>
+                      </a:rPr>
+                      <m:t>=</m:t>
+                    </m:r>
+                    <m:sSup>
+                      <m:sSupPr>
+                        <m:ctrlPr>
+                          <a:rPr lang="en-US" b="0" i="1" smtClean="0">
+                            <a:solidFill>
+                              <a:srgbClr val="FF0000"/>
+                            </a:solidFill>
+                            <a:latin typeface="Cambria Math" panose="02040503050406030204" pitchFamily="18" charset="0"/>
+                          </a:rPr>
+                        </m:ctrlPr>
+                      </m:sSupPr>
+                      <m:e>
+                        <m:r>
+                          <a:rPr lang="en-US" b="0" i="1" smtClean="0">
+                            <a:solidFill>
+                              <a:srgbClr val="FF0000"/>
+                            </a:solidFill>
+                            <a:latin typeface="Cambria Math" panose="02040503050406030204" pitchFamily="18" charset="0"/>
+                          </a:rPr>
+                          <m:t>180</m:t>
+                        </m:r>
+                      </m:e>
+                      <m:sup>
+                        <m:r>
+                          <a:rPr lang="en-US" b="0" i="1" smtClean="0">
+                            <a:solidFill>
+                              <a:srgbClr val="FF0000"/>
+                            </a:solidFill>
+                            <a:latin typeface="Cambria Math" panose="02040503050406030204" pitchFamily="18" charset="0"/>
+                          </a:rPr>
+                          <m:t>𝑜</m:t>
+                        </m:r>
+                      </m:sup>
+                    </m:sSup>
+                  </m:oMath>
+                </a14:m>
+                <a:r>
+                  <a:rPr lang="en-US" dirty="0">
+                    <a:solidFill>
+                      <a:srgbClr val="FF0000"/>
+                    </a:solidFill>
+                  </a:rPr>
+                  <a:t> and  </a:t>
+                </a:r>
+                <a14:m>
+                  <m:oMath xmlns:m="http://schemas.openxmlformats.org/officeDocument/2006/math">
+                    <m:sSub>
+                      <m:sSubPr>
+                        <m:ctrlPr>
+                          <a:rPr lang="en-US" i="1" smtClean="0">
+                            <a:solidFill>
+                              <a:srgbClr val="FF0000"/>
+                            </a:solidFill>
+                            <a:latin typeface="Cambria Math" panose="02040503050406030204" pitchFamily="18" charset="0"/>
+                          </a:rPr>
+                        </m:ctrlPr>
+                      </m:sSubPr>
+                      <m:e>
+                        <m:r>
+                          <a:rPr lang="en-US" i="1">
+                            <a:solidFill>
+                              <a:srgbClr val="FF0000"/>
+                            </a:solidFill>
+                            <a:latin typeface="Cambria Math" panose="02040503050406030204" pitchFamily="18" charset="0"/>
+                          </a:rPr>
+                          <m:t>𝜙</m:t>
+                        </m:r>
+                      </m:e>
+                      <m:sub>
+                        <m:r>
+                          <a:rPr lang="en-US" i="1">
+                            <a:solidFill>
+                              <a:srgbClr val="FF0000"/>
+                            </a:solidFill>
+                            <a:latin typeface="Cambria Math" panose="02040503050406030204" pitchFamily="18" charset="0"/>
+                          </a:rPr>
+                          <m:t>𝐶</m:t>
+                        </m:r>
+                        <m:r>
+                          <a:rPr lang="en-US" b="0" i="1" smtClean="0">
+                            <a:solidFill>
+                              <a:srgbClr val="FF0000"/>
+                            </a:solidFill>
+                            <a:latin typeface="Cambria Math" panose="02040503050406030204" pitchFamily="18" charset="0"/>
+                          </a:rPr>
+                          <m:t>𝐶</m:t>
+                        </m:r>
+                      </m:sub>
+                    </m:sSub>
+                    <m:r>
+                      <a:rPr lang="en-US" b="0" i="1" smtClean="0">
+                        <a:solidFill>
+                          <a:srgbClr val="FF0000"/>
+                        </a:solidFill>
+                        <a:latin typeface="Cambria Math" panose="02040503050406030204" pitchFamily="18" charset="0"/>
+                      </a:rPr>
+                      <m:t>=</m:t>
+                    </m:r>
+                    <m:sSup>
+                      <m:sSupPr>
+                        <m:ctrlPr>
+                          <a:rPr lang="en-US" b="0" i="1" smtClean="0">
+                            <a:solidFill>
+                              <a:srgbClr val="FF0000"/>
+                            </a:solidFill>
+                            <a:latin typeface="Cambria Math" panose="02040503050406030204" pitchFamily="18" charset="0"/>
+                          </a:rPr>
+                        </m:ctrlPr>
+                      </m:sSupPr>
+                      <m:e>
+                        <m:r>
+                          <a:rPr lang="en-US" b="0" i="1" smtClean="0">
+                            <a:solidFill>
+                              <a:srgbClr val="FF0000"/>
+                            </a:solidFill>
+                            <a:latin typeface="Cambria Math" panose="02040503050406030204" pitchFamily="18" charset="0"/>
+                          </a:rPr>
+                          <m:t>180</m:t>
+                        </m:r>
+                      </m:e>
+                      <m:sup>
+                        <m:r>
+                          <a:rPr lang="en-US" b="0" i="1" smtClean="0">
+                            <a:solidFill>
+                              <a:srgbClr val="FF0000"/>
+                            </a:solidFill>
+                            <a:latin typeface="Cambria Math" panose="02040503050406030204" pitchFamily="18" charset="0"/>
+                          </a:rPr>
+                          <m:t>𝑜</m:t>
+                        </m:r>
+                      </m:sup>
+                    </m:sSup>
+                  </m:oMath>
+                </a14:m>
+                <a:r>
+                  <a:rPr lang="en-US" dirty="0">
+                    <a:solidFill>
+                      <a:srgbClr val="FF0000"/>
+                    </a:solidFill>
+                  </a:rPr>
+                  <a:t> </a:t>
+                </a:r>
+              </a:p>
+            </p:txBody>
+          </p:sp>
+        </mc:Choice>
+        <mc:Fallback>
+          <p:sp>
+            <p:nvSpPr>
+              <p:cNvPr id="42" name="TextBox 41">
+                <a:extLst>
+                  <a:ext uri="{FF2B5EF4-FFF2-40B4-BE49-F238E27FC236}">
+                    <a16:creationId xmlns:a16="http://schemas.microsoft.com/office/drawing/2014/main" id="{2A873941-A096-45C6-A860-287C4FE9FE4D}"/>
+                  </a:ext>
+                </a:extLst>
+              </p:cNvPr>
+              <p:cNvSpPr txBox="1">
+                <a:spLocks noRot="1" noChangeAspect="1" noMove="1" noResize="1" noEditPoints="1" noAdjustHandles="1" noChangeArrowheads="1" noChangeShapeType="1" noTextEdit="1"/>
+              </p:cNvSpPr>
+              <p:nvPr/>
+            </p:nvSpPr>
+            <p:spPr>
+              <a:xfrm>
+                <a:off x="-2005910" y="1955263"/>
+                <a:ext cx="6245816" cy="369332"/>
+              </a:xfrm>
+              <a:prstGeom prst="rect">
+                <a:avLst/>
+              </a:prstGeom>
+              <a:blipFill>
+                <a:blip r:embed="rId7"/>
+                <a:stretch>
+                  <a:fillRect l="-293" t="-10000" b="-26667"/>
+                </a:stretch>
+              </a:blipFill>
+            </p:spPr>
+            <p:txBody>
+              <a:bodyPr/>
+              <a:lstStyle/>
+              <a:p>
+                <a:r>
+                  <a:rPr lang="sv-SE">
+                    <a:noFill/>
+                  </a:rPr>
+                  <a:t> </a:t>
+                </a:r>
+              </a:p>
+            </p:txBody>
+          </p:sp>
+        </mc:Fallback>
+      </mc:AlternateContent>
+      <mc:AlternateContent xmlns:mc="http://schemas.openxmlformats.org/markup-compatibility/2006">
+        <mc:Choice xmlns:a14="http://schemas.microsoft.com/office/drawing/2010/main" Requires="a14">
+          <p:sp>
+            <p:nvSpPr>
+              <p:cNvPr id="43" name="Rectangle 42">
+                <a:extLst>
+                  <a:ext uri="{FF2B5EF4-FFF2-40B4-BE49-F238E27FC236}">
+                    <a16:creationId xmlns:a16="http://schemas.microsoft.com/office/drawing/2014/main" id="{BAC192F1-FC6D-4326-AB4B-1A56AE6E22A0}"/>
+                  </a:ext>
+                </a:extLst>
+              </p:cNvPr>
+              <p:cNvSpPr/>
+              <p:nvPr/>
+            </p:nvSpPr>
+            <p:spPr>
+              <a:xfrm>
+                <a:off x="-1952793" y="2346687"/>
+                <a:ext cx="2983253" cy="646331"/>
+              </a:xfrm>
+              <a:prstGeom prst="rect">
+                <a:avLst/>
+              </a:prstGeom>
+            </p:spPr>
+            <p:txBody>
+              <a:bodyPr wrap="none">
+                <a:spAutoFit/>
+              </a:bodyPr>
+              <a:lstStyle/>
+              <a:p>
+                <a:r>
+                  <a:rPr lang="en-US" b="1" dirty="0"/>
+                  <a:t>else if </a:t>
+                </a:r>
+                <a14:m>
+                  <m:oMath xmlns:m="http://schemas.openxmlformats.org/officeDocument/2006/math">
+                    <m:sSub>
+                      <m:sSubPr>
+                        <m:ctrlPr>
+                          <a:rPr lang="en-US" b="1" i="1" smtClean="0">
+                            <a:latin typeface="Cambria Math" panose="02040503050406030204" pitchFamily="18" charset="0"/>
+                          </a:rPr>
+                        </m:ctrlPr>
+                      </m:sSubPr>
+                      <m:e>
+                        <m:r>
+                          <a:rPr lang="en-US" b="1" i="0" smtClean="0">
+                            <a:latin typeface="Cambria Math" panose="02040503050406030204" pitchFamily="18" charset="0"/>
+                          </a:rPr>
+                          <m:t> </m:t>
+                        </m:r>
+                        <m:r>
+                          <a:rPr lang="sv-SE" b="1" i="1">
+                            <a:latin typeface="Cambria Math" panose="02040503050406030204" pitchFamily="18" charset="0"/>
+                          </a:rPr>
+                          <m:t>𝒗</m:t>
+                        </m:r>
+                      </m:e>
+                      <m:sub>
+                        <m:r>
+                          <a:rPr lang="en-US" b="1" i="1" smtClean="0">
+                            <a:latin typeface="Cambria Math" panose="02040503050406030204" pitchFamily="18" charset="0"/>
+                          </a:rPr>
+                          <m:t>𝑩</m:t>
+                        </m:r>
+                      </m:sub>
+                    </m:sSub>
+                    <m:r>
+                      <a:rPr lang="en-US" b="1" i="1" smtClean="0">
+                        <a:latin typeface="Cambria Math" panose="02040503050406030204" pitchFamily="18" charset="0"/>
+                      </a:rPr>
+                      <m:t>&gt;</m:t>
+                    </m:r>
+                    <m:sSub>
+                      <m:sSubPr>
+                        <m:ctrlPr>
+                          <a:rPr lang="en-US" b="1" i="1">
+                            <a:latin typeface="Cambria Math" panose="02040503050406030204" pitchFamily="18" charset="0"/>
+                          </a:rPr>
+                        </m:ctrlPr>
+                      </m:sSubPr>
+                      <m:e>
+                        <m:r>
+                          <a:rPr lang="en-US" b="1">
+                            <a:latin typeface="Cambria Math" panose="02040503050406030204" pitchFamily="18" charset="0"/>
+                          </a:rPr>
+                          <m:t> </m:t>
+                        </m:r>
+                        <m:r>
+                          <a:rPr lang="sv-SE" b="1" i="1">
+                            <a:latin typeface="Cambria Math" panose="02040503050406030204" pitchFamily="18" charset="0"/>
+                          </a:rPr>
+                          <m:t>𝒗</m:t>
+                        </m:r>
+                      </m:e>
+                      <m:sub>
+                        <m:r>
+                          <a:rPr lang="en-US" b="1" i="1" smtClean="0">
+                            <a:latin typeface="Cambria Math" panose="02040503050406030204" pitchFamily="18" charset="0"/>
+                          </a:rPr>
+                          <m:t>𝑨</m:t>
+                        </m:r>
+                      </m:sub>
+                    </m:sSub>
+                    <m:r>
+                      <a:rPr lang="en-US" b="1" i="1" smtClean="0">
+                        <a:latin typeface="Cambria Math" panose="02040503050406030204" pitchFamily="18" charset="0"/>
+                      </a:rPr>
+                      <m:t>  &amp;&amp;</m:t>
+                    </m:r>
+                    <m:sSub>
+                      <m:sSubPr>
+                        <m:ctrlPr>
+                          <a:rPr lang="en-US" b="1" i="1">
+                            <a:latin typeface="Cambria Math" panose="02040503050406030204" pitchFamily="18" charset="0"/>
+                          </a:rPr>
+                        </m:ctrlPr>
+                      </m:sSubPr>
+                      <m:e>
+                        <m:r>
+                          <a:rPr lang="en-US" b="1">
+                            <a:latin typeface="Cambria Math" panose="02040503050406030204" pitchFamily="18" charset="0"/>
+                          </a:rPr>
+                          <m:t> </m:t>
+                        </m:r>
+                        <m:r>
+                          <a:rPr lang="sv-SE" b="1" i="1">
+                            <a:latin typeface="Cambria Math" panose="02040503050406030204" pitchFamily="18" charset="0"/>
+                          </a:rPr>
+                          <m:t>𝒗</m:t>
+                        </m:r>
+                      </m:e>
+                      <m:sub>
+                        <m:r>
+                          <a:rPr lang="en-US" b="1" i="1" smtClean="0">
+                            <a:latin typeface="Cambria Math" panose="02040503050406030204" pitchFamily="18" charset="0"/>
+                          </a:rPr>
+                          <m:t>𝑩</m:t>
+                        </m:r>
+                      </m:sub>
+                    </m:sSub>
+                    <m:r>
+                      <a:rPr lang="en-US" b="1" i="1">
+                        <a:latin typeface="Cambria Math" panose="02040503050406030204" pitchFamily="18" charset="0"/>
+                      </a:rPr>
+                      <m:t>&gt;</m:t>
+                    </m:r>
+                    <m:sSub>
+                      <m:sSubPr>
+                        <m:ctrlPr>
+                          <a:rPr lang="en-US" b="1" i="1">
+                            <a:latin typeface="Cambria Math" panose="02040503050406030204" pitchFamily="18" charset="0"/>
+                          </a:rPr>
+                        </m:ctrlPr>
+                      </m:sSubPr>
+                      <m:e>
+                        <m:r>
+                          <a:rPr lang="en-US" b="1">
+                            <a:latin typeface="Cambria Math" panose="02040503050406030204" pitchFamily="18" charset="0"/>
+                          </a:rPr>
+                          <m:t> </m:t>
+                        </m:r>
+                        <m:r>
+                          <a:rPr lang="sv-SE" b="1" i="1">
+                            <a:latin typeface="Cambria Math" panose="02040503050406030204" pitchFamily="18" charset="0"/>
+                          </a:rPr>
+                          <m:t>𝒗</m:t>
+                        </m:r>
+                      </m:e>
+                      <m:sub>
+                        <m:r>
+                          <a:rPr lang="en-US" b="1" i="1" smtClean="0">
+                            <a:latin typeface="Cambria Math" panose="02040503050406030204" pitchFamily="18" charset="0"/>
+                          </a:rPr>
+                          <m:t>𝑪</m:t>
+                        </m:r>
+                      </m:sub>
+                    </m:sSub>
+                  </m:oMath>
+                </a14:m>
+                <a:endParaRPr lang="en-US" b="1" dirty="0"/>
+              </a:p>
+              <a:p>
+                <a:r>
+                  <a:rPr lang="en-US" dirty="0"/>
+                  <a:t> </a:t>
+                </a:r>
+              </a:p>
+            </p:txBody>
+          </p:sp>
+        </mc:Choice>
+        <mc:Fallback>
+          <p:sp>
+            <p:nvSpPr>
+              <p:cNvPr id="43" name="Rectangle 42">
+                <a:extLst>
+                  <a:ext uri="{FF2B5EF4-FFF2-40B4-BE49-F238E27FC236}">
+                    <a16:creationId xmlns:a16="http://schemas.microsoft.com/office/drawing/2014/main" id="{BAC192F1-FC6D-4326-AB4B-1A56AE6E22A0}"/>
+                  </a:ext>
+                </a:extLst>
+              </p:cNvPr>
+              <p:cNvSpPr>
+                <a:spLocks noRot="1" noChangeAspect="1" noMove="1" noResize="1" noEditPoints="1" noAdjustHandles="1" noChangeArrowheads="1" noChangeShapeType="1" noTextEdit="1"/>
+              </p:cNvSpPr>
+              <p:nvPr/>
+            </p:nvSpPr>
+            <p:spPr>
+              <a:xfrm>
+                <a:off x="-1952793" y="2346687"/>
+                <a:ext cx="2983253" cy="646331"/>
+              </a:xfrm>
+              <a:prstGeom prst="rect">
+                <a:avLst/>
+              </a:prstGeom>
+              <a:blipFill>
+                <a:blip r:embed="rId8"/>
+                <a:stretch>
+                  <a:fillRect l="-1840" t="-5660"/>
+                </a:stretch>
+              </a:blipFill>
+            </p:spPr>
+            <p:txBody>
+              <a:bodyPr/>
+              <a:lstStyle/>
+              <a:p>
+                <a:r>
+                  <a:rPr lang="sv-SE">
+                    <a:noFill/>
+                  </a:rPr>
+                  <a:t> </a:t>
+                </a:r>
+              </a:p>
+            </p:txBody>
+          </p:sp>
+        </mc:Fallback>
+      </mc:AlternateContent>
+      <mc:AlternateContent xmlns:mc="http://schemas.openxmlformats.org/markup-compatibility/2006">
+        <mc:Choice xmlns:a14="http://schemas.microsoft.com/office/drawing/2010/main" Requires="a14">
+          <p:sp>
+            <p:nvSpPr>
+              <p:cNvPr id="44" name="TextBox 43">
+                <a:extLst>
+                  <a:ext uri="{FF2B5EF4-FFF2-40B4-BE49-F238E27FC236}">
+                    <a16:creationId xmlns:a16="http://schemas.microsoft.com/office/drawing/2014/main" id="{F335ED28-4CE1-49C9-8CBB-36A404F4C5A1}"/>
+                  </a:ext>
+                </a:extLst>
+              </p:cNvPr>
+              <p:cNvSpPr txBox="1"/>
+              <p:nvPr/>
+            </p:nvSpPr>
+            <p:spPr>
+              <a:xfrm>
+                <a:off x="-2005910" y="2687977"/>
+                <a:ext cx="6245816" cy="369332"/>
+              </a:xfrm>
+              <a:prstGeom prst="rect">
+                <a:avLst/>
+              </a:prstGeom>
+              <a:noFill/>
+            </p:spPr>
+            <p:txBody>
+              <a:bodyPr wrap="square" rtlCol="0">
+                <a:spAutoFit/>
+              </a:bodyPr>
+              <a:lstStyle/>
+              <a:p>
+                <a14:m>
+                  <m:oMath xmlns:m="http://schemas.openxmlformats.org/officeDocument/2006/math">
+                    <m:sSub>
+                      <m:sSubPr>
+                        <m:ctrlPr>
+                          <a:rPr lang="en-US" b="0" i="1" smtClean="0">
+                            <a:solidFill>
+                              <a:srgbClr val="FF0000"/>
+                            </a:solidFill>
+                            <a:latin typeface="Cambria Math" panose="02040503050406030204" pitchFamily="18" charset="0"/>
+                          </a:rPr>
+                        </m:ctrlPr>
+                      </m:sSubPr>
+                      <m:e>
+                        <m:r>
+                          <a:rPr lang="en-US" b="0" i="1" smtClean="0">
+                            <a:solidFill>
+                              <a:srgbClr val="FF0000"/>
+                            </a:solidFill>
+                            <a:latin typeface="Cambria Math" panose="02040503050406030204" pitchFamily="18" charset="0"/>
+                          </a:rPr>
+                          <m:t>𝜙</m:t>
+                        </m:r>
+                      </m:e>
+                      <m:sub>
+                        <m:r>
+                          <a:rPr lang="en-US" b="0" i="1" smtClean="0">
+                            <a:solidFill>
+                              <a:srgbClr val="FF0000"/>
+                            </a:solidFill>
+                            <a:latin typeface="Cambria Math" panose="02040503050406030204" pitchFamily="18" charset="0"/>
+                          </a:rPr>
+                          <m:t>𝐶𝐵</m:t>
+                        </m:r>
+                      </m:sub>
+                    </m:sSub>
+                    <m:r>
+                      <a:rPr lang="en-US" b="0" i="1" smtClean="0">
+                        <a:solidFill>
+                          <a:srgbClr val="FF0000"/>
+                        </a:solidFill>
+                        <a:latin typeface="Cambria Math" panose="02040503050406030204" pitchFamily="18" charset="0"/>
+                      </a:rPr>
+                      <m:t>=</m:t>
+                    </m:r>
+                    <m:sSup>
+                      <m:sSupPr>
+                        <m:ctrlPr>
+                          <a:rPr lang="en-US" b="0" i="1" smtClean="0">
+                            <a:solidFill>
+                              <a:srgbClr val="FF0000"/>
+                            </a:solidFill>
+                            <a:latin typeface="Cambria Math" panose="02040503050406030204" pitchFamily="18" charset="0"/>
+                          </a:rPr>
+                        </m:ctrlPr>
+                      </m:sSupPr>
+                      <m:e>
+                        <m:r>
+                          <a:rPr lang="en-US" b="0" i="1" smtClean="0">
+                            <a:solidFill>
+                              <a:srgbClr val="FF0000"/>
+                            </a:solidFill>
+                            <a:latin typeface="Cambria Math" panose="02040503050406030204" pitchFamily="18" charset="0"/>
+                          </a:rPr>
+                          <m:t>180</m:t>
+                        </m:r>
+                      </m:e>
+                      <m:sup>
+                        <m:r>
+                          <a:rPr lang="en-US" b="0" i="1" smtClean="0">
+                            <a:solidFill>
+                              <a:srgbClr val="FF0000"/>
+                            </a:solidFill>
+                            <a:latin typeface="Cambria Math" panose="02040503050406030204" pitchFamily="18" charset="0"/>
+                          </a:rPr>
+                          <m:t>𝑜</m:t>
+                        </m:r>
+                      </m:sup>
+                    </m:sSup>
+                  </m:oMath>
+                </a14:m>
+                <a:r>
+                  <a:rPr lang="en-US" dirty="0">
+                    <a:solidFill>
+                      <a:srgbClr val="FF0000"/>
+                    </a:solidFill>
+                  </a:rPr>
+                  <a:t> and  </a:t>
+                </a:r>
+                <a14:m>
+                  <m:oMath xmlns:m="http://schemas.openxmlformats.org/officeDocument/2006/math">
+                    <m:sSub>
+                      <m:sSubPr>
+                        <m:ctrlPr>
+                          <a:rPr lang="en-US" i="1" smtClean="0">
+                            <a:solidFill>
+                              <a:srgbClr val="FF0000"/>
+                            </a:solidFill>
+                            <a:latin typeface="Cambria Math" panose="02040503050406030204" pitchFamily="18" charset="0"/>
+                          </a:rPr>
+                        </m:ctrlPr>
+                      </m:sSubPr>
+                      <m:e>
+                        <m:r>
+                          <a:rPr lang="en-US" i="1">
+                            <a:solidFill>
+                              <a:srgbClr val="FF0000"/>
+                            </a:solidFill>
+                            <a:latin typeface="Cambria Math" panose="02040503050406030204" pitchFamily="18" charset="0"/>
+                          </a:rPr>
+                          <m:t>𝜙</m:t>
+                        </m:r>
+                      </m:e>
+                      <m:sub>
+                        <m:r>
+                          <a:rPr lang="en-US" i="1">
+                            <a:solidFill>
+                              <a:srgbClr val="FF0000"/>
+                            </a:solidFill>
+                            <a:latin typeface="Cambria Math" panose="02040503050406030204" pitchFamily="18" charset="0"/>
+                          </a:rPr>
+                          <m:t>𝐶</m:t>
+                        </m:r>
+                        <m:r>
+                          <a:rPr lang="en-US" b="0" i="1" smtClean="0">
+                            <a:solidFill>
+                              <a:srgbClr val="FF0000"/>
+                            </a:solidFill>
+                            <a:latin typeface="Cambria Math" panose="02040503050406030204" pitchFamily="18" charset="0"/>
+                          </a:rPr>
+                          <m:t>𝐶</m:t>
+                        </m:r>
+                      </m:sub>
+                    </m:sSub>
+                    <m:r>
+                      <a:rPr lang="en-US" b="0" i="1" smtClean="0">
+                        <a:solidFill>
+                          <a:srgbClr val="FF0000"/>
+                        </a:solidFill>
+                        <a:latin typeface="Cambria Math" panose="02040503050406030204" pitchFamily="18" charset="0"/>
+                      </a:rPr>
+                      <m:t>=</m:t>
+                    </m:r>
+                    <m:sSup>
+                      <m:sSupPr>
+                        <m:ctrlPr>
+                          <a:rPr lang="en-US" b="0" i="1" smtClean="0">
+                            <a:solidFill>
+                              <a:srgbClr val="FF0000"/>
+                            </a:solidFill>
+                            <a:latin typeface="Cambria Math" panose="02040503050406030204" pitchFamily="18" charset="0"/>
+                          </a:rPr>
+                        </m:ctrlPr>
+                      </m:sSupPr>
+                      <m:e>
+                        <m:r>
+                          <a:rPr lang="en-US" b="0" i="1" smtClean="0">
+                            <a:solidFill>
+                              <a:srgbClr val="FF0000"/>
+                            </a:solidFill>
+                            <a:latin typeface="Cambria Math" panose="02040503050406030204" pitchFamily="18" charset="0"/>
+                          </a:rPr>
+                          <m:t>0</m:t>
+                        </m:r>
+                      </m:e>
+                      <m:sup>
+                        <m:r>
+                          <a:rPr lang="en-US" b="0" i="1" smtClean="0">
+                            <a:solidFill>
+                              <a:srgbClr val="FF0000"/>
+                            </a:solidFill>
+                            <a:latin typeface="Cambria Math" panose="02040503050406030204" pitchFamily="18" charset="0"/>
+                          </a:rPr>
+                          <m:t>𝑜</m:t>
+                        </m:r>
+                      </m:sup>
+                    </m:sSup>
+                  </m:oMath>
+                </a14:m>
+                <a:r>
+                  <a:rPr lang="en-US" dirty="0">
+                    <a:solidFill>
+                      <a:srgbClr val="FF0000"/>
+                    </a:solidFill>
+                  </a:rPr>
+                  <a:t> </a:t>
+                </a:r>
+              </a:p>
+            </p:txBody>
+          </p:sp>
+        </mc:Choice>
+        <mc:Fallback>
+          <p:sp>
+            <p:nvSpPr>
+              <p:cNvPr id="44" name="TextBox 43">
+                <a:extLst>
+                  <a:ext uri="{FF2B5EF4-FFF2-40B4-BE49-F238E27FC236}">
+                    <a16:creationId xmlns:a16="http://schemas.microsoft.com/office/drawing/2014/main" id="{F335ED28-4CE1-49C9-8CBB-36A404F4C5A1}"/>
+                  </a:ext>
+                </a:extLst>
+              </p:cNvPr>
+              <p:cNvSpPr txBox="1">
+                <a:spLocks noRot="1" noChangeAspect="1" noMove="1" noResize="1" noEditPoints="1" noAdjustHandles="1" noChangeArrowheads="1" noChangeShapeType="1" noTextEdit="1"/>
+              </p:cNvSpPr>
+              <p:nvPr/>
+            </p:nvSpPr>
+            <p:spPr>
+              <a:xfrm>
+                <a:off x="-2005910" y="2687977"/>
+                <a:ext cx="6245816" cy="369332"/>
+              </a:xfrm>
+              <a:prstGeom prst="rect">
+                <a:avLst/>
+              </a:prstGeom>
+              <a:blipFill>
+                <a:blip r:embed="rId9"/>
+                <a:stretch>
+                  <a:fillRect l="-293" t="-9836" b="-24590"/>
+                </a:stretch>
+              </a:blipFill>
+            </p:spPr>
+            <p:txBody>
+              <a:bodyPr/>
+              <a:lstStyle/>
+              <a:p>
+                <a:r>
+                  <a:rPr lang="sv-SE">
+                    <a:noFill/>
+                  </a:rPr>
+                  <a:t> </a:t>
+                </a:r>
+              </a:p>
+            </p:txBody>
+          </p:sp>
+        </mc:Fallback>
+      </mc:AlternateContent>
+      <p:cxnSp>
+        <p:nvCxnSpPr>
+          <p:cNvPr id="45" name="Straight Arrow Connector 44">
+            <a:extLst>
+              <a:ext uri="{FF2B5EF4-FFF2-40B4-BE49-F238E27FC236}">
+                <a16:creationId xmlns:a16="http://schemas.microsoft.com/office/drawing/2014/main" id="{526D2690-0EE3-4221-A726-69D2AB1F057C}"/>
+              </a:ext>
+            </a:extLst>
+          </p:cNvPr>
+          <p:cNvCxnSpPr>
+            <a:cxnSpLocks/>
+          </p:cNvCxnSpPr>
+          <p:nvPr/>
+        </p:nvCxnSpPr>
+        <p:spPr>
+          <a:xfrm>
+            <a:off x="1371251" y="2089391"/>
+            <a:ext cx="2346896" cy="0"/>
+          </a:xfrm>
+          <a:prstGeom prst="straightConnector1">
+            <a:avLst/>
+          </a:prstGeom>
+          <a:ln w="25400">
+            <a:solidFill>
+              <a:srgbClr val="C00000"/>
+            </a:solidFill>
+            <a:tailEnd type="triangle"/>
+          </a:ln>
+        </p:spPr>
+        <p:style>
+          <a:lnRef idx="1">
+            <a:schemeClr val="accent1"/>
+          </a:lnRef>
+          <a:fillRef idx="0">
+            <a:schemeClr val="accent1"/>
+          </a:fillRef>
+          <a:effectRef idx="0">
+            <a:schemeClr val="accent1"/>
+          </a:effectRef>
+          <a:fontRef idx="minor">
+            <a:schemeClr val="tx1"/>
+          </a:fontRef>
+        </p:style>
+      </p:cxnSp>
+      <p:cxnSp>
+        <p:nvCxnSpPr>
+          <p:cNvPr id="46" name="Straight Arrow Connector 45">
+            <a:extLst>
+              <a:ext uri="{FF2B5EF4-FFF2-40B4-BE49-F238E27FC236}">
+                <a16:creationId xmlns:a16="http://schemas.microsoft.com/office/drawing/2014/main" id="{B232957C-D6E3-4D8C-9526-0A27C078B5C1}"/>
+              </a:ext>
+            </a:extLst>
+          </p:cNvPr>
+          <p:cNvCxnSpPr>
+            <a:cxnSpLocks/>
+          </p:cNvCxnSpPr>
+          <p:nvPr/>
+        </p:nvCxnSpPr>
+        <p:spPr>
+          <a:xfrm flipH="1" flipV="1">
+            <a:off x="2853134" y="1982015"/>
+            <a:ext cx="865014" cy="1"/>
+          </a:xfrm>
+          <a:prstGeom prst="straightConnector1">
+            <a:avLst/>
+          </a:prstGeom>
+          <a:ln w="25400">
+            <a:solidFill>
+              <a:schemeClr val="accent5"/>
+            </a:solidFill>
+            <a:tailEnd type="triangle"/>
+          </a:ln>
+        </p:spPr>
+        <p:style>
+          <a:lnRef idx="1">
+            <a:schemeClr val="accent1"/>
+          </a:lnRef>
+          <a:fillRef idx="0">
+            <a:schemeClr val="accent1"/>
+          </a:fillRef>
+          <a:effectRef idx="0">
+            <a:schemeClr val="accent1"/>
+          </a:effectRef>
+          <a:fontRef idx="minor">
+            <a:schemeClr val="tx1"/>
+          </a:fontRef>
+        </p:style>
+      </p:cxnSp>
+      <p:cxnSp>
+        <p:nvCxnSpPr>
+          <p:cNvPr id="47" name="Straight Arrow Connector 46">
+            <a:extLst>
+              <a:ext uri="{FF2B5EF4-FFF2-40B4-BE49-F238E27FC236}">
+                <a16:creationId xmlns:a16="http://schemas.microsoft.com/office/drawing/2014/main" id="{EA755440-DDE9-4B7F-B44C-28CC75E7173E}"/>
+              </a:ext>
+            </a:extLst>
+          </p:cNvPr>
+          <p:cNvCxnSpPr>
+            <a:cxnSpLocks/>
+          </p:cNvCxnSpPr>
+          <p:nvPr/>
+        </p:nvCxnSpPr>
+        <p:spPr>
+          <a:xfrm flipH="1" flipV="1">
+            <a:off x="1628535" y="1973888"/>
+            <a:ext cx="1224599" cy="9115"/>
+          </a:xfrm>
+          <a:prstGeom prst="straightConnector1">
+            <a:avLst/>
+          </a:prstGeom>
+          <a:ln w="25400">
+            <a:solidFill>
+              <a:schemeClr val="accent6"/>
+            </a:solidFill>
+            <a:tailEnd type="triangle"/>
+          </a:ln>
+        </p:spPr>
+        <p:style>
+          <a:lnRef idx="1">
+            <a:schemeClr val="accent1"/>
+          </a:lnRef>
+          <a:fillRef idx="0">
+            <a:schemeClr val="accent1"/>
+          </a:fillRef>
+          <a:effectRef idx="0">
+            <a:schemeClr val="accent1"/>
+          </a:effectRef>
+          <a:fontRef idx="minor">
+            <a:schemeClr val="tx1"/>
+          </a:fontRef>
+        </p:style>
+      </p:cxnSp>
+      <p:cxnSp>
+        <p:nvCxnSpPr>
+          <p:cNvPr id="48" name="Straight Arrow Connector 47">
+            <a:extLst>
+              <a:ext uri="{FF2B5EF4-FFF2-40B4-BE49-F238E27FC236}">
+                <a16:creationId xmlns:a16="http://schemas.microsoft.com/office/drawing/2014/main" id="{C164349F-6FC2-466A-8DB7-CE4520F2BAA3}"/>
+              </a:ext>
+            </a:extLst>
+          </p:cNvPr>
+          <p:cNvCxnSpPr>
+            <a:cxnSpLocks/>
+          </p:cNvCxnSpPr>
+          <p:nvPr/>
+        </p:nvCxnSpPr>
+        <p:spPr>
+          <a:xfrm>
+            <a:off x="1371251" y="2752811"/>
+            <a:ext cx="2346896" cy="0"/>
+          </a:xfrm>
+          <a:prstGeom prst="straightConnector1">
+            <a:avLst/>
+          </a:prstGeom>
+          <a:ln w="25400">
+            <a:solidFill>
+              <a:schemeClr val="accent5"/>
+            </a:solidFill>
+            <a:headEnd type="triangle"/>
+            <a:tailEnd type="none"/>
+          </a:ln>
+        </p:spPr>
+        <p:style>
+          <a:lnRef idx="1">
+            <a:schemeClr val="accent1"/>
+          </a:lnRef>
+          <a:fillRef idx="0">
+            <a:schemeClr val="accent1"/>
+          </a:fillRef>
+          <a:effectRef idx="0">
+            <a:schemeClr val="accent1"/>
+          </a:effectRef>
+          <a:fontRef idx="minor">
+            <a:schemeClr val="tx1"/>
+          </a:fontRef>
+        </p:style>
+      </p:cxnSp>
+      <p:cxnSp>
+        <p:nvCxnSpPr>
+          <p:cNvPr id="49" name="Straight Arrow Connector 48">
+            <a:extLst>
+              <a:ext uri="{FF2B5EF4-FFF2-40B4-BE49-F238E27FC236}">
+                <a16:creationId xmlns:a16="http://schemas.microsoft.com/office/drawing/2014/main" id="{CA4EFF0A-C21C-4280-BF19-62BAE5228F1D}"/>
+              </a:ext>
+            </a:extLst>
+          </p:cNvPr>
+          <p:cNvCxnSpPr>
+            <a:cxnSpLocks/>
+          </p:cNvCxnSpPr>
+          <p:nvPr/>
+        </p:nvCxnSpPr>
+        <p:spPr>
+          <a:xfrm flipH="1" flipV="1">
+            <a:off x="2853134" y="2645435"/>
+            <a:ext cx="865014" cy="1"/>
+          </a:xfrm>
+          <a:prstGeom prst="straightConnector1">
+            <a:avLst/>
+          </a:prstGeom>
+          <a:ln w="25400">
+            <a:solidFill>
+              <a:srgbClr val="C00000"/>
+            </a:solidFill>
+            <a:headEnd type="triangle"/>
+            <a:tailEnd type="none"/>
+          </a:ln>
+        </p:spPr>
+        <p:style>
+          <a:lnRef idx="1">
+            <a:schemeClr val="accent1"/>
+          </a:lnRef>
+          <a:fillRef idx="0">
+            <a:schemeClr val="accent1"/>
+          </a:fillRef>
+          <a:effectRef idx="0">
+            <a:schemeClr val="accent1"/>
+          </a:effectRef>
+          <a:fontRef idx="minor">
+            <a:schemeClr val="tx1"/>
+          </a:fontRef>
+        </p:style>
+      </p:cxnSp>
+      <p:cxnSp>
+        <p:nvCxnSpPr>
+          <p:cNvPr id="50" name="Straight Arrow Connector 49">
+            <a:extLst>
+              <a:ext uri="{FF2B5EF4-FFF2-40B4-BE49-F238E27FC236}">
+                <a16:creationId xmlns:a16="http://schemas.microsoft.com/office/drawing/2014/main" id="{0ADD34A9-80C5-4AB1-AF23-641660505BA6}"/>
+              </a:ext>
+            </a:extLst>
+          </p:cNvPr>
+          <p:cNvCxnSpPr>
+            <a:cxnSpLocks/>
+          </p:cNvCxnSpPr>
+          <p:nvPr/>
+        </p:nvCxnSpPr>
+        <p:spPr>
+          <a:xfrm flipH="1" flipV="1">
+            <a:off x="1628535" y="2637308"/>
+            <a:ext cx="1224599" cy="9115"/>
+          </a:xfrm>
+          <a:prstGeom prst="straightConnector1">
+            <a:avLst/>
+          </a:prstGeom>
+          <a:ln w="25400">
+            <a:solidFill>
+              <a:schemeClr val="accent6"/>
+            </a:solidFill>
+            <a:headEnd type="triangle"/>
+            <a:tailEnd type="none"/>
+          </a:ln>
+        </p:spPr>
+        <p:style>
+          <a:lnRef idx="1">
+            <a:schemeClr val="accent1"/>
+          </a:lnRef>
+          <a:fillRef idx="0">
+            <a:schemeClr val="accent1"/>
+          </a:fillRef>
+          <a:effectRef idx="0">
+            <a:schemeClr val="accent1"/>
+          </a:effectRef>
+          <a:fontRef idx="minor">
+            <a:schemeClr val="tx1"/>
+          </a:fontRef>
+        </p:style>
+      </p:cxnSp>
+      <mc:AlternateContent xmlns:mc="http://schemas.openxmlformats.org/markup-compatibility/2006">
+        <mc:Choice xmlns:a14="http://schemas.microsoft.com/office/drawing/2010/main" Requires="a14">
+          <p:sp>
+            <p:nvSpPr>
+              <p:cNvPr id="51" name="Rectangle 50">
+                <a:extLst>
+                  <a:ext uri="{FF2B5EF4-FFF2-40B4-BE49-F238E27FC236}">
+                    <a16:creationId xmlns:a16="http://schemas.microsoft.com/office/drawing/2014/main" id="{E91BF1FD-2245-4652-BE6B-793F0273C841}"/>
+                  </a:ext>
+                </a:extLst>
+              </p:cNvPr>
+              <p:cNvSpPr/>
+              <p:nvPr/>
+            </p:nvSpPr>
+            <p:spPr>
+              <a:xfrm>
+                <a:off x="-1952793" y="3015110"/>
+                <a:ext cx="2983253" cy="646331"/>
+              </a:xfrm>
+              <a:prstGeom prst="rect">
+                <a:avLst/>
+              </a:prstGeom>
+            </p:spPr>
+            <p:txBody>
+              <a:bodyPr wrap="none">
+                <a:spAutoFit/>
+              </a:bodyPr>
+              <a:lstStyle/>
+              <a:p>
+                <a:r>
+                  <a:rPr lang="en-US" b="1" dirty="0"/>
+                  <a:t>else if </a:t>
+                </a:r>
+                <a14:m>
+                  <m:oMath xmlns:m="http://schemas.openxmlformats.org/officeDocument/2006/math">
+                    <m:sSub>
+                      <m:sSubPr>
+                        <m:ctrlPr>
+                          <a:rPr lang="en-US" b="1" i="1" smtClean="0">
+                            <a:latin typeface="Cambria Math" panose="02040503050406030204" pitchFamily="18" charset="0"/>
+                          </a:rPr>
+                        </m:ctrlPr>
+                      </m:sSubPr>
+                      <m:e>
+                        <m:r>
+                          <a:rPr lang="en-US" b="1" i="0" smtClean="0">
+                            <a:latin typeface="Cambria Math" panose="02040503050406030204" pitchFamily="18" charset="0"/>
+                          </a:rPr>
+                          <m:t> </m:t>
+                        </m:r>
+                        <m:r>
+                          <a:rPr lang="sv-SE" b="1" i="1">
+                            <a:latin typeface="Cambria Math" panose="02040503050406030204" pitchFamily="18" charset="0"/>
+                          </a:rPr>
+                          <m:t>𝒗</m:t>
+                        </m:r>
+                      </m:e>
+                      <m:sub>
+                        <m:r>
+                          <a:rPr lang="en-US" b="1" i="1" smtClean="0">
+                            <a:latin typeface="Cambria Math" panose="02040503050406030204" pitchFamily="18" charset="0"/>
+                          </a:rPr>
+                          <m:t>𝑪</m:t>
+                        </m:r>
+                      </m:sub>
+                    </m:sSub>
+                    <m:r>
+                      <a:rPr lang="en-US" b="1" i="1" smtClean="0">
+                        <a:latin typeface="Cambria Math" panose="02040503050406030204" pitchFamily="18" charset="0"/>
+                      </a:rPr>
+                      <m:t>&gt;</m:t>
+                    </m:r>
+                    <m:sSub>
+                      <m:sSubPr>
+                        <m:ctrlPr>
+                          <a:rPr lang="en-US" b="1" i="1">
+                            <a:latin typeface="Cambria Math" panose="02040503050406030204" pitchFamily="18" charset="0"/>
+                          </a:rPr>
+                        </m:ctrlPr>
+                      </m:sSubPr>
+                      <m:e>
+                        <m:r>
+                          <a:rPr lang="en-US" b="1">
+                            <a:latin typeface="Cambria Math" panose="02040503050406030204" pitchFamily="18" charset="0"/>
+                          </a:rPr>
+                          <m:t> </m:t>
+                        </m:r>
+                        <m:r>
+                          <a:rPr lang="sv-SE" b="1" i="1">
+                            <a:latin typeface="Cambria Math" panose="02040503050406030204" pitchFamily="18" charset="0"/>
+                          </a:rPr>
+                          <m:t>𝒗</m:t>
+                        </m:r>
+                      </m:e>
+                      <m:sub>
+                        <m:r>
+                          <a:rPr lang="en-US" b="1" i="1" smtClean="0">
+                            <a:latin typeface="Cambria Math" panose="02040503050406030204" pitchFamily="18" charset="0"/>
+                          </a:rPr>
+                          <m:t>𝑨</m:t>
+                        </m:r>
+                      </m:sub>
+                    </m:sSub>
+                    <m:r>
+                      <a:rPr lang="en-US" b="1" i="1" smtClean="0">
+                        <a:latin typeface="Cambria Math" panose="02040503050406030204" pitchFamily="18" charset="0"/>
+                      </a:rPr>
+                      <m:t>  &amp;&amp;</m:t>
+                    </m:r>
+                    <m:sSub>
+                      <m:sSubPr>
+                        <m:ctrlPr>
+                          <a:rPr lang="en-US" b="1" i="1">
+                            <a:latin typeface="Cambria Math" panose="02040503050406030204" pitchFamily="18" charset="0"/>
+                          </a:rPr>
+                        </m:ctrlPr>
+                      </m:sSubPr>
+                      <m:e>
+                        <m:r>
+                          <a:rPr lang="en-US" b="1">
+                            <a:latin typeface="Cambria Math" panose="02040503050406030204" pitchFamily="18" charset="0"/>
+                          </a:rPr>
+                          <m:t> </m:t>
+                        </m:r>
+                        <m:r>
+                          <a:rPr lang="sv-SE" b="1" i="1">
+                            <a:latin typeface="Cambria Math" panose="02040503050406030204" pitchFamily="18" charset="0"/>
+                          </a:rPr>
+                          <m:t>𝒗</m:t>
+                        </m:r>
+                      </m:e>
+                      <m:sub>
+                        <m:r>
+                          <a:rPr lang="en-US" b="1" i="1" smtClean="0">
+                            <a:latin typeface="Cambria Math" panose="02040503050406030204" pitchFamily="18" charset="0"/>
+                          </a:rPr>
+                          <m:t>𝑪</m:t>
+                        </m:r>
+                      </m:sub>
+                    </m:sSub>
+                    <m:r>
+                      <a:rPr lang="en-US" b="1" i="1">
+                        <a:latin typeface="Cambria Math" panose="02040503050406030204" pitchFamily="18" charset="0"/>
+                      </a:rPr>
+                      <m:t>&gt;</m:t>
+                    </m:r>
+                    <m:sSub>
+                      <m:sSubPr>
+                        <m:ctrlPr>
+                          <a:rPr lang="en-US" b="1" i="1">
+                            <a:latin typeface="Cambria Math" panose="02040503050406030204" pitchFamily="18" charset="0"/>
+                          </a:rPr>
+                        </m:ctrlPr>
+                      </m:sSubPr>
+                      <m:e>
+                        <m:r>
+                          <a:rPr lang="en-US" b="1">
+                            <a:latin typeface="Cambria Math" panose="02040503050406030204" pitchFamily="18" charset="0"/>
+                          </a:rPr>
+                          <m:t> </m:t>
+                        </m:r>
+                        <m:r>
+                          <a:rPr lang="sv-SE" b="1" i="1">
+                            <a:latin typeface="Cambria Math" panose="02040503050406030204" pitchFamily="18" charset="0"/>
+                          </a:rPr>
+                          <m:t>𝒗</m:t>
+                        </m:r>
+                      </m:e>
+                      <m:sub>
+                        <m:r>
+                          <a:rPr lang="en-US" b="1" i="1" smtClean="0">
+                            <a:latin typeface="Cambria Math" panose="02040503050406030204" pitchFamily="18" charset="0"/>
+                          </a:rPr>
+                          <m:t>𝑩</m:t>
+                        </m:r>
+                      </m:sub>
+                    </m:sSub>
+                  </m:oMath>
+                </a14:m>
+                <a:endParaRPr lang="en-US" b="1" dirty="0"/>
+              </a:p>
+              <a:p>
+                <a:r>
+                  <a:rPr lang="en-US" dirty="0"/>
+                  <a:t> </a:t>
+                </a:r>
+              </a:p>
+            </p:txBody>
+          </p:sp>
+        </mc:Choice>
+        <mc:Fallback>
+          <p:sp>
+            <p:nvSpPr>
+              <p:cNvPr id="51" name="Rectangle 50">
+                <a:extLst>
+                  <a:ext uri="{FF2B5EF4-FFF2-40B4-BE49-F238E27FC236}">
+                    <a16:creationId xmlns:a16="http://schemas.microsoft.com/office/drawing/2014/main" id="{E91BF1FD-2245-4652-BE6B-793F0273C841}"/>
+                  </a:ext>
+                </a:extLst>
+              </p:cNvPr>
+              <p:cNvSpPr>
+                <a:spLocks noRot="1" noChangeAspect="1" noMove="1" noResize="1" noEditPoints="1" noAdjustHandles="1" noChangeArrowheads="1" noChangeShapeType="1" noTextEdit="1"/>
+              </p:cNvSpPr>
+              <p:nvPr/>
+            </p:nvSpPr>
+            <p:spPr>
+              <a:xfrm>
+                <a:off x="-1952793" y="3015110"/>
+                <a:ext cx="2983253" cy="646331"/>
+              </a:xfrm>
+              <a:prstGeom prst="rect">
+                <a:avLst/>
+              </a:prstGeom>
+              <a:blipFill>
+                <a:blip r:embed="rId10"/>
+                <a:stretch>
+                  <a:fillRect l="-1840" t="-5660"/>
+                </a:stretch>
+              </a:blipFill>
+            </p:spPr>
+            <p:txBody>
+              <a:bodyPr/>
+              <a:lstStyle/>
+              <a:p>
+                <a:r>
+                  <a:rPr lang="sv-SE">
+                    <a:noFill/>
+                  </a:rPr>
+                  <a:t> </a:t>
+                </a:r>
+              </a:p>
+            </p:txBody>
+          </p:sp>
+        </mc:Fallback>
+      </mc:AlternateContent>
+      <mc:AlternateContent xmlns:mc="http://schemas.openxmlformats.org/markup-compatibility/2006">
+        <mc:Choice xmlns:a14="http://schemas.microsoft.com/office/drawing/2010/main" Requires="a14">
+          <p:sp>
+            <p:nvSpPr>
+              <p:cNvPr id="52" name="TextBox 51">
+                <a:extLst>
+                  <a:ext uri="{FF2B5EF4-FFF2-40B4-BE49-F238E27FC236}">
+                    <a16:creationId xmlns:a16="http://schemas.microsoft.com/office/drawing/2014/main" id="{BFB64064-1CDB-4B2A-9195-D4F43C5973A3}"/>
+                  </a:ext>
+                </a:extLst>
+              </p:cNvPr>
+              <p:cNvSpPr txBox="1"/>
+              <p:nvPr/>
+            </p:nvSpPr>
+            <p:spPr>
+              <a:xfrm>
+                <a:off x="-1952793" y="3305965"/>
+                <a:ext cx="6245816" cy="369332"/>
+              </a:xfrm>
+              <a:prstGeom prst="rect">
+                <a:avLst/>
+              </a:prstGeom>
+              <a:noFill/>
+            </p:spPr>
+            <p:txBody>
+              <a:bodyPr wrap="square" rtlCol="0">
+                <a:spAutoFit/>
+              </a:bodyPr>
+              <a:lstStyle/>
+              <a:p>
+                <a14:m>
+                  <m:oMath xmlns:m="http://schemas.openxmlformats.org/officeDocument/2006/math">
+                    <m:sSub>
+                      <m:sSubPr>
+                        <m:ctrlPr>
+                          <a:rPr lang="en-US" b="0" i="1" smtClean="0">
+                            <a:solidFill>
+                              <a:srgbClr val="FF0000"/>
+                            </a:solidFill>
+                            <a:latin typeface="Cambria Math" panose="02040503050406030204" pitchFamily="18" charset="0"/>
+                          </a:rPr>
+                        </m:ctrlPr>
+                      </m:sSubPr>
+                      <m:e>
+                        <m:r>
+                          <a:rPr lang="en-US" b="0" i="1" smtClean="0">
+                            <a:solidFill>
+                              <a:srgbClr val="FF0000"/>
+                            </a:solidFill>
+                            <a:latin typeface="Cambria Math" panose="02040503050406030204" pitchFamily="18" charset="0"/>
+                          </a:rPr>
+                          <m:t>𝜙</m:t>
+                        </m:r>
+                      </m:e>
+                      <m:sub>
+                        <m:r>
+                          <a:rPr lang="en-US" b="0" i="1" smtClean="0">
+                            <a:solidFill>
+                              <a:srgbClr val="FF0000"/>
+                            </a:solidFill>
+                            <a:latin typeface="Cambria Math" panose="02040503050406030204" pitchFamily="18" charset="0"/>
+                          </a:rPr>
+                          <m:t>𝐶𝐵</m:t>
+                        </m:r>
+                      </m:sub>
+                    </m:sSub>
+                    <m:r>
+                      <a:rPr lang="en-US" b="0" i="1" smtClean="0">
+                        <a:solidFill>
+                          <a:srgbClr val="FF0000"/>
+                        </a:solidFill>
+                        <a:latin typeface="Cambria Math" panose="02040503050406030204" pitchFamily="18" charset="0"/>
+                      </a:rPr>
+                      <m:t>=</m:t>
+                    </m:r>
+                    <m:sSup>
+                      <m:sSupPr>
+                        <m:ctrlPr>
+                          <a:rPr lang="en-US" b="0" i="1" smtClean="0">
+                            <a:solidFill>
+                              <a:srgbClr val="FF0000"/>
+                            </a:solidFill>
+                            <a:latin typeface="Cambria Math" panose="02040503050406030204" pitchFamily="18" charset="0"/>
+                          </a:rPr>
+                        </m:ctrlPr>
+                      </m:sSupPr>
+                      <m:e>
+                        <m:r>
+                          <a:rPr lang="en-US" b="0" i="1" smtClean="0">
+                            <a:solidFill>
+                              <a:srgbClr val="FF0000"/>
+                            </a:solidFill>
+                            <a:latin typeface="Cambria Math" panose="02040503050406030204" pitchFamily="18" charset="0"/>
+                          </a:rPr>
+                          <m:t>0</m:t>
+                        </m:r>
+                      </m:e>
+                      <m:sup>
+                        <m:r>
+                          <a:rPr lang="en-US" b="0" i="1" smtClean="0">
+                            <a:solidFill>
+                              <a:srgbClr val="FF0000"/>
+                            </a:solidFill>
+                            <a:latin typeface="Cambria Math" panose="02040503050406030204" pitchFamily="18" charset="0"/>
+                          </a:rPr>
+                          <m:t>𝑜</m:t>
+                        </m:r>
+                      </m:sup>
+                    </m:sSup>
+                  </m:oMath>
+                </a14:m>
+                <a:r>
+                  <a:rPr lang="en-US" dirty="0">
+                    <a:solidFill>
+                      <a:srgbClr val="FF0000"/>
+                    </a:solidFill>
+                  </a:rPr>
+                  <a:t> and  </a:t>
+                </a:r>
+                <a14:m>
+                  <m:oMath xmlns:m="http://schemas.openxmlformats.org/officeDocument/2006/math">
+                    <m:sSub>
+                      <m:sSubPr>
+                        <m:ctrlPr>
+                          <a:rPr lang="en-US" i="1" smtClean="0">
+                            <a:solidFill>
+                              <a:srgbClr val="FF0000"/>
+                            </a:solidFill>
+                            <a:latin typeface="Cambria Math" panose="02040503050406030204" pitchFamily="18" charset="0"/>
+                          </a:rPr>
+                        </m:ctrlPr>
+                      </m:sSubPr>
+                      <m:e>
+                        <m:r>
+                          <a:rPr lang="en-US" i="1">
+                            <a:solidFill>
+                              <a:srgbClr val="FF0000"/>
+                            </a:solidFill>
+                            <a:latin typeface="Cambria Math" panose="02040503050406030204" pitchFamily="18" charset="0"/>
+                          </a:rPr>
+                          <m:t>𝜙</m:t>
+                        </m:r>
+                      </m:e>
+                      <m:sub>
+                        <m:r>
+                          <a:rPr lang="en-US" i="1">
+                            <a:solidFill>
+                              <a:srgbClr val="FF0000"/>
+                            </a:solidFill>
+                            <a:latin typeface="Cambria Math" panose="02040503050406030204" pitchFamily="18" charset="0"/>
+                          </a:rPr>
+                          <m:t>𝐶</m:t>
+                        </m:r>
+                        <m:r>
+                          <a:rPr lang="en-US" b="0" i="1" smtClean="0">
+                            <a:solidFill>
+                              <a:srgbClr val="FF0000"/>
+                            </a:solidFill>
+                            <a:latin typeface="Cambria Math" panose="02040503050406030204" pitchFamily="18" charset="0"/>
+                          </a:rPr>
+                          <m:t>𝐶</m:t>
+                        </m:r>
+                      </m:sub>
+                    </m:sSub>
+                    <m:r>
+                      <a:rPr lang="en-US" b="0" i="1" smtClean="0">
+                        <a:solidFill>
+                          <a:srgbClr val="FF0000"/>
+                        </a:solidFill>
+                        <a:latin typeface="Cambria Math" panose="02040503050406030204" pitchFamily="18" charset="0"/>
+                      </a:rPr>
+                      <m:t>=</m:t>
+                    </m:r>
+                    <m:sSup>
+                      <m:sSupPr>
+                        <m:ctrlPr>
+                          <a:rPr lang="en-US" b="0" i="1" smtClean="0">
+                            <a:solidFill>
+                              <a:srgbClr val="FF0000"/>
+                            </a:solidFill>
+                            <a:latin typeface="Cambria Math" panose="02040503050406030204" pitchFamily="18" charset="0"/>
+                          </a:rPr>
+                        </m:ctrlPr>
+                      </m:sSupPr>
+                      <m:e>
+                        <m:r>
+                          <a:rPr lang="en-US" b="0" i="1" smtClean="0">
+                            <a:solidFill>
+                              <a:srgbClr val="FF0000"/>
+                            </a:solidFill>
+                            <a:latin typeface="Cambria Math" panose="02040503050406030204" pitchFamily="18" charset="0"/>
+                          </a:rPr>
+                          <m:t>180</m:t>
+                        </m:r>
+                      </m:e>
+                      <m:sup>
+                        <m:r>
+                          <a:rPr lang="en-US" b="0" i="1" smtClean="0">
+                            <a:solidFill>
+                              <a:srgbClr val="FF0000"/>
+                            </a:solidFill>
+                            <a:latin typeface="Cambria Math" panose="02040503050406030204" pitchFamily="18" charset="0"/>
+                          </a:rPr>
+                          <m:t>𝑜</m:t>
+                        </m:r>
+                      </m:sup>
+                    </m:sSup>
+                  </m:oMath>
+                </a14:m>
+                <a:r>
+                  <a:rPr lang="en-US" dirty="0">
+                    <a:solidFill>
+                      <a:srgbClr val="FF0000"/>
+                    </a:solidFill>
+                  </a:rPr>
+                  <a:t> </a:t>
+                </a:r>
+              </a:p>
+            </p:txBody>
+          </p:sp>
+        </mc:Choice>
+        <mc:Fallback>
+          <p:sp>
+            <p:nvSpPr>
+              <p:cNvPr id="52" name="TextBox 51">
+                <a:extLst>
+                  <a:ext uri="{FF2B5EF4-FFF2-40B4-BE49-F238E27FC236}">
+                    <a16:creationId xmlns:a16="http://schemas.microsoft.com/office/drawing/2014/main" id="{BFB64064-1CDB-4B2A-9195-D4F43C5973A3}"/>
+                  </a:ext>
+                </a:extLst>
+              </p:cNvPr>
+              <p:cNvSpPr txBox="1">
+                <a:spLocks noRot="1" noChangeAspect="1" noMove="1" noResize="1" noEditPoints="1" noAdjustHandles="1" noChangeArrowheads="1" noChangeShapeType="1" noTextEdit="1"/>
+              </p:cNvSpPr>
+              <p:nvPr/>
+            </p:nvSpPr>
+            <p:spPr>
+              <a:xfrm>
+                <a:off x="-1952793" y="3305965"/>
+                <a:ext cx="6245816" cy="369332"/>
+              </a:xfrm>
+              <a:prstGeom prst="rect">
+                <a:avLst/>
+              </a:prstGeom>
+              <a:blipFill>
+                <a:blip r:embed="rId11"/>
+                <a:stretch>
+                  <a:fillRect l="-293" t="-8197" b="-24590"/>
+                </a:stretch>
+              </a:blipFill>
+            </p:spPr>
+            <p:txBody>
+              <a:bodyPr/>
+              <a:lstStyle/>
+              <a:p>
+                <a:r>
+                  <a:rPr lang="sv-SE">
+                    <a:noFill/>
+                  </a:rPr>
+                  <a:t> </a:t>
+                </a:r>
+              </a:p>
+            </p:txBody>
+          </p:sp>
+        </mc:Fallback>
+      </mc:AlternateContent>
+      <p:cxnSp>
+        <p:nvCxnSpPr>
+          <p:cNvPr id="53" name="Straight Arrow Connector 52">
+            <a:extLst>
+              <a:ext uri="{FF2B5EF4-FFF2-40B4-BE49-F238E27FC236}">
+                <a16:creationId xmlns:a16="http://schemas.microsoft.com/office/drawing/2014/main" id="{4B82BDF3-273F-49E2-ACA9-F3F12BD23619}"/>
+              </a:ext>
+            </a:extLst>
+          </p:cNvPr>
+          <p:cNvCxnSpPr>
+            <a:cxnSpLocks/>
+          </p:cNvCxnSpPr>
+          <p:nvPr/>
+        </p:nvCxnSpPr>
+        <p:spPr>
+          <a:xfrm>
+            <a:off x="1371250" y="3409895"/>
+            <a:ext cx="2346896" cy="0"/>
+          </a:xfrm>
+          <a:prstGeom prst="straightConnector1">
+            <a:avLst/>
+          </a:prstGeom>
+          <a:ln w="25400">
+            <a:solidFill>
+              <a:schemeClr val="accent6"/>
+            </a:solidFill>
+            <a:headEnd type="triangle"/>
+            <a:tailEnd type="none"/>
+          </a:ln>
+        </p:spPr>
+        <p:style>
+          <a:lnRef idx="1">
+            <a:schemeClr val="accent1"/>
+          </a:lnRef>
+          <a:fillRef idx="0">
+            <a:schemeClr val="accent1"/>
+          </a:fillRef>
+          <a:effectRef idx="0">
+            <a:schemeClr val="accent1"/>
+          </a:effectRef>
+          <a:fontRef idx="minor">
+            <a:schemeClr val="tx1"/>
+          </a:fontRef>
+        </p:style>
+      </p:cxnSp>
+      <p:cxnSp>
+        <p:nvCxnSpPr>
+          <p:cNvPr id="54" name="Straight Arrow Connector 53">
+            <a:extLst>
+              <a:ext uri="{FF2B5EF4-FFF2-40B4-BE49-F238E27FC236}">
+                <a16:creationId xmlns:a16="http://schemas.microsoft.com/office/drawing/2014/main" id="{38B95C53-4E6A-488F-8647-0B299F9F6ED1}"/>
+              </a:ext>
+            </a:extLst>
+          </p:cNvPr>
+          <p:cNvCxnSpPr>
+            <a:cxnSpLocks/>
+          </p:cNvCxnSpPr>
+          <p:nvPr/>
+        </p:nvCxnSpPr>
+        <p:spPr>
+          <a:xfrm flipH="1" flipV="1">
+            <a:off x="2853133" y="3302519"/>
+            <a:ext cx="865014" cy="1"/>
+          </a:xfrm>
+          <a:prstGeom prst="straightConnector1">
+            <a:avLst/>
+          </a:prstGeom>
+          <a:ln w="25400">
+            <a:solidFill>
+              <a:srgbClr val="C00000"/>
+            </a:solidFill>
+            <a:headEnd type="triangle"/>
+            <a:tailEnd type="none"/>
+          </a:ln>
+        </p:spPr>
+        <p:style>
+          <a:lnRef idx="1">
+            <a:schemeClr val="accent1"/>
+          </a:lnRef>
+          <a:fillRef idx="0">
+            <a:schemeClr val="accent1"/>
+          </a:fillRef>
+          <a:effectRef idx="0">
+            <a:schemeClr val="accent1"/>
+          </a:effectRef>
+          <a:fontRef idx="minor">
+            <a:schemeClr val="tx1"/>
+          </a:fontRef>
+        </p:style>
+      </p:cxnSp>
+      <p:cxnSp>
+        <p:nvCxnSpPr>
+          <p:cNvPr id="55" name="Straight Arrow Connector 54">
+            <a:extLst>
+              <a:ext uri="{FF2B5EF4-FFF2-40B4-BE49-F238E27FC236}">
+                <a16:creationId xmlns:a16="http://schemas.microsoft.com/office/drawing/2014/main" id="{D8579418-0FDB-4272-A530-62E962386062}"/>
+              </a:ext>
+            </a:extLst>
+          </p:cNvPr>
+          <p:cNvCxnSpPr>
+            <a:cxnSpLocks/>
+          </p:cNvCxnSpPr>
+          <p:nvPr/>
+        </p:nvCxnSpPr>
+        <p:spPr>
+          <a:xfrm flipH="1" flipV="1">
+            <a:off x="1628534" y="3294392"/>
+            <a:ext cx="1224599" cy="9115"/>
+          </a:xfrm>
+          <a:prstGeom prst="straightConnector1">
+            <a:avLst/>
+          </a:prstGeom>
+          <a:ln w="25400">
+            <a:solidFill>
+              <a:schemeClr val="accent5"/>
+            </a:solidFill>
+            <a:headEnd type="triangle"/>
+            <a:tailEnd type="none"/>
+          </a:ln>
+        </p:spPr>
+        <p:style>
+          <a:lnRef idx="1">
+            <a:schemeClr val="accent1"/>
+          </a:lnRef>
+          <a:fillRef idx="0">
+            <a:schemeClr val="accent1"/>
+          </a:fillRef>
+          <a:effectRef idx="0">
+            <a:schemeClr val="accent1"/>
+          </a:effectRef>
+          <a:fontRef idx="minor">
+            <a:schemeClr val="tx1"/>
+          </a:fontRef>
+        </p:style>
+      </p:cxnSp>
+      <mc:AlternateContent xmlns:mc="http://schemas.openxmlformats.org/markup-compatibility/2006">
+        <mc:Choice xmlns:a14="http://schemas.microsoft.com/office/drawing/2010/main" Requires="a14">
+          <p:sp>
+            <p:nvSpPr>
+              <p:cNvPr id="61" name="TextBox 60"/>
+              <p:cNvSpPr txBox="1"/>
+              <p:nvPr/>
+            </p:nvSpPr>
+            <p:spPr>
+              <a:xfrm>
+                <a:off x="7460072" y="1093788"/>
+                <a:ext cx="601661" cy="369332"/>
+              </a:xfrm>
+              <a:prstGeom prst="rect">
+                <a:avLst/>
+              </a:prstGeom>
+              <a:noFill/>
+            </p:spPr>
+            <p:txBody>
+              <a:bodyPr wrap="square" rtlCol="0">
+                <a:spAutoFit/>
+              </a:bodyPr>
+              <a:lstStyle/>
+              <a:p>
+                <a:pPr/>
+                <a14:m>
+                  <m:oMathPara xmlns:m="http://schemas.openxmlformats.org/officeDocument/2006/math">
+                    <m:oMathParaPr>
+                      <m:jc m:val="centerGroup"/>
+                    </m:oMathParaPr>
+                    <m:oMath xmlns:m="http://schemas.openxmlformats.org/officeDocument/2006/math">
+                      <m:r>
+                        <a:rPr lang="en-US" b="0" i="1" smtClean="0">
+                          <a:latin typeface="Cambria Math" panose="02040503050406030204" pitchFamily="18" charset="0"/>
+                        </a:rPr>
+                        <m:t>𝛼</m:t>
+                      </m:r>
+                    </m:oMath>
+                  </m:oMathPara>
+                </a14:m>
+                <a:endParaRPr lang="sv-SE" dirty="0"/>
+              </a:p>
+            </p:txBody>
+          </p:sp>
+        </mc:Choice>
+        <mc:Fallback>
+          <p:sp>
+            <p:nvSpPr>
+              <p:cNvPr id="61" name="TextBox 60"/>
+              <p:cNvSpPr txBox="1">
+                <a:spLocks noRot="1" noChangeAspect="1" noMove="1" noResize="1" noEditPoints="1" noAdjustHandles="1" noChangeArrowheads="1" noChangeShapeType="1" noTextEdit="1"/>
+              </p:cNvSpPr>
+              <p:nvPr/>
+            </p:nvSpPr>
+            <p:spPr>
+              <a:xfrm>
+                <a:off x="7460072" y="1093788"/>
+                <a:ext cx="601661" cy="369332"/>
+              </a:xfrm>
+              <a:prstGeom prst="rect">
+                <a:avLst/>
+              </a:prstGeom>
+              <a:blipFill>
+                <a:blip r:embed="rId12"/>
+                <a:stretch>
+                  <a:fillRect/>
+                </a:stretch>
+              </a:blipFill>
+            </p:spPr>
+            <p:txBody>
+              <a:bodyPr/>
+              <a:lstStyle/>
+              <a:p>
+                <a:r>
+                  <a:rPr lang="sv-SE">
+                    <a:noFill/>
+                  </a:rPr>
+                  <a:t> </a:t>
+                </a:r>
+              </a:p>
+            </p:txBody>
+          </p:sp>
+        </mc:Fallback>
+      </mc:AlternateContent>
+      <mc:AlternateContent xmlns:mc="http://schemas.openxmlformats.org/markup-compatibility/2006">
+        <mc:Choice xmlns:a14="http://schemas.microsoft.com/office/drawing/2010/main" Requires="a14">
+          <p:sp>
+            <p:nvSpPr>
+              <p:cNvPr id="62" name="TextBox 61"/>
+              <p:cNvSpPr txBox="1"/>
+              <p:nvPr/>
+            </p:nvSpPr>
+            <p:spPr>
+              <a:xfrm>
+                <a:off x="6445591" y="1148025"/>
+                <a:ext cx="601661" cy="369332"/>
+              </a:xfrm>
+              <a:prstGeom prst="rect">
+                <a:avLst/>
+              </a:prstGeom>
+              <a:noFill/>
+            </p:spPr>
+            <p:txBody>
+              <a:bodyPr wrap="square" rtlCol="0">
+                <a:spAutoFit/>
+              </a:bodyPr>
+              <a:lstStyle/>
+              <a:p>
+                <a:pPr/>
+                <a14:m>
+                  <m:oMathPara xmlns:m="http://schemas.openxmlformats.org/officeDocument/2006/math">
+                    <m:oMathParaPr>
+                      <m:jc m:val="centerGroup"/>
+                    </m:oMathParaPr>
+                    <m:oMath xmlns:m="http://schemas.openxmlformats.org/officeDocument/2006/math">
+                      <m:r>
+                        <a:rPr lang="en-US" b="0" i="1" smtClean="0">
+                          <a:latin typeface="Cambria Math" panose="02040503050406030204" pitchFamily="18" charset="0"/>
+                        </a:rPr>
+                        <m:t>𝛽</m:t>
+                      </m:r>
+                    </m:oMath>
+                  </m:oMathPara>
+                </a14:m>
+                <a:endParaRPr lang="sv-SE" dirty="0"/>
+              </a:p>
+            </p:txBody>
+          </p:sp>
+        </mc:Choice>
+        <mc:Fallback>
+          <p:sp>
+            <p:nvSpPr>
+              <p:cNvPr id="62" name="TextBox 61"/>
+              <p:cNvSpPr txBox="1">
+                <a:spLocks noRot="1" noChangeAspect="1" noMove="1" noResize="1" noEditPoints="1" noAdjustHandles="1" noChangeArrowheads="1" noChangeShapeType="1" noTextEdit="1"/>
+              </p:cNvSpPr>
+              <p:nvPr/>
+            </p:nvSpPr>
+            <p:spPr>
+              <a:xfrm>
+                <a:off x="6445591" y="1148025"/>
+                <a:ext cx="601661" cy="369332"/>
+              </a:xfrm>
+              <a:prstGeom prst="rect">
+                <a:avLst/>
+              </a:prstGeom>
+              <a:blipFill>
+                <a:blip r:embed="rId13"/>
+                <a:stretch>
+                  <a:fillRect b="-13115"/>
+                </a:stretch>
+              </a:blipFill>
+            </p:spPr>
+            <p:txBody>
+              <a:bodyPr/>
+              <a:lstStyle/>
+              <a:p>
+                <a:r>
+                  <a:rPr lang="sv-SE">
+                    <a:noFill/>
+                  </a:rPr>
+                  <a:t> </a:t>
+                </a:r>
+              </a:p>
+            </p:txBody>
+          </p:sp>
+        </mc:Fallback>
+      </mc:AlternateContent>
+      <p:sp>
+        <p:nvSpPr>
+          <p:cNvPr id="66" name="Arc 65">
+            <a:extLst>
+              <a:ext uri="{FF2B5EF4-FFF2-40B4-BE49-F238E27FC236}">
+                <a16:creationId xmlns:a16="http://schemas.microsoft.com/office/drawing/2014/main" id="{AE3E0BFE-22D9-4A13-99FC-D329682B92D3}"/>
+              </a:ext>
+            </a:extLst>
+          </p:cNvPr>
+          <p:cNvSpPr/>
+          <p:nvPr/>
+        </p:nvSpPr>
+        <p:spPr>
+          <a:xfrm rot="20107918">
+            <a:off x="7600066" y="1405108"/>
+            <a:ext cx="402846" cy="159782"/>
+          </a:xfrm>
+          <a:prstGeom prst="arc">
+            <a:avLst>
+              <a:gd name="adj1" fmla="val 12585933"/>
+              <a:gd name="adj2" fmla="val 21144799"/>
+            </a:avLst>
+          </a:prstGeom>
+          <a:ln w="12700">
+            <a:solidFill>
+              <a:schemeClr val="tx1"/>
+            </a:solidFill>
+          </a:ln>
+        </p:spPr>
+        <p:style>
+          <a:lnRef idx="1">
+            <a:schemeClr val="accent1"/>
+          </a:lnRef>
+          <a:fillRef idx="0">
+            <a:schemeClr val="accent1"/>
+          </a:fillRef>
+          <a:effectRef idx="0">
+            <a:schemeClr val="accent1"/>
+          </a:effectRef>
+          <a:fontRef idx="minor">
+            <a:schemeClr val="tx1"/>
+          </a:fontRef>
+        </p:style>
+        <p:txBody>
+          <a:bodyPr rtlCol="0" anchor="ctr"/>
+          <a:lstStyle/>
+          <a:p>
+            <a:pPr algn="ctr"/>
+            <a:endParaRPr lang="sv-SE"/>
+          </a:p>
+        </p:txBody>
+      </p:sp>
+      <p:sp>
+        <p:nvSpPr>
+          <p:cNvPr id="67" name="Arc 66">
+            <a:extLst>
+              <a:ext uri="{FF2B5EF4-FFF2-40B4-BE49-F238E27FC236}">
+                <a16:creationId xmlns:a16="http://schemas.microsoft.com/office/drawing/2014/main" id="{7FD4CE10-858C-4ED5-AA94-9F99AC7E8DD9}"/>
+              </a:ext>
+            </a:extLst>
+          </p:cNvPr>
+          <p:cNvSpPr/>
+          <p:nvPr/>
+        </p:nvSpPr>
+        <p:spPr>
+          <a:xfrm rot="1477189">
+            <a:off x="6197613" y="1359797"/>
+            <a:ext cx="402846" cy="159782"/>
+          </a:xfrm>
+          <a:prstGeom prst="arc">
+            <a:avLst>
+              <a:gd name="adj1" fmla="val 12585933"/>
+              <a:gd name="adj2" fmla="val 21144799"/>
+            </a:avLst>
+          </a:prstGeom>
+          <a:ln w="12700">
+            <a:solidFill>
+              <a:schemeClr val="tx1"/>
+            </a:solidFill>
+          </a:ln>
+        </p:spPr>
+        <p:style>
+          <a:lnRef idx="1">
+            <a:schemeClr val="accent1"/>
+          </a:lnRef>
+          <a:fillRef idx="0">
+            <a:schemeClr val="accent1"/>
+          </a:fillRef>
+          <a:effectRef idx="0">
+            <a:schemeClr val="accent1"/>
+          </a:effectRef>
+          <a:fontRef idx="minor">
+            <a:schemeClr val="tx1"/>
+          </a:fontRef>
+        </p:style>
+        <p:txBody>
+          <a:bodyPr rtlCol="0" anchor="ctr"/>
+          <a:lstStyle/>
+          <a:p>
+            <a:pPr algn="ctr"/>
+            <a:endParaRPr lang="sv-SE"/>
+          </a:p>
+        </p:txBody>
+      </p:sp>
+      <p:sp>
+        <p:nvSpPr>
+          <p:cNvPr id="68" name="Arc 67">
+            <a:extLst>
+              <a:ext uri="{FF2B5EF4-FFF2-40B4-BE49-F238E27FC236}">
+                <a16:creationId xmlns:a16="http://schemas.microsoft.com/office/drawing/2014/main" id="{BFB982CB-870B-4954-8773-65CAF3CD3CD8}"/>
+              </a:ext>
+            </a:extLst>
+          </p:cNvPr>
+          <p:cNvSpPr/>
+          <p:nvPr/>
+        </p:nvSpPr>
+        <p:spPr>
+          <a:xfrm rot="2203924">
+            <a:off x="7951481" y="1367344"/>
+            <a:ext cx="402846" cy="159782"/>
+          </a:xfrm>
+          <a:prstGeom prst="arc">
+            <a:avLst>
+              <a:gd name="adj1" fmla="val 12585933"/>
+              <a:gd name="adj2" fmla="val 21144799"/>
+            </a:avLst>
+          </a:prstGeom>
+          <a:ln w="12700">
+            <a:solidFill>
+              <a:schemeClr val="tx1"/>
+            </a:solidFill>
+          </a:ln>
+        </p:spPr>
+        <p:style>
+          <a:lnRef idx="1">
+            <a:schemeClr val="accent1"/>
+          </a:lnRef>
+          <a:fillRef idx="0">
+            <a:schemeClr val="accent1"/>
+          </a:fillRef>
+          <a:effectRef idx="0">
+            <a:schemeClr val="accent1"/>
+          </a:effectRef>
+          <a:fontRef idx="minor">
+            <a:schemeClr val="tx1"/>
+          </a:fontRef>
+        </p:style>
+        <p:txBody>
+          <a:bodyPr rtlCol="0" anchor="ctr"/>
+          <a:lstStyle/>
+          <a:p>
+            <a:pPr algn="ctr"/>
+            <a:endParaRPr lang="sv-SE">
+              <a:solidFill>
+                <a:srgbClr val="FF0000"/>
+              </a:solidFill>
+            </a:endParaRPr>
+          </a:p>
+        </p:txBody>
+      </p:sp>
+      <p:cxnSp>
+        <p:nvCxnSpPr>
+          <p:cNvPr id="69" name="Straight Connector 68">
+            <a:extLst>
+              <a:ext uri="{FF2B5EF4-FFF2-40B4-BE49-F238E27FC236}">
+                <a16:creationId xmlns:a16="http://schemas.microsoft.com/office/drawing/2014/main" id="{499B8E31-6AAB-4655-9CBC-815172523F3B}"/>
+              </a:ext>
+            </a:extLst>
+          </p:cNvPr>
+          <p:cNvCxnSpPr>
+            <a:cxnSpLocks/>
+          </p:cNvCxnSpPr>
+          <p:nvPr/>
+        </p:nvCxnSpPr>
+        <p:spPr>
+          <a:xfrm>
+            <a:off x="7859628" y="1515145"/>
+            <a:ext cx="1014480" cy="0"/>
+          </a:xfrm>
+          <a:prstGeom prst="line">
+            <a:avLst/>
+          </a:prstGeom>
+          <a:ln w="25400">
+            <a:solidFill>
+              <a:schemeClr val="tx1"/>
+            </a:solidFill>
+            <a:prstDash val="sysDot"/>
+          </a:ln>
+        </p:spPr>
+        <p:style>
+          <a:lnRef idx="1">
+            <a:schemeClr val="accent1"/>
+          </a:lnRef>
+          <a:fillRef idx="0">
+            <a:schemeClr val="accent1"/>
+          </a:fillRef>
+          <a:effectRef idx="0">
+            <a:schemeClr val="accent1"/>
+          </a:effectRef>
+          <a:fontRef idx="minor">
+            <a:schemeClr val="tx1"/>
+          </a:fontRef>
+        </p:style>
+      </p:cxnSp>
+      <mc:AlternateContent xmlns:mc="http://schemas.openxmlformats.org/markup-compatibility/2006">
+        <mc:Choice xmlns:a14="http://schemas.microsoft.com/office/drawing/2010/main" Requires="a14">
+          <p:sp>
+            <p:nvSpPr>
+              <p:cNvPr id="70" name="Rectangle 69">
+                <a:extLst>
+                  <a:ext uri="{FF2B5EF4-FFF2-40B4-BE49-F238E27FC236}">
+                    <a16:creationId xmlns:a16="http://schemas.microsoft.com/office/drawing/2014/main" id="{496CB29F-77F8-413A-8CB5-2A7F714C125D}"/>
+                  </a:ext>
+                </a:extLst>
+              </p:cNvPr>
+              <p:cNvSpPr/>
+              <p:nvPr/>
+            </p:nvSpPr>
+            <p:spPr>
+              <a:xfrm>
+                <a:off x="8326861" y="1107919"/>
+                <a:ext cx="625108" cy="369332"/>
+              </a:xfrm>
+              <a:prstGeom prst="rect">
+                <a:avLst/>
+              </a:prstGeom>
+            </p:spPr>
+            <p:txBody>
+              <a:bodyPr wrap="none">
+                <a:spAutoFit/>
+              </a:bodyPr>
+              <a:lstStyle/>
+              <a:p>
+                <a14:m>
+                  <m:oMath xmlns:m="http://schemas.openxmlformats.org/officeDocument/2006/math">
+                    <m:sSub>
+                      <m:sSubPr>
+                        <m:ctrlPr>
+                          <a:rPr lang="en-US" i="1" smtClean="0">
+                            <a:solidFill>
+                              <a:srgbClr val="E622EB"/>
+                            </a:solidFill>
+                            <a:latin typeface="Cambria Math" panose="02040503050406030204" pitchFamily="18" charset="0"/>
+                          </a:rPr>
+                        </m:ctrlPr>
+                      </m:sSubPr>
+                      <m:e>
+                        <m:r>
+                          <a:rPr lang="en-US" i="1">
+                            <a:solidFill>
+                              <a:srgbClr val="E622EB"/>
+                            </a:solidFill>
+                            <a:latin typeface="Cambria Math" panose="02040503050406030204" pitchFamily="18" charset="0"/>
+                          </a:rPr>
+                          <m:t>𝜙</m:t>
+                        </m:r>
+                      </m:e>
+                      <m:sub>
+                        <m:r>
+                          <a:rPr lang="en-US" i="1">
+                            <a:solidFill>
+                              <a:srgbClr val="E622EB"/>
+                            </a:solidFill>
+                            <a:latin typeface="Cambria Math" panose="02040503050406030204" pitchFamily="18" charset="0"/>
+                          </a:rPr>
+                          <m:t>𝐶𝐵</m:t>
+                        </m:r>
+                      </m:sub>
+                    </m:sSub>
+                  </m:oMath>
+                </a14:m>
+                <a:r>
+                  <a:rPr lang="en-US" dirty="0">
+                    <a:solidFill>
+                      <a:srgbClr val="FF0000"/>
+                    </a:solidFill>
+                  </a:rPr>
+                  <a:t> </a:t>
+                </a:r>
+              </a:p>
+            </p:txBody>
+          </p:sp>
+        </mc:Choice>
+        <mc:Fallback>
+          <p:sp>
+            <p:nvSpPr>
+              <p:cNvPr id="70" name="Rectangle 69">
+                <a:extLst>
+                  <a:ext uri="{FF2B5EF4-FFF2-40B4-BE49-F238E27FC236}">
+                    <a16:creationId xmlns:a16="http://schemas.microsoft.com/office/drawing/2014/main" id="{496CB29F-77F8-413A-8CB5-2A7F714C125D}"/>
+                  </a:ext>
+                </a:extLst>
+              </p:cNvPr>
+              <p:cNvSpPr>
+                <a:spLocks noRot="1" noChangeAspect="1" noMove="1" noResize="1" noEditPoints="1" noAdjustHandles="1" noChangeArrowheads="1" noChangeShapeType="1" noTextEdit="1"/>
+              </p:cNvSpPr>
+              <p:nvPr/>
+            </p:nvSpPr>
+            <p:spPr>
+              <a:xfrm>
+                <a:off x="8326861" y="1107919"/>
+                <a:ext cx="625108" cy="369332"/>
+              </a:xfrm>
+              <a:prstGeom prst="rect">
+                <a:avLst/>
+              </a:prstGeom>
+              <a:blipFill>
+                <a:blip r:embed="rId14"/>
+                <a:stretch>
+                  <a:fillRect l="-2941" b="-13333"/>
+                </a:stretch>
+              </a:blipFill>
+            </p:spPr>
+            <p:txBody>
+              <a:bodyPr/>
+              <a:lstStyle/>
+              <a:p>
+                <a:r>
+                  <a:rPr lang="sv-SE">
+                    <a:noFill/>
+                  </a:rPr>
+                  <a:t> </a:t>
+                </a:r>
+              </a:p>
+            </p:txBody>
+          </p:sp>
+        </mc:Fallback>
+      </mc:AlternateContent>
+      <p:sp>
+        <p:nvSpPr>
+          <p:cNvPr id="71" name="Arc 70">
+            <a:extLst>
+              <a:ext uri="{FF2B5EF4-FFF2-40B4-BE49-F238E27FC236}">
+                <a16:creationId xmlns:a16="http://schemas.microsoft.com/office/drawing/2014/main" id="{D6903EB6-6953-454F-8901-D22A8B71DF70}"/>
+              </a:ext>
+            </a:extLst>
+          </p:cNvPr>
+          <p:cNvSpPr/>
+          <p:nvPr/>
+        </p:nvSpPr>
+        <p:spPr>
+          <a:xfrm rot="8638307">
+            <a:off x="5189003" y="1331986"/>
+            <a:ext cx="538984" cy="281832"/>
+          </a:xfrm>
+          <a:prstGeom prst="arc">
+            <a:avLst>
+              <a:gd name="adj1" fmla="val 15923001"/>
+              <a:gd name="adj2" fmla="val 21419193"/>
+            </a:avLst>
+          </a:prstGeom>
+          <a:ln w="12700">
+            <a:solidFill>
+              <a:schemeClr val="tx1"/>
+            </a:solidFill>
+          </a:ln>
+        </p:spPr>
+        <p:style>
+          <a:lnRef idx="1">
+            <a:schemeClr val="accent1"/>
+          </a:lnRef>
+          <a:fillRef idx="0">
+            <a:schemeClr val="accent1"/>
+          </a:fillRef>
+          <a:effectRef idx="0">
+            <a:schemeClr val="accent1"/>
+          </a:effectRef>
+          <a:fontRef idx="minor">
+            <a:schemeClr val="tx1"/>
+          </a:fontRef>
+        </p:style>
+        <p:txBody>
+          <a:bodyPr rtlCol="0" anchor="ctr"/>
+          <a:lstStyle/>
+          <a:p>
+            <a:pPr algn="ctr"/>
+            <a:endParaRPr lang="sv-SE">
+              <a:solidFill>
+                <a:srgbClr val="FF0000"/>
+              </a:solidFill>
+            </a:endParaRPr>
+          </a:p>
+        </p:txBody>
+      </p:sp>
+      <p:cxnSp>
+        <p:nvCxnSpPr>
+          <p:cNvPr id="72" name="Straight Connector 71">
+            <a:extLst>
+              <a:ext uri="{FF2B5EF4-FFF2-40B4-BE49-F238E27FC236}">
+                <a16:creationId xmlns:a16="http://schemas.microsoft.com/office/drawing/2014/main" id="{11A00E67-1ADC-4659-B12D-959CCAB5ABB7}"/>
+              </a:ext>
+            </a:extLst>
+          </p:cNvPr>
+          <p:cNvCxnSpPr>
+            <a:cxnSpLocks/>
+          </p:cNvCxnSpPr>
+          <p:nvPr/>
+        </p:nvCxnSpPr>
+        <p:spPr>
+          <a:xfrm flipV="1">
+            <a:off x="4938454" y="1489684"/>
+            <a:ext cx="626375" cy="195411"/>
+          </a:xfrm>
+          <a:prstGeom prst="line">
+            <a:avLst/>
+          </a:prstGeom>
+          <a:ln w="25400">
+            <a:solidFill>
+              <a:schemeClr val="tx1"/>
+            </a:solidFill>
+            <a:prstDash val="sysDot"/>
+          </a:ln>
+        </p:spPr>
+        <p:style>
+          <a:lnRef idx="1">
+            <a:schemeClr val="accent1"/>
+          </a:lnRef>
+          <a:fillRef idx="0">
+            <a:schemeClr val="accent1"/>
+          </a:fillRef>
+          <a:effectRef idx="0">
+            <a:schemeClr val="accent1"/>
+          </a:effectRef>
+          <a:fontRef idx="minor">
+            <a:schemeClr val="tx1"/>
+          </a:fontRef>
+        </p:style>
+      </p:cxnSp>
+      <mc:AlternateContent xmlns:mc="http://schemas.openxmlformats.org/markup-compatibility/2006">
+        <mc:Choice xmlns:a14="http://schemas.microsoft.com/office/drawing/2010/main" Requires="a14">
+          <p:sp>
+            <p:nvSpPr>
+              <p:cNvPr id="73" name="Rectangle 72">
+                <a:extLst>
+                  <a:ext uri="{FF2B5EF4-FFF2-40B4-BE49-F238E27FC236}">
+                    <a16:creationId xmlns:a16="http://schemas.microsoft.com/office/drawing/2014/main" id="{6A6F4827-EF04-4B73-A89C-7DEB4A290EF8}"/>
+                  </a:ext>
+                </a:extLst>
+              </p:cNvPr>
+              <p:cNvSpPr/>
+              <p:nvPr/>
+            </p:nvSpPr>
+            <p:spPr>
+              <a:xfrm>
+                <a:off x="5412988" y="1480254"/>
+                <a:ext cx="789896" cy="369332"/>
+              </a:xfrm>
+              <a:prstGeom prst="rect">
+                <a:avLst/>
+              </a:prstGeom>
+            </p:spPr>
+            <p:txBody>
+              <a:bodyPr wrap="none">
+                <a:spAutoFit/>
+              </a:bodyPr>
+              <a:lstStyle/>
+              <a:p>
+                <a14:m>
+                  <m:oMath xmlns:m="http://schemas.openxmlformats.org/officeDocument/2006/math">
+                    <m:r>
+                      <a:rPr lang="en-US" b="0" i="1" smtClean="0">
+                        <a:solidFill>
+                          <a:srgbClr val="92D050"/>
+                        </a:solidFill>
+                        <a:latin typeface="Cambria Math" panose="02040503050406030204" pitchFamily="18" charset="0"/>
+                      </a:rPr>
+                      <m:t>−</m:t>
+                    </m:r>
+                    <m:sSub>
+                      <m:sSubPr>
+                        <m:ctrlPr>
+                          <a:rPr lang="en-US" i="1" smtClean="0">
+                            <a:solidFill>
+                              <a:srgbClr val="92D050"/>
+                            </a:solidFill>
+                            <a:latin typeface="Cambria Math" panose="02040503050406030204" pitchFamily="18" charset="0"/>
+                          </a:rPr>
+                        </m:ctrlPr>
+                      </m:sSubPr>
+                      <m:e>
+                        <m:r>
+                          <a:rPr lang="en-US" i="1">
+                            <a:solidFill>
+                              <a:srgbClr val="92D050"/>
+                            </a:solidFill>
+                            <a:latin typeface="Cambria Math" panose="02040503050406030204" pitchFamily="18" charset="0"/>
+                          </a:rPr>
+                          <m:t>𝜙</m:t>
+                        </m:r>
+                      </m:e>
+                      <m:sub>
+                        <m:r>
+                          <a:rPr lang="en-US" i="1">
+                            <a:solidFill>
+                              <a:srgbClr val="92D050"/>
+                            </a:solidFill>
+                            <a:latin typeface="Cambria Math" panose="02040503050406030204" pitchFamily="18" charset="0"/>
+                          </a:rPr>
+                          <m:t>𝐶</m:t>
+                        </m:r>
+                        <m:r>
+                          <a:rPr lang="en-US" b="0" i="1" smtClean="0">
+                            <a:solidFill>
+                              <a:srgbClr val="92D050"/>
+                            </a:solidFill>
+                            <a:latin typeface="Cambria Math" panose="02040503050406030204" pitchFamily="18" charset="0"/>
+                          </a:rPr>
+                          <m:t>𝐶</m:t>
+                        </m:r>
+                      </m:sub>
+                    </m:sSub>
+                  </m:oMath>
+                </a14:m>
+                <a:r>
+                  <a:rPr lang="en-US" dirty="0">
+                    <a:solidFill>
+                      <a:srgbClr val="FF0000"/>
+                    </a:solidFill>
+                  </a:rPr>
+                  <a:t> </a:t>
+                </a:r>
+              </a:p>
+            </p:txBody>
+          </p:sp>
+        </mc:Choice>
+        <mc:Fallback>
+          <p:sp>
+            <p:nvSpPr>
+              <p:cNvPr id="73" name="Rectangle 72">
+                <a:extLst>
+                  <a:ext uri="{FF2B5EF4-FFF2-40B4-BE49-F238E27FC236}">
+                    <a16:creationId xmlns:a16="http://schemas.microsoft.com/office/drawing/2014/main" id="{6A6F4827-EF04-4B73-A89C-7DEB4A290EF8}"/>
+                  </a:ext>
+                </a:extLst>
+              </p:cNvPr>
+              <p:cNvSpPr>
+                <a:spLocks noRot="1" noChangeAspect="1" noMove="1" noResize="1" noEditPoints="1" noAdjustHandles="1" noChangeArrowheads="1" noChangeShapeType="1" noTextEdit="1"/>
+              </p:cNvSpPr>
+              <p:nvPr/>
+            </p:nvSpPr>
+            <p:spPr>
+              <a:xfrm>
+                <a:off x="5412988" y="1480254"/>
+                <a:ext cx="789896" cy="369332"/>
+              </a:xfrm>
+              <a:prstGeom prst="rect">
+                <a:avLst/>
+              </a:prstGeom>
+              <a:blipFill>
+                <a:blip r:embed="rId15"/>
+                <a:stretch>
+                  <a:fillRect b="-13333"/>
+                </a:stretch>
+              </a:blipFill>
+            </p:spPr>
+            <p:txBody>
+              <a:bodyPr/>
+              <a:lstStyle/>
+              <a:p>
+                <a:r>
+                  <a:rPr lang="sv-SE">
+                    <a:noFill/>
+                  </a:rPr>
+                  <a:t> </a:t>
+                </a:r>
+              </a:p>
+            </p:txBody>
+          </p:sp>
+        </mc:Fallback>
+      </mc:AlternateContent>
+      <mc:AlternateContent xmlns:mc="http://schemas.openxmlformats.org/markup-compatibility/2006">
+        <mc:Choice xmlns:a14="http://schemas.microsoft.com/office/drawing/2010/main" Requires="a14">
+          <p:sp>
+            <p:nvSpPr>
+              <p:cNvPr id="77" name="Rectangle 76">
+                <a:extLst>
+                  <a:ext uri="{FF2B5EF4-FFF2-40B4-BE49-F238E27FC236}">
+                    <a16:creationId xmlns:a16="http://schemas.microsoft.com/office/drawing/2014/main" id="{496CB29F-77F8-413A-8CB5-2A7F714C125D}"/>
+                  </a:ext>
+                </a:extLst>
+              </p:cNvPr>
+              <p:cNvSpPr/>
+              <p:nvPr/>
+            </p:nvSpPr>
+            <p:spPr>
+              <a:xfrm>
+                <a:off x="6450263" y="1551102"/>
+                <a:ext cx="1162947" cy="369332"/>
+              </a:xfrm>
+              <a:prstGeom prst="rect">
+                <a:avLst/>
+              </a:prstGeom>
+            </p:spPr>
+            <p:txBody>
+              <a:bodyPr wrap="none">
+                <a:spAutoFit/>
+              </a:bodyPr>
+              <a:lstStyle/>
+              <a:p>
+                <a14:m>
+                  <m:oMath xmlns:m="http://schemas.openxmlformats.org/officeDocument/2006/math">
+                    <m:sSub>
+                      <m:sSubPr>
+                        <m:ctrlPr>
+                          <a:rPr lang="en-US" i="1" smtClean="0">
+                            <a:solidFill>
+                              <a:srgbClr val="002060"/>
+                            </a:solidFill>
+                            <a:latin typeface="Cambria Math" panose="02040503050406030204" pitchFamily="18" charset="0"/>
+                          </a:rPr>
+                        </m:ctrlPr>
+                      </m:sSubPr>
+                      <m:e>
+                        <m:r>
+                          <a:rPr lang="en-US" i="1">
+                            <a:solidFill>
+                              <a:srgbClr val="002060"/>
+                            </a:solidFill>
+                            <a:latin typeface="Cambria Math" panose="02040503050406030204" pitchFamily="18" charset="0"/>
+                          </a:rPr>
+                          <m:t>𝜙</m:t>
+                        </m:r>
+                      </m:e>
+                      <m:sub>
+                        <m:r>
+                          <a:rPr lang="en-US" i="1">
+                            <a:solidFill>
+                              <a:srgbClr val="002060"/>
+                            </a:solidFill>
+                            <a:latin typeface="Cambria Math" panose="02040503050406030204" pitchFamily="18" charset="0"/>
+                          </a:rPr>
+                          <m:t>𝐶</m:t>
+                        </m:r>
+                        <m:r>
+                          <a:rPr lang="sv-SE" b="0" i="1" smtClean="0">
+                            <a:solidFill>
+                              <a:srgbClr val="002060"/>
+                            </a:solidFill>
+                            <a:latin typeface="Cambria Math" panose="02040503050406030204" pitchFamily="18" charset="0"/>
+                          </a:rPr>
+                          <m:t>𝐴</m:t>
+                        </m:r>
+                      </m:sub>
+                    </m:sSub>
+                    <m:r>
+                      <a:rPr lang="sv-SE" b="0" i="0" smtClean="0">
+                        <a:solidFill>
+                          <a:srgbClr val="002060"/>
+                        </a:solidFill>
+                        <a:latin typeface="Cambria Math" panose="02040503050406030204" pitchFamily="18" charset="0"/>
+                      </a:rPr>
+                      <m:t>=</m:t>
+                    </m:r>
+                    <m:sSup>
+                      <m:sSupPr>
+                        <m:ctrlPr>
+                          <a:rPr lang="sv-SE" b="0" i="0" smtClean="0">
+                            <a:solidFill>
+                              <a:srgbClr val="002060"/>
+                            </a:solidFill>
+                            <a:latin typeface="Cambria Math" panose="02040503050406030204" pitchFamily="18" charset="0"/>
+                          </a:rPr>
+                        </m:ctrlPr>
+                      </m:sSupPr>
+                      <m:e>
+                        <m:r>
+                          <a:rPr lang="sv-SE" b="0" i="0" smtClean="0">
+                            <a:solidFill>
+                              <a:srgbClr val="002060"/>
+                            </a:solidFill>
+                            <a:latin typeface="Cambria Math" panose="02040503050406030204" pitchFamily="18" charset="0"/>
+                          </a:rPr>
+                          <m:t>0</m:t>
+                        </m:r>
+                      </m:e>
+                      <m:sup>
+                        <m:r>
+                          <a:rPr lang="sv-SE" b="0" i="1" smtClean="0">
+                            <a:solidFill>
+                              <a:srgbClr val="002060"/>
+                            </a:solidFill>
+                            <a:latin typeface="Cambria Math" panose="02040503050406030204" pitchFamily="18" charset="0"/>
+                          </a:rPr>
+                          <m:t>𝑜</m:t>
+                        </m:r>
+                      </m:sup>
+                    </m:sSup>
+                  </m:oMath>
+                </a14:m>
+                <a:r>
+                  <a:rPr lang="en-US" dirty="0" smtClean="0">
+                    <a:solidFill>
+                      <a:srgbClr val="FF0000"/>
+                    </a:solidFill>
+                  </a:rPr>
+                  <a:t> </a:t>
+                </a:r>
+                <a:endParaRPr lang="en-US" dirty="0">
+                  <a:solidFill>
+                    <a:srgbClr val="FF0000"/>
+                  </a:solidFill>
+                </a:endParaRPr>
+              </a:p>
+            </p:txBody>
+          </p:sp>
+        </mc:Choice>
+        <mc:Fallback>
+          <p:sp>
+            <p:nvSpPr>
+              <p:cNvPr id="77" name="Rectangle 76">
+                <a:extLst>
+                  <a:ext uri="{FF2B5EF4-FFF2-40B4-BE49-F238E27FC236}">
+                    <a16:creationId xmlns:a16="http://schemas.microsoft.com/office/drawing/2014/main" id="{496CB29F-77F8-413A-8CB5-2A7F714C125D}"/>
+                  </a:ext>
+                </a:extLst>
+              </p:cNvPr>
+              <p:cNvSpPr>
+                <a:spLocks noRot="1" noChangeAspect="1" noMove="1" noResize="1" noEditPoints="1" noAdjustHandles="1" noChangeArrowheads="1" noChangeShapeType="1" noTextEdit="1"/>
+              </p:cNvSpPr>
+              <p:nvPr/>
+            </p:nvSpPr>
+            <p:spPr>
+              <a:xfrm>
+                <a:off x="6450263" y="1551102"/>
+                <a:ext cx="1162947" cy="369332"/>
+              </a:xfrm>
+              <a:prstGeom prst="rect">
+                <a:avLst/>
+              </a:prstGeom>
+              <a:blipFill>
+                <a:blip r:embed="rId16"/>
+                <a:stretch>
+                  <a:fillRect l="-1047" b="-11475"/>
+                </a:stretch>
+              </a:blipFill>
+            </p:spPr>
+            <p:txBody>
+              <a:bodyPr/>
+              <a:lstStyle/>
+              <a:p>
+                <a:r>
+                  <a:rPr lang="sv-SE">
+                    <a:noFill/>
+                  </a:rPr>
+                  <a:t> </a:t>
+                </a:r>
+              </a:p>
+            </p:txBody>
+          </p:sp>
+        </mc:Fallback>
+      </mc:AlternateContent>
+      <mc:AlternateContent xmlns:mc="http://schemas.openxmlformats.org/markup-compatibility/2006">
+        <mc:Choice xmlns:a14="http://schemas.microsoft.com/office/drawing/2010/main" Requires="a14">
+          <p:sp>
+            <p:nvSpPr>
+              <p:cNvPr id="78" name="Rectangle 77"/>
+              <p:cNvSpPr/>
+              <p:nvPr/>
+            </p:nvSpPr>
+            <p:spPr>
+              <a:xfrm>
+                <a:off x="5256338" y="949565"/>
+                <a:ext cx="697242" cy="408638"/>
+              </a:xfrm>
+              <a:prstGeom prst="rect">
+                <a:avLst/>
+              </a:prstGeom>
+            </p:spPr>
+            <p:txBody>
+              <a:bodyPr wrap="none">
+                <a:spAutoFit/>
+              </a:bodyPr>
+              <a:lstStyle/>
+              <a:p>
+                <a14:m>
+                  <m:oMathPara xmlns:m="http://schemas.openxmlformats.org/officeDocument/2006/math">
+                    <m:oMathParaPr>
+                      <m:jc m:val="centerGroup"/>
+                    </m:oMathParaPr>
+                    <m:oMath xmlns:m="http://schemas.openxmlformats.org/officeDocument/2006/math">
+                      <m:sSup>
+                        <m:sSupPr>
+                          <m:ctrlPr>
+                            <a:rPr lang="en-US" i="1">
+                              <a:solidFill>
+                                <a:srgbClr val="92D050"/>
+                              </a:solidFill>
+                              <a:latin typeface="Cambria Math" panose="02040503050406030204" pitchFamily="18" charset="0"/>
+                            </a:rPr>
+                          </m:ctrlPr>
+                        </m:sSupPr>
+                        <m:e>
+                          <m:acc>
+                            <m:accPr>
+                              <m:chr m:val="̂"/>
+                              <m:ctrlPr>
+                                <a:rPr lang="en-US" i="1">
+                                  <a:solidFill>
+                                    <a:srgbClr val="92D050"/>
+                                  </a:solidFill>
+                                  <a:latin typeface="Cambria Math" panose="02040503050406030204" pitchFamily="18" charset="0"/>
+                                </a:rPr>
+                              </m:ctrlPr>
+                            </m:accPr>
+                            <m:e>
+                              <m:sSub>
+                                <m:sSubPr>
+                                  <m:ctrlPr>
+                                    <a:rPr lang="en-US" i="1">
+                                      <a:solidFill>
+                                        <a:srgbClr val="92D050"/>
+                                      </a:solidFill>
+                                      <a:latin typeface="Cambria Math" panose="02040503050406030204" pitchFamily="18" charset="0"/>
+                                    </a:rPr>
+                                  </m:ctrlPr>
+                                </m:sSubPr>
+                                <m:e>
+                                  <m:r>
+                                    <a:rPr lang="en-US" i="1">
+                                      <a:solidFill>
+                                        <a:srgbClr val="92D050"/>
+                                      </a:solidFill>
+                                      <a:latin typeface="Cambria Math" panose="02040503050406030204" pitchFamily="18" charset="0"/>
+                                    </a:rPr>
+                                    <m:t>𝑉</m:t>
+                                  </m:r>
+                                </m:e>
+                                <m:sub>
+                                  <m:r>
+                                    <a:rPr lang="en-US" i="1">
+                                      <a:solidFill>
+                                        <a:srgbClr val="92D050"/>
+                                      </a:solidFill>
+                                      <a:latin typeface="Cambria Math" panose="02040503050406030204" pitchFamily="18" charset="0"/>
+                                    </a:rPr>
+                                    <m:t>𝐶</m:t>
+                                  </m:r>
+                                </m:sub>
+                              </m:sSub>
+                            </m:e>
+                          </m:acc>
+                        </m:e>
+                        <m:sup>
+                          <m:sSub>
+                            <m:sSubPr>
+                              <m:ctrlPr>
+                                <a:rPr lang="en-US" i="1">
+                                  <a:solidFill>
+                                    <a:srgbClr val="92D050"/>
+                                  </a:solidFill>
+                                  <a:latin typeface="Cambria Math" panose="02040503050406030204" pitchFamily="18" charset="0"/>
+                                </a:rPr>
+                              </m:ctrlPr>
+                            </m:sSubPr>
+                            <m:e>
+                              <m:r>
+                                <a:rPr lang="en-US" i="1">
+                                  <a:solidFill>
+                                    <a:srgbClr val="92D050"/>
+                                  </a:solidFill>
+                                  <a:latin typeface="Cambria Math" panose="02040503050406030204" pitchFamily="18" charset="0"/>
+                                </a:rPr>
+                                <m:t>𝜔</m:t>
+                              </m:r>
+                            </m:e>
+                            <m:sub>
+                              <m:r>
+                                <a:rPr lang="en-US" i="1">
+                                  <a:solidFill>
+                                    <a:srgbClr val="92D050"/>
+                                  </a:solidFill>
+                                  <a:latin typeface="Cambria Math" panose="02040503050406030204" pitchFamily="18" charset="0"/>
+                                </a:rPr>
+                                <m:t>𝑐</m:t>
+                              </m:r>
+                            </m:sub>
+                          </m:sSub>
+                        </m:sup>
+                      </m:sSup>
+                    </m:oMath>
+                  </m:oMathPara>
+                </a14:m>
+                <a:endParaRPr lang="sv-SE" dirty="0"/>
+              </a:p>
+            </p:txBody>
+          </p:sp>
+        </mc:Choice>
+        <mc:Fallback>
+          <p:sp>
+            <p:nvSpPr>
+              <p:cNvPr id="78" name="Rectangle 77"/>
+              <p:cNvSpPr>
+                <a:spLocks noRot="1" noChangeAspect="1" noMove="1" noResize="1" noEditPoints="1" noAdjustHandles="1" noChangeArrowheads="1" noChangeShapeType="1" noTextEdit="1"/>
+              </p:cNvSpPr>
+              <p:nvPr/>
+            </p:nvSpPr>
+            <p:spPr>
+              <a:xfrm>
+                <a:off x="5256338" y="949565"/>
+                <a:ext cx="697242" cy="408638"/>
+              </a:xfrm>
+              <a:prstGeom prst="rect">
+                <a:avLst/>
+              </a:prstGeom>
+              <a:blipFill>
+                <a:blip r:embed="rId17"/>
+                <a:stretch>
+                  <a:fillRect r="-870"/>
+                </a:stretch>
+              </a:blipFill>
+            </p:spPr>
+            <p:txBody>
+              <a:bodyPr/>
+              <a:lstStyle/>
+              <a:p>
+                <a:r>
+                  <a:rPr lang="sv-SE">
+                    <a:noFill/>
+                  </a:rPr>
+                  <a:t> </a:t>
+                </a:r>
+              </a:p>
+            </p:txBody>
+          </p:sp>
+        </mc:Fallback>
+      </mc:AlternateContent>
+      <mc:AlternateContent xmlns:mc="http://schemas.openxmlformats.org/markup-compatibility/2006">
+        <mc:Choice xmlns:a14="http://schemas.microsoft.com/office/drawing/2010/main" Requires="a14">
+          <p:sp>
+            <p:nvSpPr>
+              <p:cNvPr id="79" name="Rectangle 78"/>
+              <p:cNvSpPr/>
+              <p:nvPr/>
+            </p:nvSpPr>
+            <p:spPr>
+              <a:xfrm>
+                <a:off x="8639415" y="705242"/>
+                <a:ext cx="705578" cy="408638"/>
+              </a:xfrm>
+              <a:prstGeom prst="rect">
+                <a:avLst/>
+              </a:prstGeom>
+            </p:spPr>
+            <p:txBody>
+              <a:bodyPr wrap="none">
+                <a:spAutoFit/>
+              </a:bodyPr>
+              <a:lstStyle/>
+              <a:p>
+                <a14:m>
+                  <m:oMathPara xmlns:m="http://schemas.openxmlformats.org/officeDocument/2006/math">
+                    <m:oMathParaPr>
+                      <m:jc m:val="centerGroup"/>
+                    </m:oMathParaPr>
+                    <m:oMath xmlns:m="http://schemas.openxmlformats.org/officeDocument/2006/math">
+                      <m:sSup>
+                        <m:sSupPr>
+                          <m:ctrlPr>
+                            <a:rPr lang="en-US" i="1">
+                              <a:solidFill>
+                                <a:srgbClr val="E622EB"/>
+                              </a:solidFill>
+                              <a:latin typeface="Cambria Math" panose="02040503050406030204" pitchFamily="18" charset="0"/>
+                            </a:rPr>
+                          </m:ctrlPr>
+                        </m:sSupPr>
+                        <m:e>
+                          <m:acc>
+                            <m:accPr>
+                              <m:chr m:val="̂"/>
+                              <m:ctrlPr>
+                                <a:rPr lang="en-US" i="1">
+                                  <a:solidFill>
+                                    <a:srgbClr val="E622EB"/>
+                                  </a:solidFill>
+                                  <a:latin typeface="Cambria Math" panose="02040503050406030204" pitchFamily="18" charset="0"/>
+                                </a:rPr>
+                              </m:ctrlPr>
+                            </m:accPr>
+                            <m:e>
+                              <m:sSub>
+                                <m:sSubPr>
+                                  <m:ctrlPr>
+                                    <a:rPr lang="en-US" i="1">
+                                      <a:solidFill>
+                                        <a:srgbClr val="E622EB"/>
+                                      </a:solidFill>
+                                      <a:latin typeface="Cambria Math" panose="02040503050406030204" pitchFamily="18" charset="0"/>
+                                    </a:rPr>
+                                  </m:ctrlPr>
+                                </m:sSubPr>
+                                <m:e>
+                                  <m:r>
+                                    <a:rPr lang="en-US" i="1">
+                                      <a:solidFill>
+                                        <a:srgbClr val="E622EB"/>
+                                      </a:solidFill>
+                                      <a:latin typeface="Cambria Math" panose="02040503050406030204" pitchFamily="18" charset="0"/>
+                                    </a:rPr>
+                                    <m:t>𝑉</m:t>
+                                  </m:r>
+                                </m:e>
+                                <m:sub>
+                                  <m:r>
+                                    <a:rPr lang="en-US" i="1">
+                                      <a:solidFill>
+                                        <a:srgbClr val="E622EB"/>
+                                      </a:solidFill>
+                                      <a:latin typeface="Cambria Math" panose="02040503050406030204" pitchFamily="18" charset="0"/>
+                                    </a:rPr>
+                                    <m:t>𝐵</m:t>
+                                  </m:r>
+                                </m:sub>
+                              </m:sSub>
+                            </m:e>
+                          </m:acc>
+                        </m:e>
+                        <m:sup>
+                          <m:sSub>
+                            <m:sSubPr>
+                              <m:ctrlPr>
+                                <a:rPr lang="en-US" i="1">
+                                  <a:solidFill>
+                                    <a:srgbClr val="E622EB"/>
+                                  </a:solidFill>
+                                  <a:latin typeface="Cambria Math" panose="02040503050406030204" pitchFamily="18" charset="0"/>
+                                </a:rPr>
+                              </m:ctrlPr>
+                            </m:sSubPr>
+                            <m:e>
+                              <m:r>
+                                <a:rPr lang="en-US" i="1">
+                                  <a:solidFill>
+                                    <a:srgbClr val="E622EB"/>
+                                  </a:solidFill>
+                                  <a:latin typeface="Cambria Math" panose="02040503050406030204" pitchFamily="18" charset="0"/>
+                                </a:rPr>
+                                <m:t>𝜔</m:t>
+                              </m:r>
+                            </m:e>
+                            <m:sub>
+                              <m:r>
+                                <a:rPr lang="en-US" i="1">
+                                  <a:solidFill>
+                                    <a:srgbClr val="E622EB"/>
+                                  </a:solidFill>
+                                  <a:latin typeface="Cambria Math" panose="02040503050406030204" pitchFamily="18" charset="0"/>
+                                </a:rPr>
+                                <m:t>𝑐</m:t>
+                              </m:r>
+                            </m:sub>
+                          </m:sSub>
+                        </m:sup>
+                      </m:sSup>
+                    </m:oMath>
+                  </m:oMathPara>
+                </a14:m>
+                <a:endParaRPr lang="sv-SE" dirty="0"/>
+              </a:p>
+            </p:txBody>
+          </p:sp>
+        </mc:Choice>
+        <mc:Fallback>
+          <p:sp>
+            <p:nvSpPr>
+              <p:cNvPr id="79" name="Rectangle 78"/>
+              <p:cNvSpPr>
+                <a:spLocks noRot="1" noChangeAspect="1" noMove="1" noResize="1" noEditPoints="1" noAdjustHandles="1" noChangeArrowheads="1" noChangeShapeType="1" noTextEdit="1"/>
+              </p:cNvSpPr>
+              <p:nvPr/>
+            </p:nvSpPr>
+            <p:spPr>
+              <a:xfrm>
+                <a:off x="8639415" y="705242"/>
+                <a:ext cx="705578" cy="408638"/>
+              </a:xfrm>
+              <a:prstGeom prst="rect">
+                <a:avLst/>
+              </a:prstGeom>
+              <a:blipFill>
+                <a:blip r:embed="rId18"/>
+                <a:stretch>
+                  <a:fillRect r="-2586"/>
+                </a:stretch>
+              </a:blipFill>
+            </p:spPr>
+            <p:txBody>
+              <a:bodyPr/>
+              <a:lstStyle/>
+              <a:p>
+                <a:r>
+                  <a:rPr lang="sv-SE">
+                    <a:noFill/>
+                  </a:rPr>
+                  <a:t> </a:t>
+                </a:r>
+              </a:p>
+            </p:txBody>
+          </p:sp>
+        </mc:Fallback>
+      </mc:AlternateContent>
+      <mc:AlternateContent xmlns:mc="http://schemas.openxmlformats.org/markup-compatibility/2006">
+        <mc:Choice xmlns:a14="http://schemas.microsoft.com/office/drawing/2010/main" Requires="a14">
+          <p:sp>
+            <p:nvSpPr>
+              <p:cNvPr id="80" name="Rectangle 79"/>
+              <p:cNvSpPr/>
+              <p:nvPr/>
+            </p:nvSpPr>
+            <p:spPr>
+              <a:xfrm>
+                <a:off x="7618584" y="1551102"/>
+                <a:ext cx="689676" cy="408638"/>
+              </a:xfrm>
+              <a:prstGeom prst="rect">
+                <a:avLst/>
+              </a:prstGeom>
+            </p:spPr>
+            <p:txBody>
+              <a:bodyPr wrap="none">
+                <a:spAutoFit/>
+              </a:bodyPr>
+              <a:lstStyle/>
+              <a:p>
+                <a14:m>
+                  <m:oMathPara xmlns:m="http://schemas.openxmlformats.org/officeDocument/2006/math">
+                    <m:oMathParaPr>
+                      <m:jc m:val="centerGroup"/>
+                    </m:oMathParaPr>
+                    <m:oMath xmlns:m="http://schemas.openxmlformats.org/officeDocument/2006/math">
+                      <m:sSup>
+                        <m:sSupPr>
+                          <m:ctrlPr>
+                            <a:rPr lang="en-US" i="1">
+                              <a:solidFill>
+                                <a:srgbClr val="002060"/>
+                              </a:solidFill>
+                              <a:latin typeface="Cambria Math" panose="02040503050406030204" pitchFamily="18" charset="0"/>
+                            </a:rPr>
+                          </m:ctrlPr>
+                        </m:sSupPr>
+                        <m:e>
+                          <m:acc>
+                            <m:accPr>
+                              <m:chr m:val="̂"/>
+                              <m:ctrlPr>
+                                <a:rPr lang="en-US" i="1">
+                                  <a:solidFill>
+                                    <a:srgbClr val="002060"/>
+                                  </a:solidFill>
+                                  <a:latin typeface="Cambria Math" panose="02040503050406030204" pitchFamily="18" charset="0"/>
+                                </a:rPr>
+                              </m:ctrlPr>
+                            </m:accPr>
+                            <m:e>
+                              <m:sSub>
+                                <m:sSubPr>
+                                  <m:ctrlPr>
+                                    <a:rPr lang="en-US" i="1">
+                                      <a:solidFill>
+                                        <a:srgbClr val="002060"/>
+                                      </a:solidFill>
+                                      <a:latin typeface="Cambria Math" panose="02040503050406030204" pitchFamily="18" charset="0"/>
+                                    </a:rPr>
+                                  </m:ctrlPr>
+                                </m:sSubPr>
+                                <m:e>
+                                  <m:r>
+                                    <a:rPr lang="en-US" i="1">
+                                      <a:solidFill>
+                                        <a:srgbClr val="002060"/>
+                                      </a:solidFill>
+                                      <a:latin typeface="Cambria Math" panose="02040503050406030204" pitchFamily="18" charset="0"/>
+                                    </a:rPr>
+                                    <m:t>𝑉</m:t>
+                                  </m:r>
+                                </m:e>
+                                <m:sub>
+                                  <m:r>
+                                    <a:rPr lang="en-US" i="1">
+                                      <a:solidFill>
+                                        <a:srgbClr val="002060"/>
+                                      </a:solidFill>
+                                      <a:latin typeface="Cambria Math" panose="02040503050406030204" pitchFamily="18" charset="0"/>
+                                    </a:rPr>
+                                    <m:t>𝐴</m:t>
+                                  </m:r>
+                                </m:sub>
+                              </m:sSub>
+                            </m:e>
+                          </m:acc>
+                        </m:e>
+                        <m:sup>
+                          <m:sSub>
+                            <m:sSubPr>
+                              <m:ctrlPr>
+                                <a:rPr lang="en-US" i="1">
+                                  <a:solidFill>
+                                    <a:srgbClr val="002060"/>
+                                  </a:solidFill>
+                                  <a:latin typeface="Cambria Math" panose="02040503050406030204" pitchFamily="18" charset="0"/>
+                                </a:rPr>
+                              </m:ctrlPr>
+                            </m:sSubPr>
+                            <m:e>
+                              <m:r>
+                                <a:rPr lang="en-US" i="1">
+                                  <a:solidFill>
+                                    <a:srgbClr val="002060"/>
+                                  </a:solidFill>
+                                  <a:latin typeface="Cambria Math" panose="02040503050406030204" pitchFamily="18" charset="0"/>
+                                </a:rPr>
+                                <m:t>𝜔</m:t>
+                              </m:r>
+                            </m:e>
+                            <m:sub>
+                              <m:r>
+                                <a:rPr lang="en-US" i="1">
+                                  <a:solidFill>
+                                    <a:srgbClr val="002060"/>
+                                  </a:solidFill>
+                                  <a:latin typeface="Cambria Math" panose="02040503050406030204" pitchFamily="18" charset="0"/>
+                                </a:rPr>
+                                <m:t>𝑐</m:t>
+                              </m:r>
+                            </m:sub>
+                          </m:sSub>
+                        </m:sup>
+                      </m:sSup>
+                    </m:oMath>
+                  </m:oMathPara>
+                </a14:m>
+                <a:endParaRPr lang="sv-SE" dirty="0"/>
+              </a:p>
+            </p:txBody>
+          </p:sp>
+        </mc:Choice>
+        <mc:Fallback>
+          <p:sp>
+            <p:nvSpPr>
+              <p:cNvPr id="80" name="Rectangle 79"/>
+              <p:cNvSpPr>
+                <a:spLocks noRot="1" noChangeAspect="1" noMove="1" noResize="1" noEditPoints="1" noAdjustHandles="1" noChangeArrowheads="1" noChangeShapeType="1" noTextEdit="1"/>
+              </p:cNvSpPr>
+              <p:nvPr/>
+            </p:nvSpPr>
+            <p:spPr>
+              <a:xfrm>
+                <a:off x="7618584" y="1551102"/>
+                <a:ext cx="689676" cy="408638"/>
+              </a:xfrm>
+              <a:prstGeom prst="rect">
+                <a:avLst/>
+              </a:prstGeom>
+              <a:blipFill>
+                <a:blip r:embed="rId19"/>
+                <a:stretch>
+                  <a:fillRect/>
+                </a:stretch>
+              </a:blipFill>
+            </p:spPr>
+            <p:txBody>
+              <a:bodyPr/>
+              <a:lstStyle/>
+              <a:p>
+                <a:r>
+                  <a:rPr lang="sv-SE">
+                    <a:noFill/>
+                  </a:rPr>
+                  <a:t> </a:t>
+                </a:r>
+              </a:p>
+            </p:txBody>
+          </p:sp>
+        </mc:Fallback>
+      </mc:AlternateContent>
+      <p:cxnSp>
+        <p:nvCxnSpPr>
+          <p:cNvPr id="86" name="Straight Arrow Connector 85"/>
+          <p:cNvCxnSpPr/>
+          <p:nvPr/>
+        </p:nvCxnSpPr>
+        <p:spPr>
+          <a:xfrm flipH="1">
+            <a:off x="10046869" y="1569927"/>
+            <a:ext cx="1187058" cy="184"/>
+          </a:xfrm>
+          <a:prstGeom prst="straightConnector1">
+            <a:avLst/>
+          </a:prstGeom>
+          <a:ln w="25400">
+            <a:solidFill>
+              <a:srgbClr val="E622EB"/>
+            </a:solidFill>
+            <a:tailEnd type="triangle"/>
+          </a:ln>
+        </p:spPr>
+        <p:style>
+          <a:lnRef idx="1">
+            <a:schemeClr val="accent1"/>
+          </a:lnRef>
+          <a:fillRef idx="0">
+            <a:schemeClr val="accent1"/>
+          </a:fillRef>
+          <a:effectRef idx="0">
+            <a:schemeClr val="accent1"/>
+          </a:effectRef>
+          <a:fontRef idx="minor">
+            <a:schemeClr val="tx1"/>
+          </a:fontRef>
+        </p:style>
+      </p:cxnSp>
+      <p:cxnSp>
+        <p:nvCxnSpPr>
+          <p:cNvPr id="88" name="Straight Arrow Connector 87"/>
+          <p:cNvCxnSpPr/>
+          <p:nvPr/>
+        </p:nvCxnSpPr>
+        <p:spPr>
+          <a:xfrm>
+            <a:off x="9318459" y="1677461"/>
+            <a:ext cx="1918547" cy="4964"/>
+          </a:xfrm>
+          <a:prstGeom prst="straightConnector1">
+            <a:avLst/>
+          </a:prstGeom>
+          <a:ln w="25400">
+            <a:solidFill>
+              <a:srgbClr val="002060"/>
+            </a:solidFill>
+            <a:tailEnd type="triangle"/>
+          </a:ln>
+        </p:spPr>
+        <p:style>
+          <a:lnRef idx="1">
+            <a:schemeClr val="accent1"/>
+          </a:lnRef>
+          <a:fillRef idx="0">
+            <a:schemeClr val="accent1"/>
+          </a:fillRef>
+          <a:effectRef idx="0">
+            <a:schemeClr val="accent1"/>
+          </a:effectRef>
+          <a:fontRef idx="minor">
+            <a:schemeClr val="tx1"/>
+          </a:fontRef>
+        </p:style>
+      </p:cxnSp>
+      <p:cxnSp>
+        <p:nvCxnSpPr>
+          <p:cNvPr id="91" name="Straight Arrow Connector 90"/>
+          <p:cNvCxnSpPr/>
+          <p:nvPr/>
+        </p:nvCxnSpPr>
+        <p:spPr>
+          <a:xfrm flipH="1" flipV="1">
+            <a:off x="9656540" y="1570717"/>
+            <a:ext cx="391990" cy="1"/>
+          </a:xfrm>
+          <a:prstGeom prst="straightConnector1">
+            <a:avLst/>
+          </a:prstGeom>
+          <a:ln w="25400">
+            <a:solidFill>
+              <a:srgbClr val="92D050"/>
+            </a:solidFill>
+            <a:tailEnd type="triangle"/>
+          </a:ln>
+        </p:spPr>
+        <p:style>
+          <a:lnRef idx="1">
+            <a:schemeClr val="accent1"/>
+          </a:lnRef>
+          <a:fillRef idx="0">
+            <a:schemeClr val="accent1"/>
+          </a:fillRef>
+          <a:effectRef idx="0">
+            <a:schemeClr val="accent1"/>
+          </a:effectRef>
+          <a:fontRef idx="minor">
+            <a:schemeClr val="tx1"/>
+          </a:fontRef>
+        </p:style>
+      </p:cxnSp>
+      <mc:AlternateContent xmlns:mc="http://schemas.openxmlformats.org/markup-compatibility/2006">
+        <mc:Choice xmlns:a14="http://schemas.microsoft.com/office/drawing/2010/main" Requires="a14">
+          <p:sp>
+            <p:nvSpPr>
+              <p:cNvPr id="95" name="Rectangle 94"/>
+              <p:cNvSpPr/>
+              <p:nvPr/>
+            </p:nvSpPr>
+            <p:spPr>
+              <a:xfrm>
+                <a:off x="9656540" y="645897"/>
+                <a:ext cx="1162947" cy="369332"/>
+              </a:xfrm>
+              <a:prstGeom prst="rect">
+                <a:avLst/>
+              </a:prstGeom>
+            </p:spPr>
+            <p:txBody>
+              <a:bodyPr wrap="none">
+                <a:spAutoFit/>
+              </a:bodyPr>
+              <a:lstStyle/>
+              <a:p>
+                <a14:m>
+                  <m:oMath xmlns:m="http://schemas.openxmlformats.org/officeDocument/2006/math">
+                    <m:sSub>
+                      <m:sSubPr>
+                        <m:ctrlPr>
+                          <a:rPr lang="en-US" i="1" smtClean="0">
+                            <a:solidFill>
+                              <a:srgbClr val="002060"/>
+                            </a:solidFill>
+                            <a:latin typeface="Cambria Math" panose="02040503050406030204" pitchFamily="18" charset="0"/>
+                          </a:rPr>
+                        </m:ctrlPr>
+                      </m:sSubPr>
+                      <m:e>
+                        <m:r>
+                          <a:rPr lang="en-US" i="1">
+                            <a:solidFill>
+                              <a:srgbClr val="002060"/>
+                            </a:solidFill>
+                            <a:latin typeface="Cambria Math" panose="02040503050406030204" pitchFamily="18" charset="0"/>
+                          </a:rPr>
+                          <m:t>𝜙</m:t>
+                        </m:r>
+                      </m:e>
+                      <m:sub>
+                        <m:r>
+                          <a:rPr lang="en-US" i="1">
+                            <a:solidFill>
+                              <a:srgbClr val="002060"/>
+                            </a:solidFill>
+                            <a:latin typeface="Cambria Math" panose="02040503050406030204" pitchFamily="18" charset="0"/>
+                          </a:rPr>
+                          <m:t>𝐶</m:t>
+                        </m:r>
+                        <m:r>
+                          <a:rPr lang="sv-SE" i="1">
+                            <a:solidFill>
+                              <a:srgbClr val="002060"/>
+                            </a:solidFill>
+                            <a:latin typeface="Cambria Math" panose="02040503050406030204" pitchFamily="18" charset="0"/>
+                          </a:rPr>
+                          <m:t>𝐴</m:t>
+                        </m:r>
+                      </m:sub>
+                    </m:sSub>
+                    <m:r>
+                      <a:rPr lang="sv-SE">
+                        <a:solidFill>
+                          <a:srgbClr val="002060"/>
+                        </a:solidFill>
+                        <a:latin typeface="Cambria Math" panose="02040503050406030204" pitchFamily="18" charset="0"/>
+                      </a:rPr>
+                      <m:t>=</m:t>
+                    </m:r>
+                    <m:sSup>
+                      <m:sSupPr>
+                        <m:ctrlPr>
+                          <a:rPr lang="sv-SE" b="0" i="0" smtClean="0">
+                            <a:solidFill>
+                              <a:srgbClr val="002060"/>
+                            </a:solidFill>
+                            <a:latin typeface="Cambria Math" panose="02040503050406030204" pitchFamily="18" charset="0"/>
+                          </a:rPr>
+                        </m:ctrlPr>
+                      </m:sSupPr>
+                      <m:e>
+                        <m:r>
+                          <a:rPr lang="sv-SE">
+                            <a:solidFill>
+                              <a:srgbClr val="002060"/>
+                            </a:solidFill>
+                            <a:latin typeface="Cambria Math" panose="02040503050406030204" pitchFamily="18" charset="0"/>
+                          </a:rPr>
+                          <m:t>0</m:t>
+                        </m:r>
+                      </m:e>
+                      <m:sup>
+                        <m:r>
+                          <a:rPr lang="sv-SE" b="0" i="1" smtClean="0">
+                            <a:solidFill>
+                              <a:srgbClr val="002060"/>
+                            </a:solidFill>
+                            <a:latin typeface="Cambria Math" panose="02040503050406030204" pitchFamily="18" charset="0"/>
+                          </a:rPr>
+                          <m:t>𝑜</m:t>
+                        </m:r>
+                      </m:sup>
+                    </m:sSup>
+                  </m:oMath>
+                </a14:m>
+                <a:r>
+                  <a:rPr lang="en-US" dirty="0">
+                    <a:solidFill>
+                      <a:srgbClr val="FF0000"/>
+                    </a:solidFill>
+                  </a:rPr>
+                  <a:t> </a:t>
+                </a:r>
+                <a:endParaRPr lang="en-US" dirty="0">
+                  <a:solidFill>
+                    <a:srgbClr val="FF0000"/>
+                  </a:solidFill>
+                </a:endParaRPr>
+              </a:p>
+            </p:txBody>
+          </p:sp>
+        </mc:Choice>
+        <mc:Fallback>
+          <p:sp>
+            <p:nvSpPr>
+              <p:cNvPr id="95" name="Rectangle 94"/>
+              <p:cNvSpPr>
+                <a:spLocks noRot="1" noChangeAspect="1" noMove="1" noResize="1" noEditPoints="1" noAdjustHandles="1" noChangeArrowheads="1" noChangeShapeType="1" noTextEdit="1"/>
+              </p:cNvSpPr>
+              <p:nvPr/>
+            </p:nvSpPr>
+            <p:spPr>
+              <a:xfrm>
+                <a:off x="9656540" y="645897"/>
+                <a:ext cx="1162947" cy="369332"/>
+              </a:xfrm>
+              <a:prstGeom prst="rect">
+                <a:avLst/>
+              </a:prstGeom>
+              <a:blipFill>
+                <a:blip r:embed="rId20"/>
+                <a:stretch>
+                  <a:fillRect l="-1047" b="-11475"/>
+                </a:stretch>
+              </a:blipFill>
+            </p:spPr>
+            <p:txBody>
+              <a:bodyPr/>
+              <a:lstStyle/>
+              <a:p>
+                <a:r>
+                  <a:rPr lang="sv-SE">
+                    <a:noFill/>
+                  </a:rPr>
+                  <a:t> </a:t>
+                </a:r>
+              </a:p>
+            </p:txBody>
+          </p:sp>
+        </mc:Fallback>
+      </mc:AlternateContent>
+      <mc:AlternateContent xmlns:mc="http://schemas.openxmlformats.org/markup-compatibility/2006">
+        <mc:Choice xmlns:a14="http://schemas.microsoft.com/office/drawing/2010/main" Requires="a14">
+          <p:sp>
+            <p:nvSpPr>
+              <p:cNvPr id="96" name="Rectangle 95"/>
+              <p:cNvSpPr/>
+              <p:nvPr/>
+            </p:nvSpPr>
+            <p:spPr>
+              <a:xfrm>
+                <a:off x="9633578" y="916265"/>
+                <a:ext cx="1423851" cy="369332"/>
+              </a:xfrm>
+              <a:prstGeom prst="rect">
+                <a:avLst/>
+              </a:prstGeom>
+            </p:spPr>
+            <p:txBody>
+              <a:bodyPr wrap="none">
+                <a:spAutoFit/>
+              </a:bodyPr>
+              <a:lstStyle/>
+              <a:p>
+                <a14:m>
+                  <m:oMathPara xmlns:m="http://schemas.openxmlformats.org/officeDocument/2006/math">
+                    <m:oMathParaPr>
+                      <m:jc m:val="centerGroup"/>
+                    </m:oMathParaPr>
+                    <m:oMath xmlns:m="http://schemas.openxmlformats.org/officeDocument/2006/math">
+                      <m:sSub>
+                        <m:sSubPr>
+                          <m:ctrlPr>
+                            <a:rPr lang="en-US" i="1" smtClean="0">
+                              <a:solidFill>
+                                <a:srgbClr val="E622EB"/>
+                              </a:solidFill>
+                              <a:latin typeface="Cambria Math" panose="02040503050406030204" pitchFamily="18" charset="0"/>
+                            </a:rPr>
+                          </m:ctrlPr>
+                        </m:sSubPr>
+                        <m:e>
+                          <m:r>
+                            <a:rPr lang="en-US" i="1">
+                              <a:solidFill>
+                                <a:srgbClr val="E622EB"/>
+                              </a:solidFill>
+                              <a:latin typeface="Cambria Math" panose="02040503050406030204" pitchFamily="18" charset="0"/>
+                            </a:rPr>
+                            <m:t>𝜙</m:t>
+                          </m:r>
+                        </m:e>
+                        <m:sub>
+                          <m:r>
+                            <a:rPr lang="en-US" i="1">
+                              <a:solidFill>
+                                <a:srgbClr val="E622EB"/>
+                              </a:solidFill>
+                              <a:latin typeface="Cambria Math" panose="02040503050406030204" pitchFamily="18" charset="0"/>
+                            </a:rPr>
+                            <m:t>𝐶𝐵</m:t>
+                          </m:r>
+                        </m:sub>
+                      </m:sSub>
+                      <m:r>
+                        <a:rPr lang="sv-SE" b="0" i="1" smtClean="0">
+                          <a:solidFill>
+                            <a:srgbClr val="E622EB"/>
+                          </a:solidFill>
+                          <a:latin typeface="Cambria Math" panose="02040503050406030204" pitchFamily="18" charset="0"/>
+                        </a:rPr>
+                        <m:t>=</m:t>
+                      </m:r>
+                      <m:sSup>
+                        <m:sSupPr>
+                          <m:ctrlPr>
+                            <a:rPr lang="sv-SE" b="0" i="1" smtClean="0">
+                              <a:solidFill>
+                                <a:srgbClr val="E622EB"/>
+                              </a:solidFill>
+                              <a:latin typeface="Cambria Math" panose="02040503050406030204" pitchFamily="18" charset="0"/>
+                            </a:rPr>
+                          </m:ctrlPr>
+                        </m:sSupPr>
+                        <m:e>
+                          <m:r>
+                            <a:rPr lang="sv-SE" b="0" i="1" smtClean="0">
+                              <a:solidFill>
+                                <a:srgbClr val="E622EB"/>
+                              </a:solidFill>
+                              <a:latin typeface="Cambria Math" panose="02040503050406030204" pitchFamily="18" charset="0"/>
+                            </a:rPr>
+                            <m:t>180</m:t>
+                          </m:r>
+                        </m:e>
+                        <m:sup>
+                          <m:r>
+                            <a:rPr lang="sv-SE" b="0" i="1" smtClean="0">
+                              <a:solidFill>
+                                <a:srgbClr val="E622EB"/>
+                              </a:solidFill>
+                              <a:latin typeface="Cambria Math" panose="02040503050406030204" pitchFamily="18" charset="0"/>
+                            </a:rPr>
+                            <m:t>𝑜</m:t>
+                          </m:r>
+                        </m:sup>
+                      </m:sSup>
+                    </m:oMath>
+                  </m:oMathPara>
+                </a14:m>
+                <a:endParaRPr lang="sv-SE" dirty="0"/>
+              </a:p>
+            </p:txBody>
+          </p:sp>
+        </mc:Choice>
+        <mc:Fallback>
+          <p:sp>
+            <p:nvSpPr>
+              <p:cNvPr id="96" name="Rectangle 95"/>
+              <p:cNvSpPr>
+                <a:spLocks noRot="1" noChangeAspect="1" noMove="1" noResize="1" noEditPoints="1" noAdjustHandles="1" noChangeArrowheads="1" noChangeShapeType="1" noTextEdit="1"/>
+              </p:cNvSpPr>
+              <p:nvPr/>
+            </p:nvSpPr>
+            <p:spPr>
+              <a:xfrm>
+                <a:off x="9633578" y="916265"/>
+                <a:ext cx="1423851" cy="369332"/>
+              </a:xfrm>
+              <a:prstGeom prst="rect">
+                <a:avLst/>
+              </a:prstGeom>
+              <a:blipFill>
+                <a:blip r:embed="rId21"/>
+                <a:stretch>
+                  <a:fillRect b="-11475"/>
+                </a:stretch>
+              </a:blipFill>
+            </p:spPr>
+            <p:txBody>
+              <a:bodyPr/>
+              <a:lstStyle/>
+              <a:p>
+                <a:r>
+                  <a:rPr lang="sv-SE">
+                    <a:noFill/>
+                  </a:rPr>
+                  <a:t> </a:t>
+                </a:r>
+              </a:p>
+            </p:txBody>
+          </p:sp>
+        </mc:Fallback>
+      </mc:AlternateContent>
+      <mc:AlternateContent xmlns:mc="http://schemas.openxmlformats.org/markup-compatibility/2006">
+        <mc:Choice xmlns:a14="http://schemas.microsoft.com/office/drawing/2010/main" Requires="a14">
+          <p:sp>
+            <p:nvSpPr>
+              <p:cNvPr id="97" name="Rectangle 96"/>
+              <p:cNvSpPr/>
+              <p:nvPr/>
+            </p:nvSpPr>
+            <p:spPr>
+              <a:xfrm>
+                <a:off x="9633578" y="1167435"/>
+                <a:ext cx="1415516" cy="369332"/>
+              </a:xfrm>
+              <a:prstGeom prst="rect">
+                <a:avLst/>
+              </a:prstGeom>
+            </p:spPr>
+            <p:txBody>
+              <a:bodyPr wrap="none">
+                <a:spAutoFit/>
+              </a:bodyPr>
+              <a:lstStyle/>
+              <a:p>
+                <a14:m>
+                  <m:oMathPara xmlns:m="http://schemas.openxmlformats.org/officeDocument/2006/math">
+                    <m:oMathParaPr>
+                      <m:jc m:val="centerGroup"/>
+                    </m:oMathParaPr>
+                    <m:oMath xmlns:m="http://schemas.openxmlformats.org/officeDocument/2006/math">
+                      <m:sSub>
+                        <m:sSubPr>
+                          <m:ctrlPr>
+                            <a:rPr lang="en-US" i="1" smtClean="0">
+                              <a:solidFill>
+                                <a:srgbClr val="92D050"/>
+                              </a:solidFill>
+                              <a:latin typeface="Cambria Math" panose="02040503050406030204" pitchFamily="18" charset="0"/>
+                            </a:rPr>
+                          </m:ctrlPr>
+                        </m:sSubPr>
+                        <m:e>
+                          <m:r>
+                            <a:rPr lang="en-US" i="1">
+                              <a:solidFill>
+                                <a:srgbClr val="92D050"/>
+                              </a:solidFill>
+                              <a:latin typeface="Cambria Math" panose="02040503050406030204" pitchFamily="18" charset="0"/>
+                            </a:rPr>
+                            <m:t>𝜙</m:t>
+                          </m:r>
+                        </m:e>
+                        <m:sub>
+                          <m:r>
+                            <a:rPr lang="en-US" i="1">
+                              <a:solidFill>
+                                <a:srgbClr val="92D050"/>
+                              </a:solidFill>
+                              <a:latin typeface="Cambria Math" panose="02040503050406030204" pitchFamily="18" charset="0"/>
+                            </a:rPr>
+                            <m:t>𝐶</m:t>
+                          </m:r>
+                          <m:r>
+                            <a:rPr lang="en-US" i="1">
+                              <a:solidFill>
+                                <a:srgbClr val="92D050"/>
+                              </a:solidFill>
+                              <a:latin typeface="Cambria Math" panose="02040503050406030204" pitchFamily="18" charset="0"/>
+                            </a:rPr>
+                            <m:t>𝐶</m:t>
+                          </m:r>
+                        </m:sub>
+                      </m:sSub>
+                      <m:r>
+                        <a:rPr lang="sv-SE" b="0" i="1" smtClean="0">
+                          <a:solidFill>
+                            <a:srgbClr val="92D050"/>
+                          </a:solidFill>
+                          <a:latin typeface="Cambria Math" panose="02040503050406030204" pitchFamily="18" charset="0"/>
+                        </a:rPr>
+                        <m:t>=</m:t>
+                      </m:r>
+                      <m:sSup>
+                        <m:sSupPr>
+                          <m:ctrlPr>
+                            <a:rPr lang="sv-SE" b="0" i="1" smtClean="0">
+                              <a:solidFill>
+                                <a:srgbClr val="92D050"/>
+                              </a:solidFill>
+                              <a:latin typeface="Cambria Math" panose="02040503050406030204" pitchFamily="18" charset="0"/>
+                            </a:rPr>
+                          </m:ctrlPr>
+                        </m:sSupPr>
+                        <m:e>
+                          <m:r>
+                            <a:rPr lang="sv-SE" b="0" i="1" smtClean="0">
+                              <a:solidFill>
+                                <a:srgbClr val="92D050"/>
+                              </a:solidFill>
+                              <a:latin typeface="Cambria Math" panose="02040503050406030204" pitchFamily="18" charset="0"/>
+                            </a:rPr>
+                            <m:t>180</m:t>
+                          </m:r>
+                        </m:e>
+                        <m:sup>
+                          <m:r>
+                            <a:rPr lang="sv-SE" b="0" i="1" smtClean="0">
+                              <a:solidFill>
+                                <a:srgbClr val="92D050"/>
+                              </a:solidFill>
+                              <a:latin typeface="Cambria Math" panose="02040503050406030204" pitchFamily="18" charset="0"/>
+                            </a:rPr>
+                            <m:t>𝑜</m:t>
+                          </m:r>
+                        </m:sup>
+                      </m:sSup>
+                    </m:oMath>
+                  </m:oMathPara>
+                </a14:m>
+                <a:endParaRPr lang="sv-SE" dirty="0"/>
+              </a:p>
+            </p:txBody>
+          </p:sp>
+        </mc:Choice>
+        <mc:Fallback>
+          <p:sp>
+            <p:nvSpPr>
+              <p:cNvPr id="97" name="Rectangle 96"/>
+              <p:cNvSpPr>
+                <a:spLocks noRot="1" noChangeAspect="1" noMove="1" noResize="1" noEditPoints="1" noAdjustHandles="1" noChangeArrowheads="1" noChangeShapeType="1" noTextEdit="1"/>
+              </p:cNvSpPr>
+              <p:nvPr/>
+            </p:nvSpPr>
+            <p:spPr>
+              <a:xfrm>
+                <a:off x="9633578" y="1167435"/>
+                <a:ext cx="1415516" cy="369332"/>
+              </a:xfrm>
+              <a:prstGeom prst="rect">
+                <a:avLst/>
+              </a:prstGeom>
+              <a:blipFill>
+                <a:blip r:embed="rId22"/>
+                <a:stretch>
+                  <a:fillRect b="-13333"/>
+                </a:stretch>
+              </a:blipFill>
+            </p:spPr>
+            <p:txBody>
+              <a:bodyPr/>
+              <a:lstStyle/>
+              <a:p>
+                <a:r>
+                  <a:rPr lang="sv-SE">
+                    <a:noFill/>
+                  </a:rPr>
+                  <a:t> </a:t>
+                </a:r>
+              </a:p>
+            </p:txBody>
+          </p:sp>
+        </mc:Fallback>
+      </mc:AlternateContent>
+      <p:sp>
+        <p:nvSpPr>
+          <p:cNvPr id="98" name="TextBox 97"/>
+          <p:cNvSpPr txBox="1"/>
+          <p:nvPr/>
+        </p:nvSpPr>
+        <p:spPr>
+          <a:xfrm>
+            <a:off x="9981646" y="1844331"/>
+            <a:ext cx="714541" cy="369332"/>
+          </a:xfrm>
+          <a:prstGeom prst="rect">
+            <a:avLst/>
+          </a:prstGeom>
+          <a:noFill/>
+        </p:spPr>
+        <p:txBody>
+          <a:bodyPr wrap="square" rtlCol="0">
+            <a:spAutoFit/>
+          </a:bodyPr>
+          <a:lstStyle/>
+          <a:p>
+            <a:r>
+              <a:rPr lang="en-US" dirty="0" smtClean="0"/>
+              <a:t>(b)</a:t>
+            </a:r>
+            <a:endParaRPr lang="sv-SE" dirty="0"/>
+          </a:p>
+        </p:txBody>
+      </p:sp>
+      <p:cxnSp>
+        <p:nvCxnSpPr>
+          <p:cNvPr id="99" name="Straight Arrow Connector 98"/>
+          <p:cNvCxnSpPr/>
+          <p:nvPr/>
+        </p:nvCxnSpPr>
+        <p:spPr>
+          <a:xfrm flipV="1">
+            <a:off x="6040601" y="3343738"/>
+            <a:ext cx="1703036" cy="1"/>
+          </a:xfrm>
+          <a:prstGeom prst="straightConnector1">
+            <a:avLst/>
+          </a:prstGeom>
+          <a:ln w="25400">
+            <a:solidFill>
+              <a:srgbClr val="E622EB"/>
+            </a:solidFill>
+            <a:tailEnd type="triangle"/>
+          </a:ln>
+        </p:spPr>
+        <p:style>
+          <a:lnRef idx="1">
+            <a:schemeClr val="accent1"/>
+          </a:lnRef>
+          <a:fillRef idx="0">
+            <a:schemeClr val="accent1"/>
+          </a:fillRef>
+          <a:effectRef idx="0">
+            <a:schemeClr val="accent1"/>
+          </a:effectRef>
+          <a:fontRef idx="minor">
+            <a:schemeClr val="tx1"/>
+          </a:fontRef>
+        </p:style>
+      </p:cxnSp>
+      <p:cxnSp>
+        <p:nvCxnSpPr>
+          <p:cNvPr id="100" name="Straight Arrow Connector 99"/>
+          <p:cNvCxnSpPr/>
+          <p:nvPr/>
+        </p:nvCxnSpPr>
+        <p:spPr>
+          <a:xfrm flipH="1">
+            <a:off x="6168219" y="3243449"/>
+            <a:ext cx="342005" cy="0"/>
+          </a:xfrm>
+          <a:prstGeom prst="straightConnector1">
+            <a:avLst/>
+          </a:prstGeom>
+          <a:ln w="25400">
+            <a:solidFill>
+              <a:srgbClr val="002060"/>
+            </a:solidFill>
+            <a:tailEnd type="triangle"/>
+          </a:ln>
+        </p:spPr>
+        <p:style>
+          <a:lnRef idx="1">
+            <a:schemeClr val="accent1"/>
+          </a:lnRef>
+          <a:fillRef idx="0">
+            <a:schemeClr val="accent1"/>
+          </a:fillRef>
+          <a:effectRef idx="0">
+            <a:schemeClr val="accent1"/>
+          </a:effectRef>
+          <a:fontRef idx="minor">
+            <a:schemeClr val="tx1"/>
+          </a:fontRef>
+        </p:style>
+      </p:cxnSp>
+      <p:cxnSp>
+        <p:nvCxnSpPr>
+          <p:cNvPr id="101" name="Straight Arrow Connector 100"/>
+          <p:cNvCxnSpPr/>
+          <p:nvPr/>
+        </p:nvCxnSpPr>
+        <p:spPr>
+          <a:xfrm flipH="1">
+            <a:off x="6510225" y="3243449"/>
+            <a:ext cx="1219867" cy="0"/>
+          </a:xfrm>
+          <a:prstGeom prst="straightConnector1">
+            <a:avLst/>
+          </a:prstGeom>
+          <a:ln w="25400">
+            <a:solidFill>
+              <a:srgbClr val="92D050"/>
+            </a:solidFill>
+            <a:tailEnd type="triangle"/>
+          </a:ln>
+        </p:spPr>
+        <p:style>
+          <a:lnRef idx="1">
+            <a:schemeClr val="accent1"/>
+          </a:lnRef>
+          <a:fillRef idx="0">
+            <a:schemeClr val="accent1"/>
+          </a:fillRef>
+          <a:effectRef idx="0">
+            <a:schemeClr val="accent1"/>
+          </a:effectRef>
+          <a:fontRef idx="minor">
+            <a:schemeClr val="tx1"/>
+          </a:fontRef>
+        </p:style>
+      </p:cxnSp>
+      <mc:AlternateContent xmlns:mc="http://schemas.openxmlformats.org/markup-compatibility/2006">
+        <mc:Choice xmlns:a14="http://schemas.microsoft.com/office/drawing/2010/main" Requires="a14">
+          <p:sp>
+            <p:nvSpPr>
+              <p:cNvPr id="102" name="Rectangle 101"/>
+              <p:cNvSpPr/>
+              <p:nvPr/>
+            </p:nvSpPr>
+            <p:spPr>
+              <a:xfrm>
+                <a:off x="6337538" y="2289766"/>
+                <a:ext cx="1419428" cy="369332"/>
+              </a:xfrm>
+              <a:prstGeom prst="rect">
+                <a:avLst/>
+              </a:prstGeom>
+            </p:spPr>
+            <p:txBody>
+              <a:bodyPr wrap="none">
+                <a:spAutoFit/>
+              </a:bodyPr>
+              <a:lstStyle/>
+              <a:p>
+                <a14:m>
+                  <m:oMath xmlns:m="http://schemas.openxmlformats.org/officeDocument/2006/math">
+                    <m:sSub>
+                      <m:sSubPr>
+                        <m:ctrlPr>
+                          <a:rPr lang="en-US" i="1" smtClean="0">
+                            <a:solidFill>
+                              <a:srgbClr val="002060"/>
+                            </a:solidFill>
+                            <a:latin typeface="Cambria Math" panose="02040503050406030204" pitchFamily="18" charset="0"/>
+                          </a:rPr>
+                        </m:ctrlPr>
+                      </m:sSubPr>
+                      <m:e>
+                        <m:r>
+                          <a:rPr lang="en-US" i="1">
+                            <a:solidFill>
+                              <a:srgbClr val="002060"/>
+                            </a:solidFill>
+                            <a:latin typeface="Cambria Math" panose="02040503050406030204" pitchFamily="18" charset="0"/>
+                          </a:rPr>
+                          <m:t>𝜙</m:t>
+                        </m:r>
+                      </m:e>
+                      <m:sub>
+                        <m:r>
+                          <a:rPr lang="en-US" i="1">
+                            <a:solidFill>
+                              <a:srgbClr val="002060"/>
+                            </a:solidFill>
+                            <a:latin typeface="Cambria Math" panose="02040503050406030204" pitchFamily="18" charset="0"/>
+                          </a:rPr>
+                          <m:t>𝐶</m:t>
+                        </m:r>
+                        <m:r>
+                          <a:rPr lang="sv-SE" i="1">
+                            <a:solidFill>
+                              <a:srgbClr val="002060"/>
+                            </a:solidFill>
+                            <a:latin typeface="Cambria Math" panose="02040503050406030204" pitchFamily="18" charset="0"/>
+                          </a:rPr>
+                          <m:t>𝐴</m:t>
+                        </m:r>
+                      </m:sub>
+                    </m:sSub>
+                    <m:r>
+                      <a:rPr lang="sv-SE">
+                        <a:solidFill>
+                          <a:srgbClr val="002060"/>
+                        </a:solidFill>
+                        <a:latin typeface="Cambria Math" panose="02040503050406030204" pitchFamily="18" charset="0"/>
+                      </a:rPr>
+                      <m:t>=</m:t>
+                    </m:r>
+                    <m:sSup>
+                      <m:sSupPr>
+                        <m:ctrlPr>
+                          <a:rPr lang="sv-SE" b="0" i="0" smtClean="0">
+                            <a:solidFill>
+                              <a:srgbClr val="002060"/>
+                            </a:solidFill>
+                            <a:latin typeface="Cambria Math" panose="02040503050406030204" pitchFamily="18" charset="0"/>
+                          </a:rPr>
+                        </m:ctrlPr>
+                      </m:sSupPr>
+                      <m:e>
+                        <m:r>
+                          <a:rPr lang="sv-SE" b="0" i="0" smtClean="0">
+                            <a:solidFill>
+                              <a:srgbClr val="002060"/>
+                            </a:solidFill>
+                            <a:latin typeface="Cambria Math" panose="02040503050406030204" pitchFamily="18" charset="0"/>
+                          </a:rPr>
+                          <m:t>18</m:t>
+                        </m:r>
+                        <m:r>
+                          <a:rPr lang="sv-SE">
+                            <a:solidFill>
+                              <a:srgbClr val="002060"/>
+                            </a:solidFill>
+                            <a:latin typeface="Cambria Math" panose="02040503050406030204" pitchFamily="18" charset="0"/>
+                          </a:rPr>
+                          <m:t>0</m:t>
+                        </m:r>
+                      </m:e>
+                      <m:sup>
+                        <m:r>
+                          <a:rPr lang="sv-SE" b="0" i="1" smtClean="0">
+                            <a:solidFill>
+                              <a:srgbClr val="002060"/>
+                            </a:solidFill>
+                            <a:latin typeface="Cambria Math" panose="02040503050406030204" pitchFamily="18" charset="0"/>
+                          </a:rPr>
+                          <m:t>𝑜</m:t>
+                        </m:r>
+                      </m:sup>
+                    </m:sSup>
+                  </m:oMath>
+                </a14:m>
+                <a:r>
+                  <a:rPr lang="en-US" dirty="0">
+                    <a:solidFill>
+                      <a:srgbClr val="FF0000"/>
+                    </a:solidFill>
+                  </a:rPr>
+                  <a:t> </a:t>
+                </a:r>
+                <a:endParaRPr lang="en-US" dirty="0">
+                  <a:solidFill>
+                    <a:srgbClr val="FF0000"/>
+                  </a:solidFill>
+                </a:endParaRPr>
+              </a:p>
+            </p:txBody>
+          </p:sp>
+        </mc:Choice>
+        <mc:Fallback>
+          <p:sp>
+            <p:nvSpPr>
+              <p:cNvPr id="102" name="Rectangle 101"/>
+              <p:cNvSpPr>
+                <a:spLocks noRot="1" noChangeAspect="1" noMove="1" noResize="1" noEditPoints="1" noAdjustHandles="1" noChangeArrowheads="1" noChangeShapeType="1" noTextEdit="1"/>
+              </p:cNvSpPr>
+              <p:nvPr/>
+            </p:nvSpPr>
+            <p:spPr>
+              <a:xfrm>
+                <a:off x="6337538" y="2289766"/>
+                <a:ext cx="1419428" cy="369332"/>
+              </a:xfrm>
+              <a:prstGeom prst="rect">
+                <a:avLst/>
+              </a:prstGeom>
+              <a:blipFill>
+                <a:blip r:embed="rId23"/>
+                <a:stretch>
+                  <a:fillRect l="-1293" b="-13333"/>
+                </a:stretch>
+              </a:blipFill>
+            </p:spPr>
+            <p:txBody>
+              <a:bodyPr/>
+              <a:lstStyle/>
+              <a:p>
+                <a:r>
+                  <a:rPr lang="sv-SE">
+                    <a:noFill/>
+                  </a:rPr>
+                  <a:t> </a:t>
+                </a:r>
+              </a:p>
+            </p:txBody>
+          </p:sp>
+        </mc:Fallback>
+      </mc:AlternateContent>
+      <mc:AlternateContent xmlns:mc="http://schemas.openxmlformats.org/markup-compatibility/2006">
+        <mc:Choice xmlns:a14="http://schemas.microsoft.com/office/drawing/2010/main" Requires="a14">
+          <p:sp>
+            <p:nvSpPr>
+              <p:cNvPr id="103" name="Rectangle 102"/>
+              <p:cNvSpPr/>
+              <p:nvPr/>
+            </p:nvSpPr>
+            <p:spPr>
+              <a:xfrm>
+                <a:off x="6314576" y="2560134"/>
+                <a:ext cx="1167371" cy="369332"/>
+              </a:xfrm>
+              <a:prstGeom prst="rect">
+                <a:avLst/>
+              </a:prstGeom>
+            </p:spPr>
+            <p:txBody>
+              <a:bodyPr wrap="none">
+                <a:spAutoFit/>
+              </a:bodyPr>
+              <a:lstStyle/>
+              <a:p>
+                <a14:m>
+                  <m:oMathPara xmlns:m="http://schemas.openxmlformats.org/officeDocument/2006/math">
+                    <m:oMathParaPr>
+                      <m:jc m:val="centerGroup"/>
+                    </m:oMathParaPr>
+                    <m:oMath xmlns:m="http://schemas.openxmlformats.org/officeDocument/2006/math">
+                      <m:sSub>
+                        <m:sSubPr>
+                          <m:ctrlPr>
+                            <a:rPr lang="en-US" i="1" smtClean="0">
+                              <a:solidFill>
+                                <a:srgbClr val="E622EB"/>
+                              </a:solidFill>
+                              <a:latin typeface="Cambria Math" panose="02040503050406030204" pitchFamily="18" charset="0"/>
+                            </a:rPr>
+                          </m:ctrlPr>
+                        </m:sSubPr>
+                        <m:e>
+                          <m:r>
+                            <a:rPr lang="en-US" i="1">
+                              <a:solidFill>
+                                <a:srgbClr val="E622EB"/>
+                              </a:solidFill>
+                              <a:latin typeface="Cambria Math" panose="02040503050406030204" pitchFamily="18" charset="0"/>
+                            </a:rPr>
+                            <m:t>𝜙</m:t>
+                          </m:r>
+                        </m:e>
+                        <m:sub>
+                          <m:r>
+                            <a:rPr lang="en-US" i="1">
+                              <a:solidFill>
+                                <a:srgbClr val="E622EB"/>
+                              </a:solidFill>
+                              <a:latin typeface="Cambria Math" panose="02040503050406030204" pitchFamily="18" charset="0"/>
+                            </a:rPr>
+                            <m:t>𝐶𝐵</m:t>
+                          </m:r>
+                        </m:sub>
+                      </m:sSub>
+                      <m:r>
+                        <a:rPr lang="sv-SE" b="0" i="1" smtClean="0">
+                          <a:solidFill>
+                            <a:srgbClr val="E622EB"/>
+                          </a:solidFill>
+                          <a:latin typeface="Cambria Math" panose="02040503050406030204" pitchFamily="18" charset="0"/>
+                        </a:rPr>
+                        <m:t>=</m:t>
+                      </m:r>
+                      <m:sSup>
+                        <m:sSupPr>
+                          <m:ctrlPr>
+                            <a:rPr lang="sv-SE" b="0" i="1" smtClean="0">
+                              <a:solidFill>
+                                <a:srgbClr val="E622EB"/>
+                              </a:solidFill>
+                              <a:latin typeface="Cambria Math" panose="02040503050406030204" pitchFamily="18" charset="0"/>
+                            </a:rPr>
+                          </m:ctrlPr>
+                        </m:sSupPr>
+                        <m:e>
+                          <m:r>
+                            <a:rPr lang="sv-SE" b="0" i="1" smtClean="0">
+                              <a:solidFill>
+                                <a:srgbClr val="E622EB"/>
+                              </a:solidFill>
+                              <a:latin typeface="Cambria Math" panose="02040503050406030204" pitchFamily="18" charset="0"/>
+                            </a:rPr>
+                            <m:t>0</m:t>
+                          </m:r>
+                        </m:e>
+                        <m:sup>
+                          <m:r>
+                            <a:rPr lang="sv-SE" b="0" i="1" smtClean="0">
+                              <a:solidFill>
+                                <a:srgbClr val="E622EB"/>
+                              </a:solidFill>
+                              <a:latin typeface="Cambria Math" panose="02040503050406030204" pitchFamily="18" charset="0"/>
+                            </a:rPr>
+                            <m:t>𝑜</m:t>
+                          </m:r>
+                        </m:sup>
+                      </m:sSup>
+                    </m:oMath>
+                  </m:oMathPara>
+                </a14:m>
+                <a:endParaRPr lang="sv-SE" dirty="0"/>
+              </a:p>
+            </p:txBody>
+          </p:sp>
+        </mc:Choice>
+        <mc:Fallback>
+          <p:sp>
+            <p:nvSpPr>
+              <p:cNvPr id="103" name="Rectangle 102"/>
+              <p:cNvSpPr>
+                <a:spLocks noRot="1" noChangeAspect="1" noMove="1" noResize="1" noEditPoints="1" noAdjustHandles="1" noChangeArrowheads="1" noChangeShapeType="1" noTextEdit="1"/>
+              </p:cNvSpPr>
+              <p:nvPr/>
+            </p:nvSpPr>
+            <p:spPr>
+              <a:xfrm>
+                <a:off x="6314576" y="2560134"/>
+                <a:ext cx="1167371" cy="369332"/>
+              </a:xfrm>
+              <a:prstGeom prst="rect">
+                <a:avLst/>
+              </a:prstGeom>
+              <a:blipFill>
+                <a:blip r:embed="rId24"/>
+                <a:stretch>
+                  <a:fillRect b="-11475"/>
+                </a:stretch>
+              </a:blipFill>
+            </p:spPr>
+            <p:txBody>
+              <a:bodyPr/>
+              <a:lstStyle/>
+              <a:p>
+                <a:r>
+                  <a:rPr lang="sv-SE">
+                    <a:noFill/>
+                  </a:rPr>
+                  <a:t> </a:t>
+                </a:r>
+              </a:p>
+            </p:txBody>
+          </p:sp>
+        </mc:Fallback>
+      </mc:AlternateContent>
+      <mc:AlternateContent xmlns:mc="http://schemas.openxmlformats.org/markup-compatibility/2006">
+        <mc:Choice xmlns:a14="http://schemas.microsoft.com/office/drawing/2010/main" Requires="a14">
+          <p:sp>
+            <p:nvSpPr>
+              <p:cNvPr id="104" name="Rectangle 103"/>
+              <p:cNvSpPr/>
+              <p:nvPr/>
+            </p:nvSpPr>
+            <p:spPr>
+              <a:xfrm>
+                <a:off x="6314576" y="2811304"/>
+                <a:ext cx="1415516" cy="369332"/>
+              </a:xfrm>
+              <a:prstGeom prst="rect">
+                <a:avLst/>
+              </a:prstGeom>
+            </p:spPr>
+            <p:txBody>
+              <a:bodyPr wrap="none">
+                <a:spAutoFit/>
+              </a:bodyPr>
+              <a:lstStyle/>
+              <a:p>
+                <a14:m>
+                  <m:oMathPara xmlns:m="http://schemas.openxmlformats.org/officeDocument/2006/math">
+                    <m:oMathParaPr>
+                      <m:jc m:val="centerGroup"/>
+                    </m:oMathParaPr>
+                    <m:oMath xmlns:m="http://schemas.openxmlformats.org/officeDocument/2006/math">
+                      <m:sSub>
+                        <m:sSubPr>
+                          <m:ctrlPr>
+                            <a:rPr lang="en-US" i="1" smtClean="0">
+                              <a:solidFill>
+                                <a:srgbClr val="92D050"/>
+                              </a:solidFill>
+                              <a:latin typeface="Cambria Math" panose="02040503050406030204" pitchFamily="18" charset="0"/>
+                            </a:rPr>
+                          </m:ctrlPr>
+                        </m:sSubPr>
+                        <m:e>
+                          <m:r>
+                            <a:rPr lang="en-US" i="1">
+                              <a:solidFill>
+                                <a:srgbClr val="92D050"/>
+                              </a:solidFill>
+                              <a:latin typeface="Cambria Math" panose="02040503050406030204" pitchFamily="18" charset="0"/>
+                            </a:rPr>
+                            <m:t>𝜙</m:t>
+                          </m:r>
+                        </m:e>
+                        <m:sub>
+                          <m:r>
+                            <a:rPr lang="en-US" i="1">
+                              <a:solidFill>
+                                <a:srgbClr val="92D050"/>
+                              </a:solidFill>
+                              <a:latin typeface="Cambria Math" panose="02040503050406030204" pitchFamily="18" charset="0"/>
+                            </a:rPr>
+                            <m:t>𝐶</m:t>
+                          </m:r>
+                          <m:r>
+                            <a:rPr lang="en-US" i="1">
+                              <a:solidFill>
+                                <a:srgbClr val="92D050"/>
+                              </a:solidFill>
+                              <a:latin typeface="Cambria Math" panose="02040503050406030204" pitchFamily="18" charset="0"/>
+                            </a:rPr>
+                            <m:t>𝐶</m:t>
+                          </m:r>
+                        </m:sub>
+                      </m:sSub>
+                      <m:r>
+                        <a:rPr lang="sv-SE" b="0" i="1" smtClean="0">
+                          <a:solidFill>
+                            <a:srgbClr val="92D050"/>
+                          </a:solidFill>
+                          <a:latin typeface="Cambria Math" panose="02040503050406030204" pitchFamily="18" charset="0"/>
+                        </a:rPr>
+                        <m:t>=</m:t>
+                      </m:r>
+                      <m:sSup>
+                        <m:sSupPr>
+                          <m:ctrlPr>
+                            <a:rPr lang="sv-SE" b="0" i="1" smtClean="0">
+                              <a:solidFill>
+                                <a:srgbClr val="92D050"/>
+                              </a:solidFill>
+                              <a:latin typeface="Cambria Math" panose="02040503050406030204" pitchFamily="18" charset="0"/>
+                            </a:rPr>
+                          </m:ctrlPr>
+                        </m:sSupPr>
+                        <m:e>
+                          <m:r>
+                            <a:rPr lang="sv-SE" b="0" i="1" smtClean="0">
+                              <a:solidFill>
+                                <a:srgbClr val="92D050"/>
+                              </a:solidFill>
+                              <a:latin typeface="Cambria Math" panose="02040503050406030204" pitchFamily="18" charset="0"/>
+                            </a:rPr>
+                            <m:t>180</m:t>
+                          </m:r>
+                        </m:e>
+                        <m:sup>
+                          <m:r>
+                            <a:rPr lang="sv-SE" b="0" i="1" smtClean="0">
+                              <a:solidFill>
+                                <a:srgbClr val="92D050"/>
+                              </a:solidFill>
+                              <a:latin typeface="Cambria Math" panose="02040503050406030204" pitchFamily="18" charset="0"/>
+                            </a:rPr>
+                            <m:t>𝑜</m:t>
+                          </m:r>
+                        </m:sup>
+                      </m:sSup>
+                    </m:oMath>
+                  </m:oMathPara>
+                </a14:m>
+                <a:endParaRPr lang="sv-SE" dirty="0"/>
+              </a:p>
+            </p:txBody>
+          </p:sp>
+        </mc:Choice>
+        <mc:Fallback>
+          <p:sp>
+            <p:nvSpPr>
+              <p:cNvPr id="104" name="Rectangle 103"/>
+              <p:cNvSpPr>
+                <a:spLocks noRot="1" noChangeAspect="1" noMove="1" noResize="1" noEditPoints="1" noAdjustHandles="1" noChangeArrowheads="1" noChangeShapeType="1" noTextEdit="1"/>
+              </p:cNvSpPr>
+              <p:nvPr/>
+            </p:nvSpPr>
+            <p:spPr>
+              <a:xfrm>
+                <a:off x="6314576" y="2811304"/>
+                <a:ext cx="1415516" cy="369332"/>
+              </a:xfrm>
+              <a:prstGeom prst="rect">
+                <a:avLst/>
+              </a:prstGeom>
+              <a:blipFill>
+                <a:blip r:embed="rId25"/>
+                <a:stretch>
+                  <a:fillRect b="-11475"/>
+                </a:stretch>
+              </a:blipFill>
+            </p:spPr>
+            <p:txBody>
+              <a:bodyPr/>
+              <a:lstStyle/>
+              <a:p>
+                <a:r>
+                  <a:rPr lang="sv-SE">
+                    <a:noFill/>
+                  </a:rPr>
+                  <a:t> </a:t>
+                </a:r>
+              </a:p>
+            </p:txBody>
+          </p:sp>
+        </mc:Fallback>
+      </mc:AlternateContent>
+      <p:sp>
+        <p:nvSpPr>
+          <p:cNvPr id="105" name="TextBox 104"/>
+          <p:cNvSpPr txBox="1"/>
+          <p:nvPr/>
+        </p:nvSpPr>
+        <p:spPr>
+          <a:xfrm>
+            <a:off x="6746421" y="3506841"/>
+            <a:ext cx="714541" cy="369332"/>
+          </a:xfrm>
+          <a:prstGeom prst="rect">
+            <a:avLst/>
+          </a:prstGeom>
+          <a:noFill/>
+        </p:spPr>
+        <p:txBody>
+          <a:bodyPr wrap="square" rtlCol="0">
+            <a:spAutoFit/>
+          </a:bodyPr>
+          <a:lstStyle/>
+          <a:p>
+            <a:r>
+              <a:rPr lang="en-US" dirty="0" smtClean="0"/>
+              <a:t>(c)</a:t>
+            </a:r>
+            <a:endParaRPr lang="sv-SE" dirty="0"/>
+          </a:p>
+        </p:txBody>
+      </p:sp>
+      <p:cxnSp>
+        <p:nvCxnSpPr>
+          <p:cNvPr id="122" name="Straight Arrow Connector 121"/>
+          <p:cNvCxnSpPr/>
+          <p:nvPr/>
+        </p:nvCxnSpPr>
+        <p:spPr>
+          <a:xfrm flipH="1">
+            <a:off x="9831424" y="3243449"/>
+            <a:ext cx="1234440" cy="2928"/>
+          </a:xfrm>
+          <a:prstGeom prst="straightConnector1">
+            <a:avLst/>
+          </a:prstGeom>
+          <a:ln w="25400">
+            <a:solidFill>
+              <a:srgbClr val="E622EB"/>
+            </a:solidFill>
+            <a:tailEnd type="triangle"/>
+          </a:ln>
+        </p:spPr>
+        <p:style>
+          <a:lnRef idx="1">
+            <a:schemeClr val="accent1"/>
+          </a:lnRef>
+          <a:fillRef idx="0">
+            <a:schemeClr val="accent1"/>
+          </a:fillRef>
+          <a:effectRef idx="0">
+            <a:schemeClr val="accent1"/>
+          </a:effectRef>
+          <a:fontRef idx="minor">
+            <a:schemeClr val="tx1"/>
+          </a:fontRef>
+        </p:style>
+      </p:cxnSp>
+      <p:cxnSp>
+        <p:nvCxnSpPr>
+          <p:cNvPr id="123" name="Straight Arrow Connector 122"/>
+          <p:cNvCxnSpPr/>
+          <p:nvPr/>
+        </p:nvCxnSpPr>
+        <p:spPr>
+          <a:xfrm flipH="1">
+            <a:off x="9495656" y="3243449"/>
+            <a:ext cx="342005" cy="0"/>
+          </a:xfrm>
+          <a:prstGeom prst="straightConnector1">
+            <a:avLst/>
+          </a:prstGeom>
+          <a:ln w="25400">
+            <a:solidFill>
+              <a:srgbClr val="002060"/>
+            </a:solidFill>
+            <a:tailEnd type="triangle"/>
+          </a:ln>
+        </p:spPr>
+        <p:style>
+          <a:lnRef idx="1">
+            <a:schemeClr val="accent1"/>
+          </a:lnRef>
+          <a:fillRef idx="0">
+            <a:schemeClr val="accent1"/>
+          </a:fillRef>
+          <a:effectRef idx="0">
+            <a:schemeClr val="accent1"/>
+          </a:effectRef>
+          <a:fontRef idx="minor">
+            <a:schemeClr val="tx1"/>
+          </a:fontRef>
+        </p:style>
+      </p:cxnSp>
+      <p:cxnSp>
+        <p:nvCxnSpPr>
+          <p:cNvPr id="124" name="Straight Arrow Connector 123"/>
+          <p:cNvCxnSpPr/>
+          <p:nvPr/>
+        </p:nvCxnSpPr>
+        <p:spPr>
+          <a:xfrm>
+            <a:off x="9365454" y="3338364"/>
+            <a:ext cx="1700410" cy="10747"/>
+          </a:xfrm>
+          <a:prstGeom prst="straightConnector1">
+            <a:avLst/>
+          </a:prstGeom>
+          <a:ln w="25400">
+            <a:solidFill>
+              <a:srgbClr val="92D050"/>
+            </a:solidFill>
+            <a:tailEnd type="triangle"/>
+          </a:ln>
+        </p:spPr>
+        <p:style>
+          <a:lnRef idx="1">
+            <a:schemeClr val="accent1"/>
+          </a:lnRef>
+          <a:fillRef idx="0">
+            <a:schemeClr val="accent1"/>
+          </a:fillRef>
+          <a:effectRef idx="0">
+            <a:schemeClr val="accent1"/>
+          </a:effectRef>
+          <a:fontRef idx="minor">
+            <a:schemeClr val="tx1"/>
+          </a:fontRef>
+        </p:style>
+      </p:cxnSp>
+      <mc:AlternateContent xmlns:mc="http://schemas.openxmlformats.org/markup-compatibility/2006">
+        <mc:Choice xmlns:a14="http://schemas.microsoft.com/office/drawing/2010/main" Requires="a14">
+          <p:sp>
+            <p:nvSpPr>
+              <p:cNvPr id="125" name="Rectangle 124"/>
+              <p:cNvSpPr/>
+              <p:nvPr/>
+            </p:nvSpPr>
+            <p:spPr>
+              <a:xfrm>
+                <a:off x="9664975" y="2289766"/>
+                <a:ext cx="1419428" cy="369332"/>
+              </a:xfrm>
+              <a:prstGeom prst="rect">
+                <a:avLst/>
+              </a:prstGeom>
+            </p:spPr>
+            <p:txBody>
+              <a:bodyPr wrap="none">
+                <a:spAutoFit/>
+              </a:bodyPr>
+              <a:lstStyle/>
+              <a:p>
+                <a14:m>
+                  <m:oMath xmlns:m="http://schemas.openxmlformats.org/officeDocument/2006/math">
+                    <m:sSub>
+                      <m:sSubPr>
+                        <m:ctrlPr>
+                          <a:rPr lang="en-US" i="1" smtClean="0">
+                            <a:solidFill>
+                              <a:srgbClr val="002060"/>
+                            </a:solidFill>
+                            <a:latin typeface="Cambria Math" panose="02040503050406030204" pitchFamily="18" charset="0"/>
+                          </a:rPr>
+                        </m:ctrlPr>
+                      </m:sSubPr>
+                      <m:e>
+                        <m:r>
+                          <a:rPr lang="en-US" i="1">
+                            <a:solidFill>
+                              <a:srgbClr val="002060"/>
+                            </a:solidFill>
+                            <a:latin typeface="Cambria Math" panose="02040503050406030204" pitchFamily="18" charset="0"/>
+                          </a:rPr>
+                          <m:t>𝜙</m:t>
+                        </m:r>
+                      </m:e>
+                      <m:sub>
+                        <m:r>
+                          <a:rPr lang="en-US" i="1">
+                            <a:solidFill>
+                              <a:srgbClr val="002060"/>
+                            </a:solidFill>
+                            <a:latin typeface="Cambria Math" panose="02040503050406030204" pitchFamily="18" charset="0"/>
+                          </a:rPr>
+                          <m:t>𝐶</m:t>
+                        </m:r>
+                        <m:r>
+                          <a:rPr lang="sv-SE" i="1">
+                            <a:solidFill>
+                              <a:srgbClr val="002060"/>
+                            </a:solidFill>
+                            <a:latin typeface="Cambria Math" panose="02040503050406030204" pitchFamily="18" charset="0"/>
+                          </a:rPr>
+                          <m:t>𝐴</m:t>
+                        </m:r>
+                      </m:sub>
+                    </m:sSub>
+                    <m:r>
+                      <a:rPr lang="sv-SE">
+                        <a:solidFill>
+                          <a:srgbClr val="002060"/>
+                        </a:solidFill>
+                        <a:latin typeface="Cambria Math" panose="02040503050406030204" pitchFamily="18" charset="0"/>
+                      </a:rPr>
+                      <m:t>=</m:t>
+                    </m:r>
+                    <m:sSup>
+                      <m:sSupPr>
+                        <m:ctrlPr>
+                          <a:rPr lang="sv-SE" b="0" i="0" smtClean="0">
+                            <a:solidFill>
+                              <a:srgbClr val="002060"/>
+                            </a:solidFill>
+                            <a:latin typeface="Cambria Math" panose="02040503050406030204" pitchFamily="18" charset="0"/>
+                          </a:rPr>
+                        </m:ctrlPr>
+                      </m:sSupPr>
+                      <m:e>
+                        <m:r>
+                          <a:rPr lang="sv-SE" b="0" i="0" smtClean="0">
+                            <a:solidFill>
+                              <a:srgbClr val="002060"/>
+                            </a:solidFill>
+                            <a:latin typeface="Cambria Math" panose="02040503050406030204" pitchFamily="18" charset="0"/>
+                          </a:rPr>
+                          <m:t>18</m:t>
+                        </m:r>
+                        <m:r>
+                          <a:rPr lang="sv-SE">
+                            <a:solidFill>
+                              <a:srgbClr val="002060"/>
+                            </a:solidFill>
+                            <a:latin typeface="Cambria Math" panose="02040503050406030204" pitchFamily="18" charset="0"/>
+                          </a:rPr>
+                          <m:t>0</m:t>
+                        </m:r>
+                      </m:e>
+                      <m:sup>
+                        <m:r>
+                          <a:rPr lang="sv-SE" b="0" i="1" smtClean="0">
+                            <a:solidFill>
+                              <a:srgbClr val="002060"/>
+                            </a:solidFill>
+                            <a:latin typeface="Cambria Math" panose="02040503050406030204" pitchFamily="18" charset="0"/>
+                          </a:rPr>
+                          <m:t>𝑜</m:t>
+                        </m:r>
+                      </m:sup>
+                    </m:sSup>
+                  </m:oMath>
+                </a14:m>
+                <a:r>
+                  <a:rPr lang="en-US" dirty="0">
+                    <a:solidFill>
+                      <a:srgbClr val="FF0000"/>
+                    </a:solidFill>
+                  </a:rPr>
+                  <a:t> </a:t>
+                </a:r>
+                <a:endParaRPr lang="en-US" dirty="0">
+                  <a:solidFill>
+                    <a:srgbClr val="FF0000"/>
+                  </a:solidFill>
+                </a:endParaRPr>
+              </a:p>
+            </p:txBody>
+          </p:sp>
+        </mc:Choice>
+        <mc:Fallback>
+          <p:sp>
+            <p:nvSpPr>
+              <p:cNvPr id="125" name="Rectangle 124"/>
+              <p:cNvSpPr>
+                <a:spLocks noRot="1" noChangeAspect="1" noMove="1" noResize="1" noEditPoints="1" noAdjustHandles="1" noChangeArrowheads="1" noChangeShapeType="1" noTextEdit="1"/>
+              </p:cNvSpPr>
+              <p:nvPr/>
+            </p:nvSpPr>
+            <p:spPr>
+              <a:xfrm>
+                <a:off x="9664975" y="2289766"/>
+                <a:ext cx="1419428" cy="369332"/>
+              </a:xfrm>
+              <a:prstGeom prst="rect">
+                <a:avLst/>
+              </a:prstGeom>
+              <a:blipFill>
+                <a:blip r:embed="rId26"/>
+                <a:stretch>
+                  <a:fillRect l="-858" b="-13333"/>
+                </a:stretch>
+              </a:blipFill>
+            </p:spPr>
+            <p:txBody>
+              <a:bodyPr/>
+              <a:lstStyle/>
+              <a:p>
+                <a:r>
+                  <a:rPr lang="sv-SE">
+                    <a:noFill/>
+                  </a:rPr>
+                  <a:t> </a:t>
+                </a:r>
+              </a:p>
+            </p:txBody>
+          </p:sp>
+        </mc:Fallback>
+      </mc:AlternateContent>
+      <mc:AlternateContent xmlns:mc="http://schemas.openxmlformats.org/markup-compatibility/2006">
+        <mc:Choice xmlns:a14="http://schemas.microsoft.com/office/drawing/2010/main" Requires="a14">
+          <p:sp>
+            <p:nvSpPr>
+              <p:cNvPr id="126" name="Rectangle 125"/>
+              <p:cNvSpPr/>
+              <p:nvPr/>
+            </p:nvSpPr>
+            <p:spPr>
+              <a:xfrm>
+                <a:off x="9642013" y="2560134"/>
+                <a:ext cx="1423851" cy="369332"/>
+              </a:xfrm>
+              <a:prstGeom prst="rect">
+                <a:avLst/>
+              </a:prstGeom>
+            </p:spPr>
+            <p:txBody>
+              <a:bodyPr wrap="none">
+                <a:spAutoFit/>
+              </a:bodyPr>
+              <a:lstStyle/>
+              <a:p>
+                <a14:m>
+                  <m:oMathPara xmlns:m="http://schemas.openxmlformats.org/officeDocument/2006/math">
+                    <m:oMathParaPr>
+                      <m:jc m:val="centerGroup"/>
+                    </m:oMathParaPr>
+                    <m:oMath xmlns:m="http://schemas.openxmlformats.org/officeDocument/2006/math">
+                      <m:sSub>
+                        <m:sSubPr>
+                          <m:ctrlPr>
+                            <a:rPr lang="en-US" i="1" smtClean="0">
+                              <a:solidFill>
+                                <a:srgbClr val="E622EB"/>
+                              </a:solidFill>
+                              <a:latin typeface="Cambria Math" panose="02040503050406030204" pitchFamily="18" charset="0"/>
+                            </a:rPr>
+                          </m:ctrlPr>
+                        </m:sSubPr>
+                        <m:e>
+                          <m:r>
+                            <a:rPr lang="en-US" i="1">
+                              <a:solidFill>
+                                <a:srgbClr val="E622EB"/>
+                              </a:solidFill>
+                              <a:latin typeface="Cambria Math" panose="02040503050406030204" pitchFamily="18" charset="0"/>
+                            </a:rPr>
+                            <m:t>𝜙</m:t>
+                          </m:r>
+                        </m:e>
+                        <m:sub>
+                          <m:r>
+                            <a:rPr lang="en-US" i="1">
+                              <a:solidFill>
+                                <a:srgbClr val="E622EB"/>
+                              </a:solidFill>
+                              <a:latin typeface="Cambria Math" panose="02040503050406030204" pitchFamily="18" charset="0"/>
+                            </a:rPr>
+                            <m:t>𝐶𝐵</m:t>
+                          </m:r>
+                        </m:sub>
+                      </m:sSub>
+                      <m:r>
+                        <a:rPr lang="sv-SE" b="0" i="1" smtClean="0">
+                          <a:solidFill>
+                            <a:srgbClr val="E622EB"/>
+                          </a:solidFill>
+                          <a:latin typeface="Cambria Math" panose="02040503050406030204" pitchFamily="18" charset="0"/>
+                        </a:rPr>
+                        <m:t>=</m:t>
+                      </m:r>
+                      <m:sSup>
+                        <m:sSupPr>
+                          <m:ctrlPr>
+                            <a:rPr lang="sv-SE" b="0" i="1" smtClean="0">
+                              <a:solidFill>
+                                <a:srgbClr val="E622EB"/>
+                              </a:solidFill>
+                              <a:latin typeface="Cambria Math" panose="02040503050406030204" pitchFamily="18" charset="0"/>
+                            </a:rPr>
+                          </m:ctrlPr>
+                        </m:sSupPr>
+                        <m:e>
+                          <m:r>
+                            <a:rPr lang="sv-SE" b="0" i="1" smtClean="0">
+                              <a:solidFill>
+                                <a:srgbClr val="E622EB"/>
+                              </a:solidFill>
+                              <a:latin typeface="Cambria Math" panose="02040503050406030204" pitchFamily="18" charset="0"/>
+                            </a:rPr>
+                            <m:t>18</m:t>
+                          </m:r>
+                          <m:r>
+                            <a:rPr lang="sv-SE" b="0" i="1" smtClean="0">
+                              <a:solidFill>
+                                <a:srgbClr val="E622EB"/>
+                              </a:solidFill>
+                              <a:latin typeface="Cambria Math" panose="02040503050406030204" pitchFamily="18" charset="0"/>
+                            </a:rPr>
+                            <m:t>0</m:t>
+                          </m:r>
+                        </m:e>
+                        <m:sup>
+                          <m:r>
+                            <a:rPr lang="sv-SE" b="0" i="1" smtClean="0">
+                              <a:solidFill>
+                                <a:srgbClr val="E622EB"/>
+                              </a:solidFill>
+                              <a:latin typeface="Cambria Math" panose="02040503050406030204" pitchFamily="18" charset="0"/>
+                            </a:rPr>
+                            <m:t>𝑜</m:t>
+                          </m:r>
+                        </m:sup>
+                      </m:sSup>
+                    </m:oMath>
+                  </m:oMathPara>
+                </a14:m>
+                <a:endParaRPr lang="sv-SE" dirty="0"/>
+              </a:p>
+            </p:txBody>
+          </p:sp>
+        </mc:Choice>
+        <mc:Fallback>
+          <p:sp>
+            <p:nvSpPr>
+              <p:cNvPr id="126" name="Rectangle 125"/>
+              <p:cNvSpPr>
+                <a:spLocks noRot="1" noChangeAspect="1" noMove="1" noResize="1" noEditPoints="1" noAdjustHandles="1" noChangeArrowheads="1" noChangeShapeType="1" noTextEdit="1"/>
+              </p:cNvSpPr>
+              <p:nvPr/>
+            </p:nvSpPr>
+            <p:spPr>
+              <a:xfrm>
+                <a:off x="9642013" y="2560134"/>
+                <a:ext cx="1423851" cy="369332"/>
+              </a:xfrm>
+              <a:prstGeom prst="rect">
+                <a:avLst/>
+              </a:prstGeom>
+              <a:blipFill>
+                <a:blip r:embed="rId27"/>
+                <a:stretch>
+                  <a:fillRect b="-11475"/>
+                </a:stretch>
+              </a:blipFill>
+            </p:spPr>
+            <p:txBody>
+              <a:bodyPr/>
+              <a:lstStyle/>
+              <a:p>
+                <a:r>
+                  <a:rPr lang="sv-SE">
+                    <a:noFill/>
+                  </a:rPr>
+                  <a:t> </a:t>
+                </a:r>
+              </a:p>
+            </p:txBody>
+          </p:sp>
+        </mc:Fallback>
+      </mc:AlternateContent>
+      <mc:AlternateContent xmlns:mc="http://schemas.openxmlformats.org/markup-compatibility/2006">
+        <mc:Choice xmlns:a14="http://schemas.microsoft.com/office/drawing/2010/main" Requires="a14">
+          <p:sp>
+            <p:nvSpPr>
+              <p:cNvPr id="127" name="Rectangle 126"/>
+              <p:cNvSpPr/>
+              <p:nvPr/>
+            </p:nvSpPr>
+            <p:spPr>
+              <a:xfrm>
+                <a:off x="9642013" y="2811304"/>
+                <a:ext cx="1159035" cy="369332"/>
+              </a:xfrm>
+              <a:prstGeom prst="rect">
+                <a:avLst/>
+              </a:prstGeom>
+            </p:spPr>
+            <p:txBody>
+              <a:bodyPr wrap="none">
+                <a:spAutoFit/>
+              </a:bodyPr>
+              <a:lstStyle/>
+              <a:p>
+                <a14:m>
+                  <m:oMathPara xmlns:m="http://schemas.openxmlformats.org/officeDocument/2006/math">
+                    <m:oMathParaPr>
+                      <m:jc m:val="centerGroup"/>
+                    </m:oMathParaPr>
+                    <m:oMath xmlns:m="http://schemas.openxmlformats.org/officeDocument/2006/math">
+                      <m:sSub>
+                        <m:sSubPr>
+                          <m:ctrlPr>
+                            <a:rPr lang="en-US" i="1" smtClean="0">
+                              <a:solidFill>
+                                <a:srgbClr val="92D050"/>
+                              </a:solidFill>
+                              <a:latin typeface="Cambria Math" panose="02040503050406030204" pitchFamily="18" charset="0"/>
+                            </a:rPr>
+                          </m:ctrlPr>
+                        </m:sSubPr>
+                        <m:e>
+                          <m:r>
+                            <a:rPr lang="en-US" i="1">
+                              <a:solidFill>
+                                <a:srgbClr val="92D050"/>
+                              </a:solidFill>
+                              <a:latin typeface="Cambria Math" panose="02040503050406030204" pitchFamily="18" charset="0"/>
+                            </a:rPr>
+                            <m:t>𝜙</m:t>
+                          </m:r>
+                        </m:e>
+                        <m:sub>
+                          <m:r>
+                            <a:rPr lang="en-US" i="1">
+                              <a:solidFill>
+                                <a:srgbClr val="92D050"/>
+                              </a:solidFill>
+                              <a:latin typeface="Cambria Math" panose="02040503050406030204" pitchFamily="18" charset="0"/>
+                            </a:rPr>
+                            <m:t>𝐶</m:t>
+                          </m:r>
+                          <m:r>
+                            <a:rPr lang="en-US" i="1">
+                              <a:solidFill>
+                                <a:srgbClr val="92D050"/>
+                              </a:solidFill>
+                              <a:latin typeface="Cambria Math" panose="02040503050406030204" pitchFamily="18" charset="0"/>
+                            </a:rPr>
+                            <m:t>𝐶</m:t>
+                          </m:r>
+                        </m:sub>
+                      </m:sSub>
+                      <m:r>
+                        <a:rPr lang="sv-SE" b="0" i="1" smtClean="0">
+                          <a:solidFill>
+                            <a:srgbClr val="92D050"/>
+                          </a:solidFill>
+                          <a:latin typeface="Cambria Math" panose="02040503050406030204" pitchFamily="18" charset="0"/>
+                        </a:rPr>
+                        <m:t>=</m:t>
+                      </m:r>
+                      <m:sSup>
+                        <m:sSupPr>
+                          <m:ctrlPr>
+                            <a:rPr lang="sv-SE" b="0" i="1" smtClean="0">
+                              <a:solidFill>
+                                <a:srgbClr val="92D050"/>
+                              </a:solidFill>
+                              <a:latin typeface="Cambria Math" panose="02040503050406030204" pitchFamily="18" charset="0"/>
+                            </a:rPr>
+                          </m:ctrlPr>
+                        </m:sSupPr>
+                        <m:e>
+                          <m:r>
+                            <a:rPr lang="sv-SE" b="0" i="1" smtClean="0">
+                              <a:solidFill>
+                                <a:srgbClr val="92D050"/>
+                              </a:solidFill>
+                              <a:latin typeface="Cambria Math" panose="02040503050406030204" pitchFamily="18" charset="0"/>
+                            </a:rPr>
+                            <m:t>1</m:t>
+                          </m:r>
+                        </m:e>
+                        <m:sup>
+                          <m:r>
+                            <a:rPr lang="sv-SE" b="0" i="1" smtClean="0">
+                              <a:solidFill>
+                                <a:srgbClr val="92D050"/>
+                              </a:solidFill>
+                              <a:latin typeface="Cambria Math" panose="02040503050406030204" pitchFamily="18" charset="0"/>
+                            </a:rPr>
+                            <m:t>𝑜</m:t>
+                          </m:r>
+                        </m:sup>
+                      </m:sSup>
+                    </m:oMath>
+                  </m:oMathPara>
+                </a14:m>
+                <a:endParaRPr lang="sv-SE" dirty="0"/>
+              </a:p>
+            </p:txBody>
+          </p:sp>
+        </mc:Choice>
+        <mc:Fallback>
+          <p:sp>
+            <p:nvSpPr>
+              <p:cNvPr id="127" name="Rectangle 126"/>
+              <p:cNvSpPr>
+                <a:spLocks noRot="1" noChangeAspect="1" noMove="1" noResize="1" noEditPoints="1" noAdjustHandles="1" noChangeArrowheads="1" noChangeShapeType="1" noTextEdit="1"/>
+              </p:cNvSpPr>
+              <p:nvPr/>
+            </p:nvSpPr>
+            <p:spPr>
+              <a:xfrm>
+                <a:off x="9642013" y="2811304"/>
+                <a:ext cx="1159035" cy="369332"/>
+              </a:xfrm>
+              <a:prstGeom prst="rect">
+                <a:avLst/>
+              </a:prstGeom>
+              <a:blipFill>
+                <a:blip r:embed="rId28"/>
+                <a:stretch>
+                  <a:fillRect b="-11475"/>
+                </a:stretch>
+              </a:blipFill>
+            </p:spPr>
+            <p:txBody>
+              <a:bodyPr/>
+              <a:lstStyle/>
+              <a:p>
+                <a:r>
+                  <a:rPr lang="sv-SE">
+                    <a:noFill/>
+                  </a:rPr>
+                  <a:t> </a:t>
+                </a:r>
+              </a:p>
+            </p:txBody>
+          </p:sp>
+        </mc:Fallback>
+      </mc:AlternateContent>
+      <p:sp>
+        <p:nvSpPr>
+          <p:cNvPr id="128" name="TextBox 127"/>
+          <p:cNvSpPr txBox="1"/>
+          <p:nvPr/>
+        </p:nvSpPr>
+        <p:spPr>
+          <a:xfrm>
+            <a:off x="10046869" y="3490631"/>
+            <a:ext cx="714541" cy="369332"/>
+          </a:xfrm>
+          <a:prstGeom prst="rect">
+            <a:avLst/>
+          </a:prstGeom>
+          <a:noFill/>
+        </p:spPr>
+        <p:txBody>
+          <a:bodyPr wrap="square" rtlCol="0">
+            <a:spAutoFit/>
+          </a:bodyPr>
+          <a:lstStyle/>
+          <a:p>
+            <a:r>
+              <a:rPr lang="en-US" dirty="0" smtClean="0"/>
+              <a:t>(d)</a:t>
+            </a:r>
+            <a:endParaRPr lang="sv-SE" dirty="0"/>
+          </a:p>
+        </p:txBody>
+      </p:sp>
+    </p:spTree>
+    <p:extLst>
+      <p:ext uri="{BB962C8B-B14F-4D97-AF65-F5344CB8AC3E}">
+        <p14:creationId xmlns:p14="http://schemas.microsoft.com/office/powerpoint/2010/main" val="1829853619"/>
       </p:ext>
     </p:extLst>
   </p:cSld>
@@ -18909,7 +28248,13 @@
                       <a:rPr lang="en-US" b="0" i="1" smtClean="0">
                         <a:latin typeface="Cambria Math" panose="02040503050406030204" pitchFamily="18" charset="0"/>
                       </a:rPr>
-                      <m:t>−2</m:t>
+                      <m:t>−</m:t>
+                    </m:r>
+                    <m:r>
+                      <a:rPr lang="en-US" b="0" i="1" smtClean="0">
+                        <a:latin typeface="Cambria Math" panose="02040503050406030204" pitchFamily="18" charset="0"/>
+                      </a:rPr>
+                      <m:t>2</m:t>
                     </m:r>
                     <m:sSub>
                       <m:sSubPr>
@@ -19048,7 +28393,13 @@
                         <a:rPr lang="en-US" b="0" i="1" smtClean="0">
                           <a:latin typeface="Cambria Math" panose="02040503050406030204" pitchFamily="18" charset="0"/>
                         </a:rPr>
-                        <m:t>+2</m:t>
+                        <m:t>+</m:t>
+                      </m:r>
+                      <m:r>
+                        <a:rPr lang="en-US" b="0" i="1" smtClean="0">
+                          <a:latin typeface="Cambria Math" panose="02040503050406030204" pitchFamily="18" charset="0"/>
+                        </a:rPr>
+                        <m:t>2</m:t>
                       </m:r>
                       <m:sSub>
                         <m:sSubPr>
